--- a/backend-engineering/slides/01_Foundations.pptx
+++ b/backend-engineering/slides/01_Foundations.pptx
@@ -398,7 +398,7 @@
             <a:pPr indent="0" algn="r">
               <a:buNone/>
             </a:pPr>
-            <a:fld id="{01E3CD55-D2B6-4647-8888-37DE369569A2}" type="slidenum">
+            <a:fld id="{A7AB5688-51DC-466F-AB99-1B2F91036ACA}" type="slidenum">
               <a:rPr lang="en-IN" sz="1400" b="0" u="none" strike="noStrike">
                 <a:solidFill>
                   <a:srgbClr val="000000"/>
@@ -445,7 +445,7 @@
       </p:grpSpPr>
       <p:sp>
         <p:nvSpPr>
-          <p:cNvPr id="470" name="PlaceHolder 1"/>
+          <p:cNvPr id="468" name="PlaceHolder 1"/>
           <p:cNvSpPr>
             <a:spLocks noGrp="1"/>
           </p:cNvSpPr>
@@ -468,7 +468,7 @@
       </p:sp>
       <p:sp>
         <p:nvSpPr>
-          <p:cNvPr id="471" name="PlaceHolder 2"/>
+          <p:cNvPr id="469" name="PlaceHolder 2"/>
           <p:cNvSpPr>
             <a:spLocks noGrp="1"/>
           </p:cNvSpPr>
@@ -524,7 +524,7 @@
       </p:sp>
       <p:sp>
         <p:nvSpPr>
-          <p:cNvPr id="472" name="PlaceHolder 3"/>
+          <p:cNvPr id="470" name="PlaceHolder 3"/>
           <p:cNvSpPr>
             <a:spLocks noGrp="1"/>
           </p:cNvSpPr>
@@ -573,7 +573,7 @@
               </a:lnSpc>
               <a:buNone/>
             </a:pPr>
-            <a:fld id="{41441519-94D7-435F-A6B6-A066A4C68226}" type="slidenum">
+            <a:fld id="{9131D109-36B7-4BE6-9E2B-F0139DAD9994}" type="slidenum">
               <a:rPr lang="en-US" sz="1200" b="0" u="none" strike="noStrike">
                 <a:solidFill>
                   <a:schemeClr val="dk1"/>
@@ -620,7 +620,7 @@
       </p:grpSpPr>
       <p:sp>
         <p:nvSpPr>
-          <p:cNvPr id="497" name="PlaceHolder 1"/>
+          <p:cNvPr id="495" name="PlaceHolder 1"/>
           <p:cNvSpPr>
             <a:spLocks noGrp="1"/>
           </p:cNvSpPr>
@@ -643,7 +643,7 @@
       </p:sp>
       <p:sp>
         <p:nvSpPr>
-          <p:cNvPr id="498" name="PlaceHolder 2"/>
+          <p:cNvPr id="496" name="PlaceHolder 2"/>
           <p:cNvSpPr>
             <a:spLocks noGrp="1"/>
           </p:cNvSpPr>
@@ -699,7 +699,7 @@
       </p:sp>
       <p:sp>
         <p:nvSpPr>
-          <p:cNvPr id="499" name="PlaceHolder 3"/>
+          <p:cNvPr id="497" name="PlaceHolder 3"/>
           <p:cNvSpPr>
             <a:spLocks noGrp="1"/>
           </p:cNvSpPr>
@@ -748,7 +748,7 @@
               </a:lnSpc>
               <a:buNone/>
             </a:pPr>
-            <a:fld id="{AE33706C-CAD6-4345-A359-9AB4B273EBB3}" type="slidenum">
+            <a:fld id="{CF99F1B5-E5C5-47D5-AD73-4F8F4DBD73F2}" type="slidenum">
               <a:rPr lang="en-US" sz="1200" b="0" u="none" strike="noStrike">
                 <a:solidFill>
                   <a:schemeClr val="dk1"/>
@@ -795,7 +795,7 @@
       </p:grpSpPr>
       <p:sp>
         <p:nvSpPr>
-          <p:cNvPr id="500" name="PlaceHolder 1"/>
+          <p:cNvPr id="498" name="PlaceHolder 1"/>
           <p:cNvSpPr>
             <a:spLocks noGrp="1"/>
           </p:cNvSpPr>
@@ -818,7 +818,7 @@
       </p:sp>
       <p:sp>
         <p:nvSpPr>
-          <p:cNvPr id="501" name="PlaceHolder 2"/>
+          <p:cNvPr id="499" name="PlaceHolder 2"/>
           <p:cNvSpPr>
             <a:spLocks noGrp="1"/>
           </p:cNvSpPr>
@@ -859,7 +859,7 @@
                 <a:uFillTx/>
                 <a:latin typeface="Arial"/>
               </a:rPr>
-              <a:t>This slide prevents a very common beginner disease: inheriting from everything. Give them the test as a sentence they can say out loud - 'is a' or 'has a' - and make them apply it to the Library exercise coming up. The last line is a deliberate seed for module 3; when you build a foreign key in two sessions, point back at this slide and say 'this is that'.</a:t>
+              <a:t>This slide prevents a very common beginner disease: inheriting from everything. Give them the test as a sentence they can say out loud - 'is a' or 'has a' - and make them apply it to the Library exercise coming up. The last line is a deliberate seed for module 2; when you build a foreign key next session, point back at this slide and say 'this is that'.</a:t>
             </a:r>
             <a:endParaRPr lang="en-IN" sz="2000" b="0" u="none" strike="noStrike">
               <a:solidFill>
@@ -874,7 +874,7 @@
       </p:sp>
       <p:sp>
         <p:nvSpPr>
-          <p:cNvPr id="502" name="PlaceHolder 3"/>
+          <p:cNvPr id="500" name="PlaceHolder 3"/>
           <p:cNvSpPr>
             <a:spLocks noGrp="1"/>
           </p:cNvSpPr>
@@ -923,7 +923,7 @@
               </a:lnSpc>
               <a:buNone/>
             </a:pPr>
-            <a:fld id="{B3645E56-21F7-4023-8189-30D61CF328F0}" type="slidenum">
+            <a:fld id="{F00BA371-C6EE-4065-AF71-FC09A0FFAF70}" type="slidenum">
               <a:rPr lang="en-US" sz="1200" b="0" u="none" strike="noStrike">
                 <a:solidFill>
                   <a:schemeClr val="dk1"/>
@@ -970,7 +970,7 @@
       </p:grpSpPr>
       <p:sp>
         <p:nvSpPr>
-          <p:cNvPr id="503" name="PlaceHolder 1"/>
+          <p:cNvPr id="501" name="PlaceHolder 1"/>
           <p:cNvSpPr>
             <a:spLocks noGrp="1"/>
           </p:cNvSpPr>
@@ -993,7 +993,7 @@
       </p:sp>
       <p:sp>
         <p:nvSpPr>
-          <p:cNvPr id="504" name="PlaceHolder 2"/>
+          <p:cNvPr id="502" name="PlaceHolder 2"/>
           <p:cNvSpPr>
             <a:spLocks noGrp="1"/>
           </p:cNvSpPr>
@@ -1049,7 +1049,7 @@
       </p:sp>
       <p:sp>
         <p:nvSpPr>
-          <p:cNvPr id="505" name="PlaceHolder 3"/>
+          <p:cNvPr id="503" name="PlaceHolder 3"/>
           <p:cNvSpPr>
             <a:spLocks noGrp="1"/>
           </p:cNvSpPr>
@@ -1098,7 +1098,7 @@
               </a:lnSpc>
               <a:buNone/>
             </a:pPr>
-            <a:fld id="{9D5EDA91-902C-4E0F-99B4-6582FFA27854}" type="slidenum">
+            <a:fld id="{38F395EB-5A1C-4973-BD91-CC7D10A2846A}" type="slidenum">
               <a:rPr lang="en-US" sz="1200" b="0" u="none" strike="noStrike">
                 <a:solidFill>
                   <a:schemeClr val="dk1"/>
@@ -1145,7 +1145,7 @@
       </p:grpSpPr>
       <p:sp>
         <p:nvSpPr>
-          <p:cNvPr id="506" name="PlaceHolder 1"/>
+          <p:cNvPr id="504" name="PlaceHolder 1"/>
           <p:cNvSpPr>
             <a:spLocks noGrp="1"/>
           </p:cNvSpPr>
@@ -1168,7 +1168,7 @@
       </p:sp>
       <p:sp>
         <p:nvSpPr>
-          <p:cNvPr id="507" name="PlaceHolder 2"/>
+          <p:cNvPr id="505" name="PlaceHolder 2"/>
           <p:cNvSpPr>
             <a:spLocks noGrp="1"/>
           </p:cNvSpPr>
@@ -1209,7 +1209,7 @@
                 <a:uFillTx/>
                 <a:latin typeface="Arial"/>
               </a:rPr>
-              <a:t>Answer: B - composition, has-a. A student is not a kind of course, so inheritance (A) would be wrong and would give Student every method a Course has, which is nonsense. It is not polymorphism (C) - nothing is being overridden - and not encapsulation (D), though the list may well be kept private too. Discussion prompt: 'name one thing in this room that IS-A something else, and one thing that HAS-A something else.' Then: this exact shape is what a database calls a relationship, and we build it in module 3.</a:t>
+              <a:t>Answer: B - composition, has-a. A student is not a kind of course, so inheritance (A) would be wrong and would give Student every method a Course has, which is nonsense. It is not polymorphism (C) - nothing is being overridden - and not encapsulation (D), though the list may well be kept private too. Discussion prompt: 'name one thing in this room that IS-A something else, and one thing that HAS-A something else.' Then: this exact shape is what a database calls a relationship, and we build it in module 2.</a:t>
             </a:r>
             <a:endParaRPr lang="en-IN" sz="2000" b="0" u="none" strike="noStrike">
               <a:solidFill>
@@ -1224,7 +1224,7 @@
       </p:sp>
       <p:sp>
         <p:nvSpPr>
-          <p:cNvPr id="508" name="PlaceHolder 3"/>
+          <p:cNvPr id="506" name="PlaceHolder 3"/>
           <p:cNvSpPr>
             <a:spLocks noGrp="1"/>
           </p:cNvSpPr>
@@ -1273,7 +1273,7 @@
               </a:lnSpc>
               <a:buNone/>
             </a:pPr>
-            <a:fld id="{308C2D31-98FD-4678-BC8D-DA1F88E6DB8B}" type="slidenum">
+            <a:fld id="{69EFC53D-FB96-4910-B1E9-D0BF289695E1}" type="slidenum">
               <a:rPr lang="en-US" sz="1200" b="0" u="none" strike="noStrike">
                 <a:solidFill>
                   <a:schemeClr val="dk1"/>
@@ -1320,7 +1320,7 @@
       </p:grpSpPr>
       <p:sp>
         <p:nvSpPr>
-          <p:cNvPr id="509" name="PlaceHolder 1"/>
+          <p:cNvPr id="507" name="PlaceHolder 1"/>
           <p:cNvSpPr>
             <a:spLocks noGrp="1"/>
           </p:cNvSpPr>
@@ -1343,7 +1343,7 @@
       </p:sp>
       <p:sp>
         <p:nvSpPr>
-          <p:cNvPr id="510" name="PlaceHolder 2"/>
+          <p:cNvPr id="508" name="PlaceHolder 2"/>
           <p:cNvSpPr>
             <a:spLocks noGrp="1"/>
           </p:cNvSpPr>
@@ -1399,7 +1399,7 @@
       </p:sp>
       <p:sp>
         <p:nvSpPr>
-          <p:cNvPr id="511" name="PlaceHolder 3"/>
+          <p:cNvPr id="509" name="PlaceHolder 3"/>
           <p:cNvSpPr>
             <a:spLocks noGrp="1"/>
           </p:cNvSpPr>
@@ -1448,7 +1448,7 @@
               </a:lnSpc>
               <a:buNone/>
             </a:pPr>
-            <a:fld id="{5FBA6199-9BFA-4161-88F7-4C57E13705AC}" type="slidenum">
+            <a:fld id="{DDDDB0C2-E0CA-4134-99E8-6733CE4F29EE}" type="slidenum">
               <a:rPr lang="en-US" sz="1200" b="0" u="none" strike="noStrike">
                 <a:solidFill>
                   <a:schemeClr val="dk1"/>
@@ -1495,7 +1495,7 @@
       </p:grpSpPr>
       <p:sp>
         <p:nvSpPr>
-          <p:cNvPr id="512" name="PlaceHolder 1"/>
+          <p:cNvPr id="510" name="PlaceHolder 1"/>
           <p:cNvSpPr>
             <a:spLocks noGrp="1"/>
           </p:cNvSpPr>
@@ -1518,7 +1518,7 @@
       </p:sp>
       <p:sp>
         <p:nvSpPr>
-          <p:cNvPr id="513" name="PlaceHolder 2"/>
+          <p:cNvPr id="511" name="PlaceHolder 2"/>
           <p:cNvSpPr>
             <a:spLocks noGrp="1"/>
           </p:cNvSpPr>
@@ -1574,7 +1574,7 @@
       </p:sp>
       <p:sp>
         <p:nvSpPr>
-          <p:cNvPr id="514" name="PlaceHolder 3"/>
+          <p:cNvPr id="512" name="PlaceHolder 3"/>
           <p:cNvSpPr>
             <a:spLocks noGrp="1"/>
           </p:cNvSpPr>
@@ -1623,7 +1623,7 @@
               </a:lnSpc>
               <a:buNone/>
             </a:pPr>
-            <a:fld id="{66348343-D19F-486E-920D-1C86985B450A}" type="slidenum">
+            <a:fld id="{F7C95097-05C0-4779-910C-DC965DB8853D}" type="slidenum">
               <a:rPr lang="en-US" sz="1200" b="0" u="none" strike="noStrike">
                 <a:solidFill>
                   <a:schemeClr val="dk1"/>
@@ -1670,7 +1670,7 @@
       </p:grpSpPr>
       <p:sp>
         <p:nvSpPr>
-          <p:cNvPr id="515" name="PlaceHolder 1"/>
+          <p:cNvPr id="513" name="PlaceHolder 1"/>
           <p:cNvSpPr>
             <a:spLocks noGrp="1"/>
           </p:cNvSpPr>
@@ -1693,7 +1693,7 @@
       </p:sp>
       <p:sp>
         <p:nvSpPr>
-          <p:cNvPr id="516" name="PlaceHolder 2"/>
+          <p:cNvPr id="514" name="PlaceHolder 2"/>
           <p:cNvSpPr>
             <a:spLocks noGrp="1"/>
           </p:cNvSpPr>
@@ -1749,7 +1749,7 @@
       </p:sp>
       <p:sp>
         <p:nvSpPr>
-          <p:cNvPr id="517" name="PlaceHolder 3"/>
+          <p:cNvPr id="515" name="PlaceHolder 3"/>
           <p:cNvSpPr>
             <a:spLocks noGrp="1"/>
           </p:cNvSpPr>
@@ -1798,7 +1798,7 @@
               </a:lnSpc>
               <a:buNone/>
             </a:pPr>
-            <a:fld id="{F52E048C-066D-4E5B-B9CF-DA9A4CD217C0}" type="slidenum">
+            <a:fld id="{07C2B020-B00C-4F60-A77F-D4B9D73AEE3D}" type="slidenum">
               <a:rPr lang="en-US" sz="1200" b="0" u="none" strike="noStrike">
                 <a:solidFill>
                   <a:schemeClr val="dk1"/>
@@ -1845,7 +1845,7 @@
       </p:grpSpPr>
       <p:sp>
         <p:nvSpPr>
-          <p:cNvPr id="518" name="PlaceHolder 1"/>
+          <p:cNvPr id="516" name="PlaceHolder 1"/>
           <p:cNvSpPr>
             <a:spLocks noGrp="1"/>
           </p:cNvSpPr>
@@ -1868,7 +1868,7 @@
       </p:sp>
       <p:sp>
         <p:nvSpPr>
-          <p:cNvPr id="519" name="PlaceHolder 2"/>
+          <p:cNvPr id="517" name="PlaceHolder 2"/>
           <p:cNvSpPr>
             <a:spLocks noGrp="1"/>
           </p:cNvSpPr>
@@ -1924,7 +1924,7 @@
       </p:sp>
       <p:sp>
         <p:nvSpPr>
-          <p:cNvPr id="520" name="PlaceHolder 3"/>
+          <p:cNvPr id="518" name="PlaceHolder 3"/>
           <p:cNvSpPr>
             <a:spLocks noGrp="1"/>
           </p:cNvSpPr>
@@ -1973,7 +1973,7 @@
               </a:lnSpc>
               <a:buNone/>
             </a:pPr>
-            <a:fld id="{71607359-D364-48D2-B110-62B858B0EBCB}" type="slidenum">
+            <a:fld id="{3B451C6E-A9CF-451F-8383-CDAC5F6B999F}" type="slidenum">
               <a:rPr lang="en-US" sz="1200" b="0" u="none" strike="noStrike">
                 <a:solidFill>
                   <a:schemeClr val="dk1"/>
@@ -2020,7 +2020,7 @@
       </p:grpSpPr>
       <p:sp>
         <p:nvSpPr>
-          <p:cNvPr id="521" name="PlaceHolder 1"/>
+          <p:cNvPr id="519" name="PlaceHolder 1"/>
           <p:cNvSpPr>
             <a:spLocks noGrp="1"/>
           </p:cNvSpPr>
@@ -2043,7 +2043,7 @@
       </p:sp>
       <p:sp>
         <p:nvSpPr>
-          <p:cNvPr id="522" name="PlaceHolder 2"/>
+          <p:cNvPr id="520" name="PlaceHolder 2"/>
           <p:cNvSpPr>
             <a:spLocks noGrp="1"/>
           </p:cNvSpPr>
@@ -2099,7 +2099,7 @@
       </p:sp>
       <p:sp>
         <p:nvSpPr>
-          <p:cNvPr id="523" name="PlaceHolder 3"/>
+          <p:cNvPr id="521" name="PlaceHolder 3"/>
           <p:cNvSpPr>
             <a:spLocks noGrp="1"/>
           </p:cNvSpPr>
@@ -2148,7 +2148,7 @@
               </a:lnSpc>
               <a:buNone/>
             </a:pPr>
-            <a:fld id="{7BAD9856-F9B0-4578-8AFC-B9AB892F24E0}" type="slidenum">
+            <a:fld id="{FBE47988-833E-46B4-9496-3326F162AEA2}" type="slidenum">
               <a:rPr lang="en-US" sz="1200" b="0" u="none" strike="noStrike">
                 <a:solidFill>
                   <a:schemeClr val="dk1"/>
@@ -2195,7 +2195,7 @@
       </p:grpSpPr>
       <p:sp>
         <p:nvSpPr>
-          <p:cNvPr id="524" name="PlaceHolder 1"/>
+          <p:cNvPr id="522" name="PlaceHolder 1"/>
           <p:cNvSpPr>
             <a:spLocks noGrp="1"/>
           </p:cNvSpPr>
@@ -2218,7 +2218,7 @@
       </p:sp>
       <p:sp>
         <p:nvSpPr>
-          <p:cNvPr id="525" name="PlaceHolder 2"/>
+          <p:cNvPr id="523" name="PlaceHolder 2"/>
           <p:cNvSpPr>
             <a:spLocks noGrp="1"/>
           </p:cNvSpPr>
@@ -2274,7 +2274,7 @@
       </p:sp>
       <p:sp>
         <p:nvSpPr>
-          <p:cNvPr id="526" name="PlaceHolder 3"/>
+          <p:cNvPr id="524" name="PlaceHolder 3"/>
           <p:cNvSpPr>
             <a:spLocks noGrp="1"/>
           </p:cNvSpPr>
@@ -2323,7 +2323,7 @@
               </a:lnSpc>
               <a:buNone/>
             </a:pPr>
-            <a:fld id="{5207F8CA-E5C7-489F-A786-885DACB9607F}" type="slidenum">
+            <a:fld id="{C8C2218D-6AF3-4806-80C9-E1B887222EEB}" type="slidenum">
               <a:rPr lang="en-US" sz="1200" b="0" u="none" strike="noStrike">
                 <a:solidFill>
                   <a:schemeClr val="dk1"/>
@@ -2370,7 +2370,7 @@
       </p:grpSpPr>
       <p:sp>
         <p:nvSpPr>
-          <p:cNvPr id="473" name="PlaceHolder 1"/>
+          <p:cNvPr id="471" name="PlaceHolder 1"/>
           <p:cNvSpPr>
             <a:spLocks noGrp="1"/>
           </p:cNvSpPr>
@@ -2393,7 +2393,7 @@
       </p:sp>
       <p:sp>
         <p:nvSpPr>
-          <p:cNvPr id="474" name="PlaceHolder 2"/>
+          <p:cNvPr id="472" name="PlaceHolder 2"/>
           <p:cNvSpPr>
             <a:spLocks noGrp="1"/>
           </p:cNvSpPr>
@@ -2449,7 +2449,7 @@
       </p:sp>
       <p:sp>
         <p:nvSpPr>
-          <p:cNvPr id="475" name="PlaceHolder 3"/>
+          <p:cNvPr id="473" name="PlaceHolder 3"/>
           <p:cNvSpPr>
             <a:spLocks noGrp="1"/>
           </p:cNvSpPr>
@@ -2498,7 +2498,7 @@
               </a:lnSpc>
               <a:buNone/>
             </a:pPr>
-            <a:fld id="{113E8EF7-19C6-4632-A329-06A2D2EF9E29}" type="slidenum">
+            <a:fld id="{8A71C149-AC1F-44E9-945B-AE79366A4EC3}" type="slidenum">
               <a:rPr lang="en-US" sz="1200" b="0" u="none" strike="noStrike">
                 <a:solidFill>
                   <a:schemeClr val="dk1"/>
@@ -2545,7 +2545,7 @@
       </p:grpSpPr>
       <p:sp>
         <p:nvSpPr>
-          <p:cNvPr id="527" name="PlaceHolder 1"/>
+          <p:cNvPr id="525" name="PlaceHolder 1"/>
           <p:cNvSpPr>
             <a:spLocks noGrp="1"/>
           </p:cNvSpPr>
@@ -2568,7 +2568,7 @@
       </p:sp>
       <p:sp>
         <p:nvSpPr>
-          <p:cNvPr id="528" name="PlaceHolder 2"/>
+          <p:cNvPr id="526" name="PlaceHolder 2"/>
           <p:cNvSpPr>
             <a:spLocks noGrp="1"/>
           </p:cNvSpPr>
@@ -2609,7 +2609,7 @@
                 <a:uFillTx/>
                 <a:latin typeface="Arial"/>
               </a:rPr>
-              <a:t>THE moment of the day. Run it live, then make EVERY student click Try it out -&gt; Execute on /health before you say another word. Walk the room. Two habits to establish right now: (1) ban the URL bar - it can only do GET, and the moment they need POST it is useless; (2) fastapi dev reloads on save - prove it by editing the message and refreshing, so they stop restarting by hand and know to check the terminal when a change does not appear. If someone asks why their friend cannot open 127.0.0.1 - it means THIS machine, the server is only listening to itself. That is a module 4 problem; name it and park it.</a:t>
+              <a:t>THE moment of the day. Run it live, then make EVERY student click Try it out -&gt; Execute on /health before you say another word. Walk the room. Two habits to establish right now: (1) ban the URL bar - it can only do GET, and the moment they need POST it is useless; (2) fastapi dev reloads on save - prove it by editing the message and refreshing, so they stop restarting by hand and know to check the terminal when a change does not appear. If someone asks why their friend cannot open 127.0.0.1 - it means THIS machine, the server is only listening to itself. That is a module 3 problem; name it and park it.</a:t>
             </a:r>
             <a:endParaRPr lang="en-IN" sz="2000" b="0" u="none" strike="noStrike">
               <a:solidFill>
@@ -2624,7 +2624,7 @@
       </p:sp>
       <p:sp>
         <p:nvSpPr>
-          <p:cNvPr id="529" name="PlaceHolder 3"/>
+          <p:cNvPr id="527" name="PlaceHolder 3"/>
           <p:cNvSpPr>
             <a:spLocks noGrp="1"/>
           </p:cNvSpPr>
@@ -2673,7 +2673,7 @@
               </a:lnSpc>
               <a:buNone/>
             </a:pPr>
-            <a:fld id="{7A2D6DAC-061A-4BCF-9922-3399D14701E6}" type="slidenum">
+            <a:fld id="{195DD92B-8EF6-49F9-AAC8-68F1640AA6E1}" type="slidenum">
               <a:rPr lang="en-US" sz="1200" b="0" u="none" strike="noStrike">
                 <a:solidFill>
                   <a:schemeClr val="dk1"/>
@@ -2720,7 +2720,7 @@
       </p:grpSpPr>
       <p:sp>
         <p:nvSpPr>
-          <p:cNvPr id="530" name="PlaceHolder 1"/>
+          <p:cNvPr id="528" name="PlaceHolder 1"/>
           <p:cNvSpPr>
             <a:spLocks noGrp="1"/>
           </p:cNvSpPr>
@@ -2743,7 +2743,7 @@
       </p:sp>
       <p:sp>
         <p:nvSpPr>
-          <p:cNvPr id="531" name="PlaceHolder 2"/>
+          <p:cNvPr id="529" name="PlaceHolder 2"/>
           <p:cNvSpPr>
             <a:spLocks noGrp="1"/>
           </p:cNvSpPr>
@@ -2799,7 +2799,7 @@
       </p:sp>
       <p:sp>
         <p:nvSpPr>
-          <p:cNvPr id="532" name="PlaceHolder 3"/>
+          <p:cNvPr id="530" name="PlaceHolder 3"/>
           <p:cNvSpPr>
             <a:spLocks noGrp="1"/>
           </p:cNvSpPr>
@@ -2848,7 +2848,7 @@
               </a:lnSpc>
               <a:buNone/>
             </a:pPr>
-            <a:fld id="{E59A61E6-571D-47FE-BEED-C9C47D0DB854}" type="slidenum">
+            <a:fld id="{BE15E4E2-7933-490F-833B-D0201A115F82}" type="slidenum">
               <a:rPr lang="en-US" sz="1200" b="0" u="none" strike="noStrike">
                 <a:solidFill>
                   <a:schemeClr val="dk1"/>
@@ -2895,7 +2895,7 @@
       </p:grpSpPr>
       <p:sp>
         <p:nvSpPr>
-          <p:cNvPr id="533" name="PlaceHolder 1"/>
+          <p:cNvPr id="531" name="PlaceHolder 1"/>
           <p:cNvSpPr>
             <a:spLocks noGrp="1"/>
           </p:cNvSpPr>
@@ -2918,7 +2918,7 @@
       </p:sp>
       <p:sp>
         <p:nvSpPr>
-          <p:cNvPr id="534" name="PlaceHolder 2"/>
+          <p:cNvPr id="532" name="PlaceHolder 2"/>
           <p:cNvSpPr>
             <a:spLocks noGrp="1"/>
           </p:cNvSpPr>
@@ -2974,7 +2974,7 @@
       </p:sp>
       <p:sp>
         <p:nvSpPr>
-          <p:cNvPr id="535" name="PlaceHolder 3"/>
+          <p:cNvPr id="533" name="PlaceHolder 3"/>
           <p:cNvSpPr>
             <a:spLocks noGrp="1"/>
           </p:cNvSpPr>
@@ -3023,7 +3023,7 @@
               </a:lnSpc>
               <a:buNone/>
             </a:pPr>
-            <a:fld id="{EDE0F78D-13BD-42B6-AB8E-1D155943FEE3}" type="slidenum">
+            <a:fld id="{401DDDE6-399F-4A56-8E7D-D8DD4D09D691}" type="slidenum">
               <a:rPr lang="en-US" sz="1200" b="0" u="none" strike="noStrike">
                 <a:solidFill>
                   <a:schemeClr val="dk1"/>
@@ -3070,7 +3070,7 @@
       </p:grpSpPr>
       <p:sp>
         <p:nvSpPr>
-          <p:cNvPr id="536" name="PlaceHolder 1"/>
+          <p:cNvPr id="534" name="PlaceHolder 1"/>
           <p:cNvSpPr>
             <a:spLocks noGrp="1"/>
           </p:cNvSpPr>
@@ -3093,7 +3093,7 @@
       </p:sp>
       <p:sp>
         <p:nvSpPr>
-          <p:cNvPr id="537" name="PlaceHolder 2"/>
+          <p:cNvPr id="535" name="PlaceHolder 2"/>
           <p:cNvSpPr>
             <a:spLocks noGrp="1"/>
           </p:cNvSpPr>
@@ -3149,7 +3149,7 @@
       </p:sp>
       <p:sp>
         <p:nvSpPr>
-          <p:cNvPr id="538" name="PlaceHolder 3"/>
+          <p:cNvPr id="536" name="PlaceHolder 3"/>
           <p:cNvSpPr>
             <a:spLocks noGrp="1"/>
           </p:cNvSpPr>
@@ -3198,7 +3198,7 @@
               </a:lnSpc>
               <a:buNone/>
             </a:pPr>
-            <a:fld id="{A52C9263-2FE7-4D3A-B1DF-5F4175D32ECC}" type="slidenum">
+            <a:fld id="{A26601FA-9839-447F-9C0F-3FB842E2125B}" type="slidenum">
               <a:rPr lang="en-US" sz="1200" b="0" u="none" strike="noStrike">
                 <a:solidFill>
                   <a:schemeClr val="dk1"/>
@@ -3245,7 +3245,7 @@
       </p:grpSpPr>
       <p:sp>
         <p:nvSpPr>
-          <p:cNvPr id="539" name="PlaceHolder 1"/>
+          <p:cNvPr id="537" name="PlaceHolder 1"/>
           <p:cNvSpPr>
             <a:spLocks noGrp="1"/>
           </p:cNvSpPr>
@@ -3268,7 +3268,7 @@
       </p:sp>
       <p:sp>
         <p:nvSpPr>
-          <p:cNvPr id="540" name="PlaceHolder 2"/>
+          <p:cNvPr id="538" name="PlaceHolder 2"/>
           <p:cNvSpPr>
             <a:spLocks noGrp="1"/>
           </p:cNvSpPr>
@@ -3324,7 +3324,7 @@
       </p:sp>
       <p:sp>
         <p:nvSpPr>
-          <p:cNvPr id="541" name="PlaceHolder 3"/>
+          <p:cNvPr id="539" name="PlaceHolder 3"/>
           <p:cNvSpPr>
             <a:spLocks noGrp="1"/>
           </p:cNvSpPr>
@@ -3373,7 +3373,7 @@
               </a:lnSpc>
               <a:buNone/>
             </a:pPr>
-            <a:fld id="{20D71547-B7EF-4C7C-BF30-746883488F1B}" type="slidenum">
+            <a:fld id="{47F1936A-FA87-41CC-AF1B-84CCDAB20552}" type="slidenum">
               <a:rPr lang="en-US" sz="1200" b="0" u="none" strike="noStrike">
                 <a:solidFill>
                   <a:schemeClr val="dk1"/>
@@ -3420,7 +3420,7 @@
       </p:grpSpPr>
       <p:sp>
         <p:nvSpPr>
-          <p:cNvPr id="542" name="PlaceHolder 1"/>
+          <p:cNvPr id="540" name="PlaceHolder 1"/>
           <p:cNvSpPr>
             <a:spLocks noGrp="1"/>
           </p:cNvSpPr>
@@ -3443,7 +3443,7 @@
       </p:sp>
       <p:sp>
         <p:nvSpPr>
-          <p:cNvPr id="543" name="PlaceHolder 2"/>
+          <p:cNvPr id="541" name="PlaceHolder 2"/>
           <p:cNvSpPr>
             <a:spLocks noGrp="1"/>
           </p:cNvSpPr>
@@ -3499,7 +3499,7 @@
       </p:sp>
       <p:sp>
         <p:nvSpPr>
-          <p:cNvPr id="544" name="PlaceHolder 3"/>
+          <p:cNvPr id="542" name="PlaceHolder 3"/>
           <p:cNvSpPr>
             <a:spLocks noGrp="1"/>
           </p:cNvSpPr>
@@ -3548,7 +3548,7 @@
               </a:lnSpc>
               <a:buNone/>
             </a:pPr>
-            <a:fld id="{9726D133-6E3D-4290-AF8D-013062754155}" type="slidenum">
+            <a:fld id="{F9859421-5347-4088-8CA4-0F3981E563DF}" type="slidenum">
               <a:rPr lang="en-US" sz="1200" b="0" u="none" strike="noStrike">
                 <a:solidFill>
                   <a:schemeClr val="dk1"/>
@@ -3595,7 +3595,7 @@
       </p:grpSpPr>
       <p:sp>
         <p:nvSpPr>
-          <p:cNvPr id="545" name="PlaceHolder 1"/>
+          <p:cNvPr id="543" name="PlaceHolder 1"/>
           <p:cNvSpPr>
             <a:spLocks noGrp="1"/>
           </p:cNvSpPr>
@@ -3618,7 +3618,7 @@
       </p:sp>
       <p:sp>
         <p:nvSpPr>
-          <p:cNvPr id="546" name="PlaceHolder 2"/>
+          <p:cNvPr id="544" name="PlaceHolder 2"/>
           <p:cNvSpPr>
             <a:spLocks noGrp="1"/>
           </p:cNvSpPr>
@@ -3674,7 +3674,7 @@
       </p:sp>
       <p:sp>
         <p:nvSpPr>
-          <p:cNvPr id="547" name="PlaceHolder 3"/>
+          <p:cNvPr id="545" name="PlaceHolder 3"/>
           <p:cNvSpPr>
             <a:spLocks noGrp="1"/>
           </p:cNvSpPr>
@@ -3723,7 +3723,7 @@
               </a:lnSpc>
               <a:buNone/>
             </a:pPr>
-            <a:fld id="{4DBB4AE3-3FC1-40B1-877F-B544BB79FBBD}" type="slidenum">
+            <a:fld id="{3B035966-D4DD-4500-8DAE-A715B6078C91}" type="slidenum">
               <a:rPr lang="en-US" sz="1200" b="0" u="none" strike="noStrike">
                 <a:solidFill>
                   <a:schemeClr val="dk1"/>
@@ -3770,7 +3770,7 @@
       </p:grpSpPr>
       <p:sp>
         <p:nvSpPr>
-          <p:cNvPr id="548" name="PlaceHolder 1"/>
+          <p:cNvPr id="546" name="PlaceHolder 1"/>
           <p:cNvSpPr>
             <a:spLocks noGrp="1"/>
           </p:cNvSpPr>
@@ -3793,7 +3793,7 @@
       </p:sp>
       <p:sp>
         <p:nvSpPr>
-          <p:cNvPr id="549" name="PlaceHolder 2"/>
+          <p:cNvPr id="547" name="PlaceHolder 2"/>
           <p:cNvSpPr>
             <a:spLocks noGrp="1"/>
           </p:cNvSpPr>
@@ -3849,7 +3849,7 @@
       </p:sp>
       <p:sp>
         <p:nvSpPr>
-          <p:cNvPr id="550" name="PlaceHolder 3"/>
+          <p:cNvPr id="548" name="PlaceHolder 3"/>
           <p:cNvSpPr>
             <a:spLocks noGrp="1"/>
           </p:cNvSpPr>
@@ -3898,7 +3898,7 @@
               </a:lnSpc>
               <a:buNone/>
             </a:pPr>
-            <a:fld id="{82AD3C8D-DF07-427C-9BBF-1AEE058F04CE}" type="slidenum">
+            <a:fld id="{51C1A91E-55A6-45F3-AD72-DC3A811D0DC1}" type="slidenum">
               <a:rPr lang="en-US" sz="1200" b="0" u="none" strike="noStrike">
                 <a:solidFill>
                   <a:schemeClr val="dk1"/>
@@ -3945,7 +3945,7 @@
       </p:grpSpPr>
       <p:sp>
         <p:nvSpPr>
-          <p:cNvPr id="551" name="PlaceHolder 1"/>
+          <p:cNvPr id="549" name="PlaceHolder 1"/>
           <p:cNvSpPr>
             <a:spLocks noGrp="1"/>
           </p:cNvSpPr>
@@ -3968,7 +3968,7 @@
       </p:sp>
       <p:sp>
         <p:nvSpPr>
-          <p:cNvPr id="552" name="PlaceHolder 2"/>
+          <p:cNvPr id="550" name="PlaceHolder 2"/>
           <p:cNvSpPr>
             <a:spLocks noGrp="1"/>
           </p:cNvSpPr>
@@ -4009,7 +4009,7 @@
                 <a:uFillTx/>
                 <a:latin typeface="Arial"/>
               </a:rPr>
-              <a:t>These three are the 'if time allows' block - each is a five minute demo and each is a genuine oh-that-is-clever moment. If you must cut, cut in reverse order: background tasks first, then middleware, keep Depends. Depends earns its place because it is how the database session arrives in module 3 and how every login works in module 4 - showing it now means neither is a surprise. CORS is worth 90 seconds even if you skip the rest: every student meets that bug in their capstone when their React app on port 3000 calls the API on 8000 and the browser blocks it.</a:t>
+              <a:t>These three are the 'if time allows' block - each is a five minute demo and each is a genuine oh-that-is-clever moment. If you must cut, cut in reverse order: background tasks first, then middleware, keep Depends. Depends earns its place because it is how the database session arrives in module 2 and how every login works in module 3 - showing it now means neither is a surprise. CORS is worth 90 seconds even if you skip the rest: every student meets that bug in their capstone when their React app on port 3000 calls the API on 8000 and the browser blocks it.</a:t>
             </a:r>
             <a:endParaRPr lang="en-IN" sz="2000" b="0" u="none" strike="noStrike">
               <a:solidFill>
@@ -4024,7 +4024,7 @@
       </p:sp>
       <p:sp>
         <p:nvSpPr>
-          <p:cNvPr id="553" name="PlaceHolder 3"/>
+          <p:cNvPr id="551" name="PlaceHolder 3"/>
           <p:cNvSpPr>
             <a:spLocks noGrp="1"/>
           </p:cNvSpPr>
@@ -4073,7 +4073,7 @@
               </a:lnSpc>
               <a:buNone/>
             </a:pPr>
-            <a:fld id="{ECC5FFCC-3340-43A0-BC8F-923564FF8593}" type="slidenum">
+            <a:fld id="{0F63010F-D198-4C8C-80CA-0564C6AAF8B7}" type="slidenum">
               <a:rPr lang="en-US" sz="1200" b="0" u="none" strike="noStrike">
                 <a:solidFill>
                   <a:schemeClr val="dk1"/>
@@ -4120,7 +4120,7 @@
       </p:grpSpPr>
       <p:sp>
         <p:nvSpPr>
-          <p:cNvPr id="554" name="PlaceHolder 1"/>
+          <p:cNvPr id="552" name="PlaceHolder 1"/>
           <p:cNvSpPr>
             <a:spLocks noGrp="1"/>
           </p:cNvSpPr>
@@ -4143,7 +4143,7 @@
       </p:sp>
       <p:sp>
         <p:nvSpPr>
-          <p:cNvPr id="555" name="PlaceHolder 2"/>
+          <p:cNvPr id="553" name="PlaceHolder 2"/>
           <p:cNvSpPr>
             <a:spLocks noGrp="1"/>
           </p:cNvSpPr>
@@ -4199,7 +4199,7 @@
       </p:sp>
       <p:sp>
         <p:nvSpPr>
-          <p:cNvPr id="556" name="PlaceHolder 3"/>
+          <p:cNvPr id="554" name="PlaceHolder 3"/>
           <p:cNvSpPr>
             <a:spLocks noGrp="1"/>
           </p:cNvSpPr>
@@ -4248,7 +4248,7 @@
               </a:lnSpc>
               <a:buNone/>
             </a:pPr>
-            <a:fld id="{61F39144-3D39-44E1-9CBA-B1E1A47F1814}" type="slidenum">
+            <a:fld id="{9FF89760-F224-4701-9CDF-AE0A5F4726A0}" type="slidenum">
               <a:rPr lang="en-US" sz="1200" b="0" u="none" strike="noStrike">
                 <a:solidFill>
                   <a:schemeClr val="dk1"/>
@@ -4295,7 +4295,7 @@
       </p:grpSpPr>
       <p:sp>
         <p:nvSpPr>
-          <p:cNvPr id="476" name="PlaceHolder 1"/>
+          <p:cNvPr id="474" name="PlaceHolder 1"/>
           <p:cNvSpPr>
             <a:spLocks noGrp="1"/>
           </p:cNvSpPr>
@@ -4318,7 +4318,7 @@
       </p:sp>
       <p:sp>
         <p:nvSpPr>
-          <p:cNvPr id="477" name="PlaceHolder 2"/>
+          <p:cNvPr id="475" name="PlaceHolder 2"/>
           <p:cNvSpPr>
             <a:spLocks noGrp="1"/>
           </p:cNvSpPr>
@@ -4374,7 +4374,7 @@
       </p:sp>
       <p:sp>
         <p:nvSpPr>
-          <p:cNvPr id="478" name="PlaceHolder 3"/>
+          <p:cNvPr id="476" name="PlaceHolder 3"/>
           <p:cNvSpPr>
             <a:spLocks noGrp="1"/>
           </p:cNvSpPr>
@@ -4423,7 +4423,7 @@
               </a:lnSpc>
               <a:buNone/>
             </a:pPr>
-            <a:fld id="{704C3AEA-AC49-4126-9446-07549408E327}" type="slidenum">
+            <a:fld id="{C2074295-80A4-4391-BF30-1C1CA731A4C7}" type="slidenum">
               <a:rPr lang="en-US" sz="1200" b="0" u="none" strike="noStrike">
                 <a:solidFill>
                   <a:schemeClr val="dk1"/>
@@ -4470,7 +4470,7 @@
       </p:grpSpPr>
       <p:sp>
         <p:nvSpPr>
-          <p:cNvPr id="557" name="PlaceHolder 1"/>
+          <p:cNvPr id="555" name="PlaceHolder 1"/>
           <p:cNvSpPr>
             <a:spLocks noGrp="1"/>
           </p:cNvSpPr>
@@ -4493,7 +4493,7 @@
       </p:sp>
       <p:sp>
         <p:nvSpPr>
-          <p:cNvPr id="558" name="PlaceHolder 2"/>
+          <p:cNvPr id="556" name="PlaceHolder 2"/>
           <p:cNvSpPr>
             <a:spLocks noGrp="1"/>
           </p:cNvSpPr>
@@ -4549,7 +4549,7 @@
       </p:sp>
       <p:sp>
         <p:nvSpPr>
-          <p:cNvPr id="559" name="PlaceHolder 3"/>
+          <p:cNvPr id="557" name="PlaceHolder 3"/>
           <p:cNvSpPr>
             <a:spLocks noGrp="1"/>
           </p:cNvSpPr>
@@ -4598,7 +4598,7 @@
               </a:lnSpc>
               <a:buNone/>
             </a:pPr>
-            <a:fld id="{9A81FF45-8122-4755-B5B0-C81EA3BDB7AA}" type="slidenum">
+            <a:fld id="{C77A640A-4DF8-461F-859B-AC22B96157EC}" type="slidenum">
               <a:rPr lang="en-US" sz="1200" b="0" u="none" strike="noStrike">
                 <a:solidFill>
                   <a:schemeClr val="dk1"/>
@@ -4645,7 +4645,7 @@
       </p:grpSpPr>
       <p:sp>
         <p:nvSpPr>
-          <p:cNvPr id="560" name="PlaceHolder 1"/>
+          <p:cNvPr id="558" name="PlaceHolder 1"/>
           <p:cNvSpPr>
             <a:spLocks noGrp="1"/>
           </p:cNvSpPr>
@@ -4668,7 +4668,7 @@
       </p:sp>
       <p:sp>
         <p:nvSpPr>
-          <p:cNvPr id="561" name="PlaceHolder 2"/>
+          <p:cNvPr id="559" name="PlaceHolder 2"/>
           <p:cNvSpPr>
             <a:spLocks noGrp="1"/>
           </p:cNvSpPr>
@@ -4724,7 +4724,7 @@
       </p:sp>
       <p:sp>
         <p:nvSpPr>
-          <p:cNvPr id="562" name="PlaceHolder 3"/>
+          <p:cNvPr id="560" name="PlaceHolder 3"/>
           <p:cNvSpPr>
             <a:spLocks noGrp="1"/>
           </p:cNvSpPr>
@@ -4773,7 +4773,7 @@
               </a:lnSpc>
               <a:buNone/>
             </a:pPr>
-            <a:fld id="{330FACF4-D3B3-484E-935E-33C360FBC9AB}" type="slidenum">
+            <a:fld id="{78F83B0B-E394-434D-8B19-885C793ED171}" type="slidenum">
               <a:rPr lang="en-US" sz="1200" b="0" u="none" strike="noStrike">
                 <a:solidFill>
                   <a:schemeClr val="dk1"/>
@@ -4820,7 +4820,7 @@
       </p:grpSpPr>
       <p:sp>
         <p:nvSpPr>
-          <p:cNvPr id="563" name="PlaceHolder 1"/>
+          <p:cNvPr id="561" name="PlaceHolder 1"/>
           <p:cNvSpPr>
             <a:spLocks noGrp="1"/>
           </p:cNvSpPr>
@@ -4843,7 +4843,7 @@
       </p:sp>
       <p:sp>
         <p:nvSpPr>
-          <p:cNvPr id="564" name="PlaceHolder 2"/>
+          <p:cNvPr id="562" name="PlaceHolder 2"/>
           <p:cNvSpPr>
             <a:spLocks noGrp="1"/>
           </p:cNvSpPr>
@@ -4899,7 +4899,7 @@
       </p:sp>
       <p:sp>
         <p:nvSpPr>
-          <p:cNvPr id="565" name="PlaceHolder 3"/>
+          <p:cNvPr id="563" name="PlaceHolder 3"/>
           <p:cNvSpPr>
             <a:spLocks noGrp="1"/>
           </p:cNvSpPr>
@@ -4948,7 +4948,7 @@
               </a:lnSpc>
               <a:buNone/>
             </a:pPr>
-            <a:fld id="{50AE6FCF-E47B-4B41-BE8B-14D244CEDC12}" type="slidenum">
+            <a:fld id="{8F5A915D-6701-41EA-9843-4E222248BD8C}" type="slidenum">
               <a:rPr lang="en-US" sz="1200" b="0" u="none" strike="noStrike">
                 <a:solidFill>
                   <a:schemeClr val="dk1"/>
@@ -4995,7 +4995,7 @@
       </p:grpSpPr>
       <p:sp>
         <p:nvSpPr>
-          <p:cNvPr id="566" name="PlaceHolder 1"/>
+          <p:cNvPr id="564" name="PlaceHolder 1"/>
           <p:cNvSpPr>
             <a:spLocks noGrp="1"/>
           </p:cNvSpPr>
@@ -5018,7 +5018,7 @@
       </p:sp>
       <p:sp>
         <p:nvSpPr>
-          <p:cNvPr id="567" name="PlaceHolder 2"/>
+          <p:cNvPr id="565" name="PlaceHolder 2"/>
           <p:cNvSpPr>
             <a:spLocks noGrp="1"/>
           </p:cNvSpPr>
@@ -5074,7 +5074,7 @@
       </p:sp>
       <p:sp>
         <p:nvSpPr>
-          <p:cNvPr id="568" name="PlaceHolder 3"/>
+          <p:cNvPr id="566" name="PlaceHolder 3"/>
           <p:cNvSpPr>
             <a:spLocks noGrp="1"/>
           </p:cNvSpPr>
@@ -5123,7 +5123,7 @@
               </a:lnSpc>
               <a:buNone/>
             </a:pPr>
-            <a:fld id="{D71DB29E-65A2-4316-8D5E-3635DD3381AE}" type="slidenum">
+            <a:fld id="{9676B9A0-32A5-4746-8B33-8CCD7A3DFFE6}" type="slidenum">
               <a:rPr lang="en-US" sz="1200" b="0" u="none" strike="noStrike">
                 <a:solidFill>
                   <a:schemeClr val="dk1"/>
@@ -5170,7 +5170,7 @@
       </p:grpSpPr>
       <p:sp>
         <p:nvSpPr>
-          <p:cNvPr id="569" name="PlaceHolder 1"/>
+          <p:cNvPr id="567" name="PlaceHolder 1"/>
           <p:cNvSpPr>
             <a:spLocks noGrp="1"/>
           </p:cNvSpPr>
@@ -5193,7 +5193,7 @@
       </p:sp>
       <p:sp>
         <p:nvSpPr>
-          <p:cNvPr id="570" name="PlaceHolder 2"/>
+          <p:cNvPr id="568" name="PlaceHolder 2"/>
           <p:cNvSpPr>
             <a:spLocks noGrp="1"/>
           </p:cNvSpPr>
@@ -5249,7 +5249,7 @@
       </p:sp>
       <p:sp>
         <p:nvSpPr>
-          <p:cNvPr id="571" name="PlaceHolder 3"/>
+          <p:cNvPr id="569" name="PlaceHolder 3"/>
           <p:cNvSpPr>
             <a:spLocks noGrp="1"/>
           </p:cNvSpPr>
@@ -5298,7 +5298,7 @@
               </a:lnSpc>
               <a:buNone/>
             </a:pPr>
-            <a:fld id="{C589E3C1-E95C-4463-89CD-5A8597597653}" type="slidenum">
+            <a:fld id="{16394D29-87B5-4ED5-8CA6-3571ED72999F}" type="slidenum">
               <a:rPr lang="en-US" sz="1200" b="0" u="none" strike="noStrike">
                 <a:solidFill>
                   <a:schemeClr val="dk1"/>
@@ -5345,7 +5345,7 @@
       </p:grpSpPr>
       <p:sp>
         <p:nvSpPr>
-          <p:cNvPr id="572" name="PlaceHolder 1"/>
+          <p:cNvPr id="570" name="PlaceHolder 1"/>
           <p:cNvSpPr>
             <a:spLocks noGrp="1"/>
           </p:cNvSpPr>
@@ -5368,7 +5368,7 @@
       </p:sp>
       <p:sp>
         <p:nvSpPr>
-          <p:cNvPr id="573" name="PlaceHolder 2"/>
+          <p:cNvPr id="571" name="PlaceHolder 2"/>
           <p:cNvSpPr>
             <a:spLocks noGrp="1"/>
           </p:cNvSpPr>
@@ -5424,7 +5424,7 @@
       </p:sp>
       <p:sp>
         <p:nvSpPr>
-          <p:cNvPr id="574" name="PlaceHolder 3"/>
+          <p:cNvPr id="572" name="PlaceHolder 3"/>
           <p:cNvSpPr>
             <a:spLocks noGrp="1"/>
           </p:cNvSpPr>
@@ -5473,7 +5473,7 @@
               </a:lnSpc>
               <a:buNone/>
             </a:pPr>
-            <a:fld id="{AE87E13F-60B4-48ED-A052-40BFF32A03BF}" type="slidenum">
+            <a:fld id="{F9975C45-0216-4F1F-8DDE-EDB2703E50AC}" type="slidenum">
               <a:rPr lang="en-US" sz="1200" b="0" u="none" strike="noStrike">
                 <a:solidFill>
                   <a:schemeClr val="dk1"/>
@@ -5520,7 +5520,7 @@
       </p:grpSpPr>
       <p:sp>
         <p:nvSpPr>
-          <p:cNvPr id="479" name="PlaceHolder 1"/>
+          <p:cNvPr id="477" name="PlaceHolder 1"/>
           <p:cNvSpPr>
             <a:spLocks noGrp="1"/>
           </p:cNvSpPr>
@@ -5543,7 +5543,7 @@
       </p:sp>
       <p:sp>
         <p:nvSpPr>
-          <p:cNvPr id="480" name="PlaceHolder 2"/>
+          <p:cNvPr id="478" name="PlaceHolder 2"/>
           <p:cNvSpPr>
             <a:spLocks noGrp="1"/>
           </p:cNvSpPr>
@@ -5599,7 +5599,7 @@
       </p:sp>
       <p:sp>
         <p:nvSpPr>
-          <p:cNvPr id="481" name="PlaceHolder 3"/>
+          <p:cNvPr id="479" name="PlaceHolder 3"/>
           <p:cNvSpPr>
             <a:spLocks noGrp="1"/>
           </p:cNvSpPr>
@@ -5648,7 +5648,7 @@
               </a:lnSpc>
               <a:buNone/>
             </a:pPr>
-            <a:fld id="{B0DE0BC5-551A-41C1-BF34-8643061B8A53}" type="slidenum">
+            <a:fld id="{9B08E345-4210-4765-B27A-92F11C73D73E}" type="slidenum">
               <a:rPr lang="en-US" sz="1200" b="0" u="none" strike="noStrike">
                 <a:solidFill>
                   <a:schemeClr val="dk1"/>
@@ -5695,7 +5695,7 @@
       </p:grpSpPr>
       <p:sp>
         <p:nvSpPr>
-          <p:cNvPr id="482" name="PlaceHolder 1"/>
+          <p:cNvPr id="480" name="PlaceHolder 1"/>
           <p:cNvSpPr>
             <a:spLocks noGrp="1"/>
           </p:cNvSpPr>
@@ -5718,7 +5718,7 @@
       </p:sp>
       <p:sp>
         <p:nvSpPr>
-          <p:cNvPr id="483" name="PlaceHolder 2"/>
+          <p:cNvPr id="481" name="PlaceHolder 2"/>
           <p:cNvSpPr>
             <a:spLocks noGrp="1"/>
           </p:cNvSpPr>
@@ -5774,7 +5774,7 @@
       </p:sp>
       <p:sp>
         <p:nvSpPr>
-          <p:cNvPr id="484" name="PlaceHolder 3"/>
+          <p:cNvPr id="482" name="PlaceHolder 3"/>
           <p:cNvSpPr>
             <a:spLocks noGrp="1"/>
           </p:cNvSpPr>
@@ -5823,7 +5823,7 @@
               </a:lnSpc>
               <a:buNone/>
             </a:pPr>
-            <a:fld id="{644C9C6E-4B8E-47CF-B8FF-763E67EED357}" type="slidenum">
+            <a:fld id="{47288194-8037-4851-9FD7-C0CBBA74DE94}" type="slidenum">
               <a:rPr lang="en-US" sz="1200" b="0" u="none" strike="noStrike">
                 <a:solidFill>
                   <a:schemeClr val="dk1"/>
@@ -5870,7 +5870,7 @@
       </p:grpSpPr>
       <p:sp>
         <p:nvSpPr>
-          <p:cNvPr id="485" name="PlaceHolder 1"/>
+          <p:cNvPr id="483" name="PlaceHolder 1"/>
           <p:cNvSpPr>
             <a:spLocks noGrp="1"/>
           </p:cNvSpPr>
@@ -5893,7 +5893,7 @@
       </p:sp>
       <p:sp>
         <p:nvSpPr>
-          <p:cNvPr id="486" name="PlaceHolder 2"/>
+          <p:cNvPr id="484" name="PlaceHolder 2"/>
           <p:cNvSpPr>
             <a:spLocks noGrp="1"/>
           </p:cNvSpPr>
@@ -5949,7 +5949,7 @@
       </p:sp>
       <p:sp>
         <p:nvSpPr>
-          <p:cNvPr id="487" name="PlaceHolder 3"/>
+          <p:cNvPr id="485" name="PlaceHolder 3"/>
           <p:cNvSpPr>
             <a:spLocks noGrp="1"/>
           </p:cNvSpPr>
@@ -5998,7 +5998,7 @@
               </a:lnSpc>
               <a:buNone/>
             </a:pPr>
-            <a:fld id="{EFA18937-D686-4559-A148-0BAA5E7A7870}" type="slidenum">
+            <a:fld id="{CFD41622-CBA7-4246-8019-EA8D7C609AB3}" type="slidenum">
               <a:rPr lang="en-US" sz="1200" b="0" u="none" strike="noStrike">
                 <a:solidFill>
                   <a:schemeClr val="dk1"/>
@@ -6045,7 +6045,7 @@
       </p:grpSpPr>
       <p:sp>
         <p:nvSpPr>
-          <p:cNvPr id="488" name="PlaceHolder 1"/>
+          <p:cNvPr id="486" name="PlaceHolder 1"/>
           <p:cNvSpPr>
             <a:spLocks noGrp="1"/>
           </p:cNvSpPr>
@@ -6068,7 +6068,7 @@
       </p:sp>
       <p:sp>
         <p:nvSpPr>
-          <p:cNvPr id="489" name="PlaceHolder 2"/>
+          <p:cNvPr id="487" name="PlaceHolder 2"/>
           <p:cNvSpPr>
             <a:spLocks noGrp="1"/>
           </p:cNvSpPr>
@@ -6124,7 +6124,7 @@
       </p:sp>
       <p:sp>
         <p:nvSpPr>
-          <p:cNvPr id="490" name="PlaceHolder 3"/>
+          <p:cNvPr id="488" name="PlaceHolder 3"/>
           <p:cNvSpPr>
             <a:spLocks noGrp="1"/>
           </p:cNvSpPr>
@@ -6173,7 +6173,7 @@
               </a:lnSpc>
               <a:buNone/>
             </a:pPr>
-            <a:fld id="{55398A2A-9593-414A-9C6F-9817156A5722}" type="slidenum">
+            <a:fld id="{06757303-F0A9-43DB-ABD2-DB839CDDA4FE}" type="slidenum">
               <a:rPr lang="en-US" sz="1200" b="0" u="none" strike="noStrike">
                 <a:solidFill>
                   <a:schemeClr val="dk1"/>
@@ -6220,7 +6220,7 @@
       </p:grpSpPr>
       <p:sp>
         <p:nvSpPr>
-          <p:cNvPr id="491" name="PlaceHolder 1"/>
+          <p:cNvPr id="489" name="PlaceHolder 1"/>
           <p:cNvSpPr>
             <a:spLocks noGrp="1"/>
           </p:cNvSpPr>
@@ -6243,7 +6243,7 @@
       </p:sp>
       <p:sp>
         <p:nvSpPr>
-          <p:cNvPr id="492" name="PlaceHolder 2"/>
+          <p:cNvPr id="490" name="PlaceHolder 2"/>
           <p:cNvSpPr>
             <a:spLocks noGrp="1"/>
           </p:cNvSpPr>
@@ -6299,7 +6299,7 @@
       </p:sp>
       <p:sp>
         <p:nvSpPr>
-          <p:cNvPr id="493" name="PlaceHolder 3"/>
+          <p:cNvPr id="491" name="PlaceHolder 3"/>
           <p:cNvSpPr>
             <a:spLocks noGrp="1"/>
           </p:cNvSpPr>
@@ -6348,7 +6348,7 @@
               </a:lnSpc>
               <a:buNone/>
             </a:pPr>
-            <a:fld id="{7DBE9691-CD1B-4998-A3FC-D2DBB144734A}" type="slidenum">
+            <a:fld id="{E37EAF1E-C7B5-4EB0-B99F-CA4B979F0B94}" type="slidenum">
               <a:rPr lang="en-US" sz="1200" b="0" u="none" strike="noStrike">
                 <a:solidFill>
                   <a:schemeClr val="dk1"/>
@@ -6395,7 +6395,7 @@
       </p:grpSpPr>
       <p:sp>
         <p:nvSpPr>
-          <p:cNvPr id="494" name="PlaceHolder 1"/>
+          <p:cNvPr id="492" name="PlaceHolder 1"/>
           <p:cNvSpPr>
             <a:spLocks noGrp="1"/>
           </p:cNvSpPr>
@@ -6418,7 +6418,7 @@
       </p:sp>
       <p:sp>
         <p:nvSpPr>
-          <p:cNvPr id="495" name="PlaceHolder 2"/>
+          <p:cNvPr id="493" name="PlaceHolder 2"/>
           <p:cNvSpPr>
             <a:spLocks noGrp="1"/>
           </p:cNvSpPr>
@@ -6459,7 +6459,7 @@
                 <a:uFillTx/>
                 <a:latin typeface="Arial"/>
               </a:rPr>
-              <a:t>THE most important sentence of the module is the last line - say it slowly and write it on the board. Everything from here (Pydantic validators, HTTPException, auth in module 4) is a variation on it. Someone will point out that account._balance = -500 still works: agree honestly. Python does not lock the door, it puts up a sign. The underscore means 'internal, you are on your own'. There is also __name which mangles the name and makes it awkward - still not locked. That honesty buys you credibility for the rest of the day; pretending Python has private attributes loses it.</a:t>
+              <a:t>THE most important sentence of the module is the last line - say it slowly and write it on the board. Everything from here (Pydantic validators, HTTPException, auth in module 3) is a variation on it. Someone will point out that account._balance = -500 still works: agree honestly. Python does not lock the door, it puts up a sign. The underscore means 'internal, you are on your own'. There is also __name which mangles the name and makes it awkward - still not locked. That honesty buys you credibility for the rest of the day; pretending Python has private attributes loses it.</a:t>
             </a:r>
             <a:endParaRPr lang="en-IN" sz="2000" b="0" u="none" strike="noStrike">
               <a:solidFill>
@@ -6474,7 +6474,7 @@
       </p:sp>
       <p:sp>
         <p:nvSpPr>
-          <p:cNvPr id="496" name="PlaceHolder 3"/>
+          <p:cNvPr id="494" name="PlaceHolder 3"/>
           <p:cNvSpPr>
             <a:spLocks noGrp="1"/>
           </p:cNvSpPr>
@@ -6523,7 +6523,7 @@
               </a:lnSpc>
               <a:buNone/>
             </a:pPr>
-            <a:fld id="{0B0EB79B-E7C9-47E2-93D8-27D57C3AD05C}" type="slidenum">
+            <a:fld id="{1542636B-EEF3-4B39-9274-70A1917F8F2B}" type="slidenum">
               <a:rPr lang="en-US" sz="1200" b="0" u="none" strike="noStrike">
                 <a:solidFill>
                   <a:schemeClr val="dk1"/>
@@ -7365,7 +7365,7 @@
       </p:grpSpPr>
       <p:sp>
         <p:nvSpPr>
-          <p:cNvPr id="117" name="Text 0"/>
+          <p:cNvPr id="115" name="Text 0"/>
           <p:cNvSpPr/>
           <p:nvPr/>
         </p:nvSpPr>
@@ -7426,7 +7426,7 @@
       </p:sp>
       <p:sp>
         <p:nvSpPr>
-          <p:cNvPr id="118" name="Shape 1"/>
+          <p:cNvPr id="116" name="Shape 1"/>
           <p:cNvSpPr/>
           <p:nvPr/>
         </p:nvSpPr>
@@ -7474,7 +7474,7 @@
       </p:sp>
       <p:sp>
         <p:nvSpPr>
-          <p:cNvPr id="119" name="Text 2"/>
+          <p:cNvPr id="117" name="Text 2"/>
           <p:cNvSpPr/>
           <p:nvPr/>
         </p:nvSpPr>
@@ -7823,7 +7823,7 @@
       </p:sp>
       <p:sp>
         <p:nvSpPr>
-          <p:cNvPr id="120" name="Shape 3"/>
+          <p:cNvPr id="118" name="Shape 3"/>
           <p:cNvSpPr/>
           <p:nvPr/>
         </p:nvSpPr>
@@ -7871,7 +7871,7 @@
       </p:sp>
       <p:sp>
         <p:nvSpPr>
-          <p:cNvPr id="121" name="Text 4"/>
+          <p:cNvPr id="119" name="Text 4"/>
           <p:cNvSpPr/>
           <p:nvPr/>
         </p:nvSpPr>
@@ -7932,7 +7932,7 @@
       </p:sp>
       <p:sp>
         <p:nvSpPr>
-          <p:cNvPr id="122" name="Shape 5"/>
+          <p:cNvPr id="120" name="Shape 5"/>
           <p:cNvSpPr/>
           <p:nvPr/>
         </p:nvSpPr>
@@ -7980,7 +7980,7 @@
       </p:sp>
       <p:sp>
         <p:nvSpPr>
-          <p:cNvPr id="123" name="Text 6"/>
+          <p:cNvPr id="121" name="Text 6"/>
           <p:cNvSpPr/>
           <p:nvPr/>
         </p:nvSpPr>
@@ -8149,7 +8149,7 @@
       </p:sp>
       <p:sp>
         <p:nvSpPr>
-          <p:cNvPr id="124" name="Text 7"/>
+          <p:cNvPr id="122" name="Text 7"/>
           <p:cNvSpPr/>
           <p:nvPr/>
         </p:nvSpPr>
@@ -8210,7 +8210,7 @@
       </p:sp>
       <p:sp>
         <p:nvSpPr>
-          <p:cNvPr id="125" name="Text 8"/>
+          <p:cNvPr id="123" name="Text 8"/>
           <p:cNvSpPr/>
           <p:nvPr/>
         </p:nvSpPr>
@@ -8271,7 +8271,7 @@
       </p:sp>
       <p:sp>
         <p:nvSpPr>
-          <p:cNvPr id="126" name="Text 9"/>
+          <p:cNvPr id="124" name="Text 9"/>
           <p:cNvSpPr/>
           <p:nvPr/>
         </p:nvSpPr>
@@ -8332,7 +8332,7 @@
       </p:sp>
       <p:sp>
         <p:nvSpPr>
-          <p:cNvPr id="127" name="Shape 10"/>
+          <p:cNvPr id="125" name="Shape 10"/>
           <p:cNvSpPr/>
           <p:nvPr/>
         </p:nvSpPr>
@@ -8380,7 +8380,7 @@
       </p:sp>
       <p:sp>
         <p:nvSpPr>
-          <p:cNvPr id="128" name="Text 11"/>
+          <p:cNvPr id="126" name="Text 11"/>
           <p:cNvSpPr/>
           <p:nvPr/>
         </p:nvSpPr>
@@ -8453,7 +8453,7 @@
       </p:sp>
       <p:sp>
         <p:nvSpPr>
-          <p:cNvPr id="129" name="Text 12"/>
+          <p:cNvPr id="127" name="Text 12"/>
           <p:cNvSpPr/>
           <p:nvPr/>
         </p:nvSpPr>
@@ -8514,7 +8514,7 @@
       </p:sp>
       <p:sp>
         <p:nvSpPr>
-          <p:cNvPr id="130" name="Text 13"/>
+          <p:cNvPr id="128" name="Text 13"/>
           <p:cNvSpPr/>
           <p:nvPr/>
         </p:nvSpPr>
@@ -8605,7 +8605,7 @@
       </p:grpSpPr>
       <p:sp>
         <p:nvSpPr>
-          <p:cNvPr id="131" name="Text 0"/>
+          <p:cNvPr id="129" name="Text 0"/>
           <p:cNvSpPr/>
           <p:nvPr/>
         </p:nvSpPr>
@@ -8666,7 +8666,7 @@
       </p:sp>
       <p:sp>
         <p:nvSpPr>
-          <p:cNvPr id="132" name="Shape 1"/>
+          <p:cNvPr id="130" name="Shape 1"/>
           <p:cNvSpPr/>
           <p:nvPr/>
         </p:nvSpPr>
@@ -8714,7 +8714,7 @@
       </p:sp>
       <p:sp>
         <p:nvSpPr>
-          <p:cNvPr id="133" name="Text 2"/>
+          <p:cNvPr id="131" name="Text 2"/>
           <p:cNvSpPr/>
           <p:nvPr/>
         </p:nvSpPr>
@@ -8775,7 +8775,7 @@
       </p:sp>
       <p:sp>
         <p:nvSpPr>
-          <p:cNvPr id="134" name="Text 3"/>
+          <p:cNvPr id="132" name="Text 3"/>
           <p:cNvSpPr/>
           <p:nvPr/>
         </p:nvSpPr>
@@ -8836,7 +8836,7 @@
       </p:sp>
       <p:sp>
         <p:nvSpPr>
-          <p:cNvPr id="135" name="Text 4"/>
+          <p:cNvPr id="133" name="Text 4"/>
           <p:cNvSpPr/>
           <p:nvPr/>
         </p:nvSpPr>
@@ -8897,7 +8897,7 @@
       </p:sp>
       <p:sp>
         <p:nvSpPr>
-          <p:cNvPr id="136" name="Text 5"/>
+          <p:cNvPr id="134" name="Text 5"/>
           <p:cNvSpPr/>
           <p:nvPr/>
         </p:nvSpPr>
@@ -8958,7 +8958,7 @@
       </p:sp>
       <p:sp>
         <p:nvSpPr>
-          <p:cNvPr id="137" name="Shape 6"/>
+          <p:cNvPr id="135" name="Shape 6"/>
           <p:cNvSpPr/>
           <p:nvPr/>
         </p:nvSpPr>
@@ -9006,7 +9006,7 @@
       </p:sp>
       <p:sp>
         <p:nvSpPr>
-          <p:cNvPr id="138" name="Text 7"/>
+          <p:cNvPr id="136" name="Text 7"/>
           <p:cNvSpPr/>
           <p:nvPr/>
         </p:nvSpPr>
@@ -9067,7 +9067,7 @@
       </p:sp>
       <p:sp>
         <p:nvSpPr>
-          <p:cNvPr id="139" name="Text 8"/>
+          <p:cNvPr id="137" name="Text 8"/>
           <p:cNvSpPr/>
           <p:nvPr/>
         </p:nvSpPr>
@@ -9128,7 +9128,7 @@
       </p:sp>
       <p:sp>
         <p:nvSpPr>
-          <p:cNvPr id="140" name="Text 9"/>
+          <p:cNvPr id="138" name="Text 9"/>
           <p:cNvSpPr/>
           <p:nvPr/>
         </p:nvSpPr>
@@ -9189,7 +9189,7 @@
       </p:sp>
       <p:sp>
         <p:nvSpPr>
-          <p:cNvPr id="141" name="Text 10"/>
+          <p:cNvPr id="139" name="Text 10"/>
           <p:cNvSpPr/>
           <p:nvPr/>
         </p:nvSpPr>
@@ -9250,7 +9250,7 @@
       </p:sp>
       <p:sp>
         <p:nvSpPr>
-          <p:cNvPr id="142" name="Shape 11"/>
+          <p:cNvPr id="140" name="Shape 11"/>
           <p:cNvSpPr/>
           <p:nvPr/>
         </p:nvSpPr>
@@ -9298,7 +9298,7 @@
       </p:sp>
       <p:sp>
         <p:nvSpPr>
-          <p:cNvPr id="143" name="Text 12"/>
+          <p:cNvPr id="141" name="Text 12"/>
           <p:cNvSpPr/>
           <p:nvPr/>
         </p:nvSpPr>
@@ -9371,7 +9371,7 @@
       </p:sp>
       <p:sp>
         <p:nvSpPr>
-          <p:cNvPr id="144" name="Text 13"/>
+          <p:cNvPr id="142" name="Text 13"/>
           <p:cNvSpPr/>
           <p:nvPr/>
         </p:nvSpPr>
@@ -9417,7 +9417,7 @@
                 <a:latin typeface="Calibri"/>
                 <a:ea typeface="Calibri"/>
               </a:rPr>
-              <a:t>Remember this shape. A database calls it a RELATIONSHIP — and we build it in module 3.</a:t>
+              <a:t>Remember this shape. A database calls it a RELATIONSHIP — and we build it in module 2.</a:t>
             </a:r>
             <a:endParaRPr lang="en-IN" sz="1800" b="0" u="none" strike="noStrike">
               <a:solidFill>
@@ -9432,7 +9432,7 @@
       </p:sp>
       <p:sp>
         <p:nvSpPr>
-          <p:cNvPr id="145" name="Text 14"/>
+          <p:cNvPr id="143" name="Text 14"/>
           <p:cNvSpPr/>
           <p:nvPr/>
         </p:nvSpPr>
@@ -9493,7 +9493,7 @@
       </p:sp>
       <p:sp>
         <p:nvSpPr>
-          <p:cNvPr id="146" name="Text 15"/>
+          <p:cNvPr id="144" name="Text 15"/>
           <p:cNvSpPr/>
           <p:nvPr/>
         </p:nvSpPr>
@@ -9584,7 +9584,7 @@
       </p:grpSpPr>
       <p:sp>
         <p:nvSpPr>
-          <p:cNvPr id="147" name="Text 0"/>
+          <p:cNvPr id="145" name="Text 0"/>
           <p:cNvSpPr/>
           <p:nvPr/>
         </p:nvSpPr>
@@ -9645,7 +9645,7 @@
       </p:sp>
       <p:graphicFrame>
         <p:nvGraphicFramePr>
-          <p:cNvPr id="148" name="Table 0"/>
+          <p:cNvPr id="146" name="Table 0"/>
           <p:cNvGraphicFramePr/>
           <p:nvPr/>
         </p:nvGraphicFramePr>
@@ -10668,7 +10668,7 @@
       </p:graphicFrame>
       <p:sp>
         <p:nvSpPr>
-          <p:cNvPr id="149" name="Shape 1"/>
+          <p:cNvPr id="147" name="Shape 1"/>
           <p:cNvSpPr/>
           <p:nvPr/>
         </p:nvSpPr>
@@ -10716,7 +10716,7 @@
       </p:sp>
       <p:sp>
         <p:nvSpPr>
-          <p:cNvPr id="150" name="Text 2"/>
+          <p:cNvPr id="148" name="Text 2"/>
           <p:cNvSpPr/>
           <p:nvPr/>
         </p:nvSpPr>
@@ -10897,7 +10897,7 @@
       </p:sp>
       <p:sp>
         <p:nvSpPr>
-          <p:cNvPr id="151" name="Shape 3"/>
+          <p:cNvPr id="149" name="Shape 3"/>
           <p:cNvSpPr/>
           <p:nvPr/>
         </p:nvSpPr>
@@ -10945,7 +10945,7 @@
       </p:sp>
       <p:sp>
         <p:nvSpPr>
-          <p:cNvPr id="152" name="Text 4"/>
+          <p:cNvPr id="150" name="Text 4"/>
           <p:cNvSpPr/>
           <p:nvPr/>
         </p:nvSpPr>
@@ -11006,7 +11006,7 @@
       </p:sp>
       <p:sp>
         <p:nvSpPr>
-          <p:cNvPr id="153" name="Text 5"/>
+          <p:cNvPr id="151" name="Text 5"/>
           <p:cNvSpPr/>
           <p:nvPr/>
         </p:nvSpPr>
@@ -11067,7 +11067,7 @@
       </p:sp>
       <p:sp>
         <p:nvSpPr>
-          <p:cNvPr id="154" name="Shape 6"/>
+          <p:cNvPr id="152" name="Shape 6"/>
           <p:cNvSpPr/>
           <p:nvPr/>
         </p:nvSpPr>
@@ -11115,7 +11115,7 @@
       </p:sp>
       <p:sp>
         <p:nvSpPr>
-          <p:cNvPr id="155" name="Text 7"/>
+          <p:cNvPr id="153" name="Text 7"/>
           <p:cNvSpPr/>
           <p:nvPr/>
         </p:nvSpPr>
@@ -11188,7 +11188,7 @@
       </p:sp>
       <p:sp>
         <p:nvSpPr>
-          <p:cNvPr id="156" name="Text 8"/>
+          <p:cNvPr id="154" name="Text 8"/>
           <p:cNvSpPr/>
           <p:nvPr/>
         </p:nvSpPr>
@@ -11249,7 +11249,7 @@
       </p:sp>
       <p:sp>
         <p:nvSpPr>
-          <p:cNvPr id="157" name="Text 9"/>
+          <p:cNvPr id="155" name="Text 9"/>
           <p:cNvSpPr/>
           <p:nvPr/>
         </p:nvSpPr>
@@ -11340,7 +11340,7 @@
       </p:grpSpPr>
       <p:sp>
         <p:nvSpPr>
-          <p:cNvPr id="158" name="Text 0"/>
+          <p:cNvPr id="156" name="Text 0"/>
           <p:cNvSpPr/>
           <p:nvPr/>
         </p:nvSpPr>
@@ -11401,7 +11401,7 @@
       </p:sp>
       <p:sp>
         <p:nvSpPr>
-          <p:cNvPr id="159" name="Text 1"/>
+          <p:cNvPr id="157" name="Text 1"/>
           <p:cNvSpPr/>
           <p:nvPr/>
         </p:nvSpPr>
@@ -11462,7 +11462,7 @@
       </p:sp>
       <p:sp>
         <p:nvSpPr>
-          <p:cNvPr id="160" name="Shape 2"/>
+          <p:cNvPr id="158" name="Shape 2"/>
           <p:cNvSpPr/>
           <p:nvPr/>
         </p:nvSpPr>
@@ -11507,7 +11507,7 @@
       </p:sp>
       <p:sp>
         <p:nvSpPr>
-          <p:cNvPr id="161" name="Text 3"/>
+          <p:cNvPr id="159" name="Text 3"/>
           <p:cNvSpPr/>
           <p:nvPr/>
         </p:nvSpPr>
@@ -11568,7 +11568,7 @@
       </p:sp>
       <p:sp>
         <p:nvSpPr>
-          <p:cNvPr id="162" name="Text 4"/>
+          <p:cNvPr id="160" name="Text 4"/>
           <p:cNvSpPr/>
           <p:nvPr/>
         </p:nvSpPr>
@@ -11629,7 +11629,7 @@
       </p:sp>
       <p:sp>
         <p:nvSpPr>
-          <p:cNvPr id="163" name="Shape 5"/>
+          <p:cNvPr id="161" name="Shape 5"/>
           <p:cNvSpPr/>
           <p:nvPr/>
         </p:nvSpPr>
@@ -11674,7 +11674,7 @@
       </p:sp>
       <p:sp>
         <p:nvSpPr>
-          <p:cNvPr id="164" name="Text 6"/>
+          <p:cNvPr id="162" name="Text 6"/>
           <p:cNvSpPr/>
           <p:nvPr/>
         </p:nvSpPr>
@@ -11735,7 +11735,7 @@
       </p:sp>
       <p:sp>
         <p:nvSpPr>
-          <p:cNvPr id="165" name="Text 7"/>
+          <p:cNvPr id="163" name="Text 7"/>
           <p:cNvSpPr/>
           <p:nvPr/>
         </p:nvSpPr>
@@ -11796,7 +11796,7 @@
       </p:sp>
       <p:sp>
         <p:nvSpPr>
-          <p:cNvPr id="166" name="Shape 8"/>
+          <p:cNvPr id="164" name="Shape 8"/>
           <p:cNvSpPr/>
           <p:nvPr/>
         </p:nvSpPr>
@@ -11841,7 +11841,7 @@
       </p:sp>
       <p:sp>
         <p:nvSpPr>
-          <p:cNvPr id="167" name="Text 9"/>
+          <p:cNvPr id="165" name="Text 9"/>
           <p:cNvSpPr/>
           <p:nvPr/>
         </p:nvSpPr>
@@ -11902,7 +11902,7 @@
       </p:sp>
       <p:sp>
         <p:nvSpPr>
-          <p:cNvPr id="168" name="Text 10"/>
+          <p:cNvPr id="166" name="Text 10"/>
           <p:cNvSpPr/>
           <p:nvPr/>
         </p:nvSpPr>
@@ -11963,7 +11963,7 @@
       </p:sp>
       <p:sp>
         <p:nvSpPr>
-          <p:cNvPr id="169" name="Shape 11"/>
+          <p:cNvPr id="167" name="Shape 11"/>
           <p:cNvSpPr/>
           <p:nvPr/>
         </p:nvSpPr>
@@ -12008,7 +12008,7 @@
       </p:sp>
       <p:sp>
         <p:nvSpPr>
-          <p:cNvPr id="170" name="Text 12"/>
+          <p:cNvPr id="168" name="Text 12"/>
           <p:cNvSpPr/>
           <p:nvPr/>
         </p:nvSpPr>
@@ -12069,7 +12069,7 @@
       </p:sp>
       <p:sp>
         <p:nvSpPr>
-          <p:cNvPr id="171" name="Text 13"/>
+          <p:cNvPr id="169" name="Text 13"/>
           <p:cNvSpPr/>
           <p:nvPr/>
         </p:nvSpPr>
@@ -12130,7 +12130,7 @@
       </p:sp>
       <p:sp>
         <p:nvSpPr>
-          <p:cNvPr id="172" name="Text 14"/>
+          <p:cNvPr id="170" name="Text 14"/>
           <p:cNvSpPr/>
           <p:nvPr/>
         </p:nvSpPr>
@@ -12191,7 +12191,7 @@
       </p:sp>
       <p:sp>
         <p:nvSpPr>
-          <p:cNvPr id="173" name="Text 15"/>
+          <p:cNvPr id="171" name="Text 15"/>
           <p:cNvSpPr/>
           <p:nvPr/>
         </p:nvSpPr>
@@ -12289,7 +12289,7 @@
       </p:grpSpPr>
       <p:sp>
         <p:nvSpPr>
-          <p:cNvPr id="174" name="Text 0"/>
+          <p:cNvPr id="172" name="Text 0"/>
           <p:cNvSpPr/>
           <p:nvPr/>
         </p:nvSpPr>
@@ -12350,7 +12350,7 @@
       </p:sp>
       <p:sp>
         <p:nvSpPr>
-          <p:cNvPr id="175" name="Text 1"/>
+          <p:cNvPr id="173" name="Text 1"/>
           <p:cNvSpPr/>
           <p:nvPr/>
         </p:nvSpPr>
@@ -12441,7 +12441,7 @@
       </p:grpSpPr>
       <p:sp>
         <p:nvSpPr>
-          <p:cNvPr id="176" name="Text 0"/>
+          <p:cNvPr id="174" name="Text 0"/>
           <p:cNvSpPr/>
           <p:nvPr/>
         </p:nvSpPr>
@@ -12502,7 +12502,7 @@
       </p:sp>
       <p:sp>
         <p:nvSpPr>
-          <p:cNvPr id="177" name="Shape 1"/>
+          <p:cNvPr id="175" name="Shape 1"/>
           <p:cNvSpPr/>
           <p:nvPr/>
         </p:nvSpPr>
@@ -12550,7 +12550,7 @@
       </p:sp>
       <p:sp>
         <p:nvSpPr>
-          <p:cNvPr id="178" name="Text 2"/>
+          <p:cNvPr id="176" name="Text 2"/>
           <p:cNvSpPr/>
           <p:nvPr/>
         </p:nvSpPr>
@@ -12611,7 +12611,7 @@
       </p:sp>
       <p:sp>
         <p:nvSpPr>
-          <p:cNvPr id="179" name="Text 3"/>
+          <p:cNvPr id="177" name="Text 3"/>
           <p:cNvSpPr/>
           <p:nvPr/>
         </p:nvSpPr>
@@ -12672,7 +12672,7 @@
       </p:sp>
       <p:sp>
         <p:nvSpPr>
-          <p:cNvPr id="180" name="Shape 4"/>
+          <p:cNvPr id="178" name="Shape 4"/>
           <p:cNvSpPr/>
           <p:nvPr/>
         </p:nvSpPr>
@@ -12720,7 +12720,7 @@
       </p:sp>
       <p:sp>
         <p:nvSpPr>
-          <p:cNvPr id="181" name="Text 5"/>
+          <p:cNvPr id="179" name="Text 5"/>
           <p:cNvSpPr/>
           <p:nvPr/>
         </p:nvSpPr>
@@ -12781,7 +12781,7 @@
       </p:sp>
       <p:sp>
         <p:nvSpPr>
-          <p:cNvPr id="182" name="Text 6"/>
+          <p:cNvPr id="180" name="Text 6"/>
           <p:cNvSpPr/>
           <p:nvPr/>
         </p:nvSpPr>
@@ -12842,7 +12842,7 @@
       </p:sp>
       <p:sp>
         <p:nvSpPr>
-          <p:cNvPr id="183" name="Shape 7"/>
+          <p:cNvPr id="181" name="Shape 7"/>
           <p:cNvSpPr/>
           <p:nvPr/>
         </p:nvSpPr>
@@ -12890,7 +12890,7 @@
       </p:sp>
       <p:sp>
         <p:nvSpPr>
-          <p:cNvPr id="184" name="Text 8"/>
+          <p:cNvPr id="182" name="Text 8"/>
           <p:cNvSpPr/>
           <p:nvPr/>
         </p:nvSpPr>
@@ -12951,7 +12951,7 @@
       </p:sp>
       <p:sp>
         <p:nvSpPr>
-          <p:cNvPr id="185" name="Text 9"/>
+          <p:cNvPr id="183" name="Text 9"/>
           <p:cNvSpPr/>
           <p:nvPr/>
         </p:nvSpPr>
@@ -13012,7 +13012,7 @@
       </p:sp>
       <p:sp>
         <p:nvSpPr>
-          <p:cNvPr id="186" name="Shape 10"/>
+          <p:cNvPr id="184" name="Shape 10"/>
           <p:cNvSpPr/>
           <p:nvPr/>
         </p:nvSpPr>
@@ -13060,7 +13060,7 @@
       </p:sp>
       <p:sp>
         <p:nvSpPr>
-          <p:cNvPr id="187" name="Text 11"/>
+          <p:cNvPr id="185" name="Text 11"/>
           <p:cNvSpPr/>
           <p:nvPr/>
         </p:nvSpPr>
@@ -13121,7 +13121,7 @@
       </p:sp>
       <p:sp>
         <p:nvSpPr>
-          <p:cNvPr id="188" name="Text 12"/>
+          <p:cNvPr id="186" name="Text 12"/>
           <p:cNvSpPr/>
           <p:nvPr/>
         </p:nvSpPr>
@@ -13182,7 +13182,7 @@
       </p:sp>
       <p:sp>
         <p:nvSpPr>
-          <p:cNvPr id="189" name="Shape 13"/>
+          <p:cNvPr id="187" name="Shape 13"/>
           <p:cNvSpPr/>
           <p:nvPr/>
         </p:nvSpPr>
@@ -13230,7 +13230,7 @@
       </p:sp>
       <p:sp>
         <p:nvSpPr>
-          <p:cNvPr id="190" name="Text 14"/>
+          <p:cNvPr id="188" name="Text 14"/>
           <p:cNvSpPr/>
           <p:nvPr/>
         </p:nvSpPr>
@@ -13291,7 +13291,7 @@
       </p:sp>
       <p:sp>
         <p:nvSpPr>
-          <p:cNvPr id="191" name="Text 15"/>
+          <p:cNvPr id="189" name="Text 15"/>
           <p:cNvSpPr/>
           <p:nvPr/>
         </p:nvSpPr>
@@ -13352,7 +13352,7 @@
       </p:sp>
       <p:sp>
         <p:nvSpPr>
-          <p:cNvPr id="192" name="Shape 16"/>
+          <p:cNvPr id="190" name="Shape 16"/>
           <p:cNvSpPr/>
           <p:nvPr/>
         </p:nvSpPr>
@@ -13400,7 +13400,7 @@
       </p:sp>
       <p:sp>
         <p:nvSpPr>
-          <p:cNvPr id="193" name="Text 17"/>
+          <p:cNvPr id="191" name="Text 17"/>
           <p:cNvSpPr/>
           <p:nvPr/>
         </p:nvSpPr>
@@ -13473,7 +13473,7 @@
       </p:sp>
       <p:sp>
         <p:nvSpPr>
-          <p:cNvPr id="194" name="Text 18"/>
+          <p:cNvPr id="192" name="Text 18"/>
           <p:cNvSpPr/>
           <p:nvPr/>
         </p:nvSpPr>
@@ -13534,7 +13534,7 @@
       </p:sp>
       <p:sp>
         <p:nvSpPr>
-          <p:cNvPr id="195" name="Text 19"/>
+          <p:cNvPr id="193" name="Text 19"/>
           <p:cNvSpPr/>
           <p:nvPr/>
         </p:nvSpPr>
@@ -13625,7 +13625,7 @@
       </p:grpSpPr>
       <p:sp>
         <p:nvSpPr>
-          <p:cNvPr id="196" name="Text 0"/>
+          <p:cNvPr id="194" name="Text 0"/>
           <p:cNvSpPr/>
           <p:nvPr/>
         </p:nvSpPr>
@@ -13686,7 +13686,7 @@
       </p:sp>
       <p:graphicFrame>
         <p:nvGraphicFramePr>
-          <p:cNvPr id="197" name="Table 0"/>
+          <p:cNvPr id="195" name="Table 0"/>
           <p:cNvGraphicFramePr/>
           <p:nvPr/>
         </p:nvGraphicFramePr>
@@ -15289,7 +15289,7 @@
       </p:graphicFrame>
       <p:sp>
         <p:nvSpPr>
-          <p:cNvPr id="198" name="Shape 1"/>
+          <p:cNvPr id="196" name="Shape 1"/>
           <p:cNvSpPr/>
           <p:nvPr/>
         </p:nvSpPr>
@@ -15337,7 +15337,7 @@
       </p:sp>
       <p:sp>
         <p:nvSpPr>
-          <p:cNvPr id="199" name="Text 2"/>
+          <p:cNvPr id="197" name="Text 2"/>
           <p:cNvSpPr/>
           <p:nvPr/>
         </p:nvSpPr>
@@ -15410,7 +15410,7 @@
       </p:sp>
       <p:sp>
         <p:nvSpPr>
-          <p:cNvPr id="200" name="Text 3"/>
+          <p:cNvPr id="198" name="Text 3"/>
           <p:cNvSpPr/>
           <p:nvPr/>
         </p:nvSpPr>
@@ -15471,7 +15471,7 @@
       </p:sp>
       <p:sp>
         <p:nvSpPr>
-          <p:cNvPr id="201" name="Text 4"/>
+          <p:cNvPr id="199" name="Text 4"/>
           <p:cNvSpPr/>
           <p:nvPr/>
         </p:nvSpPr>
@@ -15562,7 +15562,7 @@
       </p:grpSpPr>
       <p:sp>
         <p:nvSpPr>
-          <p:cNvPr id="202" name="Text 0"/>
+          <p:cNvPr id="200" name="Text 0"/>
           <p:cNvSpPr/>
           <p:nvPr/>
         </p:nvSpPr>
@@ -15623,7 +15623,7 @@
       </p:sp>
       <p:sp>
         <p:nvSpPr>
-          <p:cNvPr id="203" name="Shape 1"/>
+          <p:cNvPr id="201" name="Shape 1"/>
           <p:cNvSpPr/>
           <p:nvPr/>
         </p:nvSpPr>
@@ -15671,7 +15671,7 @@
       </p:sp>
       <p:sp>
         <p:nvSpPr>
-          <p:cNvPr id="204" name="Text 2"/>
+          <p:cNvPr id="202" name="Text 2"/>
           <p:cNvSpPr/>
           <p:nvPr/>
         </p:nvSpPr>
@@ -15912,7 +15912,7 @@
       </p:sp>
       <p:sp>
         <p:nvSpPr>
-          <p:cNvPr id="205" name="Shape 3"/>
+          <p:cNvPr id="203" name="Shape 3"/>
           <p:cNvSpPr/>
           <p:nvPr/>
         </p:nvSpPr>
@@ -15960,7 +15960,7 @@
       </p:sp>
       <p:sp>
         <p:nvSpPr>
-          <p:cNvPr id="206" name="Text 4"/>
+          <p:cNvPr id="204" name="Text 4"/>
           <p:cNvSpPr/>
           <p:nvPr/>
         </p:nvSpPr>
@@ -16021,7 +16021,7 @@
       </p:sp>
       <p:sp>
         <p:nvSpPr>
-          <p:cNvPr id="207" name="Text 5"/>
+          <p:cNvPr id="205" name="Text 5"/>
           <p:cNvSpPr/>
           <p:nvPr/>
         </p:nvSpPr>
@@ -16082,7 +16082,7 @@
       </p:sp>
       <p:sp>
         <p:nvSpPr>
-          <p:cNvPr id="208" name="Text 6"/>
+          <p:cNvPr id="206" name="Text 6"/>
           <p:cNvSpPr/>
           <p:nvPr/>
         </p:nvSpPr>
@@ -16128,7 +16128,7 @@
                 <a:latin typeface="Calibri"/>
                 <a:ea typeface="Calibri"/>
               </a:rPr>
-              <a:t>database tables — module 3</a:t>
+              <a:t>database tables — module 2</a:t>
             </a:r>
             <a:endParaRPr lang="en-IN" sz="1250" b="0" u="none" strike="noStrike">
               <a:solidFill>
@@ -16143,7 +16143,7 @@
       </p:sp>
       <p:sp>
         <p:nvSpPr>
-          <p:cNvPr id="209" name="Text 7"/>
+          <p:cNvPr id="207" name="Text 7"/>
           <p:cNvSpPr/>
           <p:nvPr/>
         </p:nvSpPr>
@@ -16204,7 +16204,7 @@
       </p:sp>
       <p:sp>
         <p:nvSpPr>
-          <p:cNvPr id="210" name="Text 8"/>
+          <p:cNvPr id="208" name="Text 8"/>
           <p:cNvSpPr/>
           <p:nvPr/>
         </p:nvSpPr>
@@ -16265,7 +16265,7 @@
       </p:sp>
       <p:sp>
         <p:nvSpPr>
-          <p:cNvPr id="211" name="Text 9"/>
+          <p:cNvPr id="209" name="Text 9"/>
           <p:cNvSpPr/>
           <p:nvPr/>
         </p:nvSpPr>
@@ -16326,7 +16326,7 @@
       </p:sp>
       <p:sp>
         <p:nvSpPr>
-          <p:cNvPr id="212" name="Text 10"/>
+          <p:cNvPr id="210" name="Text 10"/>
           <p:cNvSpPr/>
           <p:nvPr/>
         </p:nvSpPr>
@@ -16387,7 +16387,7 @@
       </p:sp>
       <p:sp>
         <p:nvSpPr>
-          <p:cNvPr id="213" name="Shape 11"/>
+          <p:cNvPr id="211" name="Shape 11"/>
           <p:cNvSpPr/>
           <p:nvPr/>
         </p:nvSpPr>
@@ -16435,7 +16435,7 @@
       </p:sp>
       <p:sp>
         <p:nvSpPr>
-          <p:cNvPr id="214" name="Text 12"/>
+          <p:cNvPr id="212" name="Text 12"/>
           <p:cNvSpPr/>
           <p:nvPr/>
         </p:nvSpPr>
@@ -16508,7 +16508,7 @@
       </p:sp>
       <p:sp>
         <p:nvSpPr>
-          <p:cNvPr id="215" name="Text 13"/>
+          <p:cNvPr id="213" name="Text 13"/>
           <p:cNvSpPr/>
           <p:nvPr/>
         </p:nvSpPr>
@@ -16569,7 +16569,7 @@
       </p:sp>
       <p:sp>
         <p:nvSpPr>
-          <p:cNvPr id="216" name="Text 14"/>
+          <p:cNvPr id="214" name="Text 14"/>
           <p:cNvSpPr/>
           <p:nvPr/>
         </p:nvSpPr>
@@ -16630,7 +16630,7 @@
       </p:sp>
       <p:sp>
         <p:nvSpPr>
-          <p:cNvPr id="217" name="Text 15"/>
+          <p:cNvPr id="215" name="Text 15"/>
           <p:cNvSpPr/>
           <p:nvPr/>
         </p:nvSpPr>
@@ -16721,7 +16721,7 @@
       </p:grpSpPr>
       <p:sp>
         <p:nvSpPr>
-          <p:cNvPr id="218" name="Text 0"/>
+          <p:cNvPr id="216" name="Text 0"/>
           <p:cNvSpPr/>
           <p:nvPr/>
         </p:nvSpPr>
@@ -16782,7 +16782,7 @@
       </p:sp>
       <p:sp>
         <p:nvSpPr>
-          <p:cNvPr id="219" name="Text 1"/>
+          <p:cNvPr id="217" name="Text 1"/>
           <p:cNvSpPr/>
           <p:nvPr/>
         </p:nvSpPr>
@@ -16843,7 +16843,7 @@
       </p:sp>
       <p:sp>
         <p:nvSpPr>
-          <p:cNvPr id="220" name="Shape 2"/>
+          <p:cNvPr id="218" name="Shape 2"/>
           <p:cNvSpPr/>
           <p:nvPr/>
         </p:nvSpPr>
@@ -16888,7 +16888,7 @@
       </p:sp>
       <p:sp>
         <p:nvSpPr>
-          <p:cNvPr id="221" name="Text 3"/>
+          <p:cNvPr id="219" name="Text 3"/>
           <p:cNvSpPr/>
           <p:nvPr/>
         </p:nvSpPr>
@@ -16949,7 +16949,7 @@
       </p:sp>
       <p:sp>
         <p:nvSpPr>
-          <p:cNvPr id="222" name="Text 4"/>
+          <p:cNvPr id="220" name="Text 4"/>
           <p:cNvSpPr/>
           <p:nvPr/>
         </p:nvSpPr>
@@ -17010,7 +17010,7 @@
       </p:sp>
       <p:sp>
         <p:nvSpPr>
-          <p:cNvPr id="223" name="Shape 5"/>
+          <p:cNvPr id="221" name="Shape 5"/>
           <p:cNvSpPr/>
           <p:nvPr/>
         </p:nvSpPr>
@@ -17055,7 +17055,7 @@
       </p:sp>
       <p:sp>
         <p:nvSpPr>
-          <p:cNvPr id="224" name="Text 6"/>
+          <p:cNvPr id="222" name="Text 6"/>
           <p:cNvSpPr/>
           <p:nvPr/>
         </p:nvSpPr>
@@ -17116,7 +17116,7 @@
       </p:sp>
       <p:sp>
         <p:nvSpPr>
-          <p:cNvPr id="225" name="Text 7"/>
+          <p:cNvPr id="223" name="Text 7"/>
           <p:cNvSpPr/>
           <p:nvPr/>
         </p:nvSpPr>
@@ -17177,7 +17177,7 @@
       </p:sp>
       <p:sp>
         <p:nvSpPr>
-          <p:cNvPr id="226" name="Shape 8"/>
+          <p:cNvPr id="224" name="Shape 8"/>
           <p:cNvSpPr/>
           <p:nvPr/>
         </p:nvSpPr>
@@ -17222,7 +17222,7 @@
       </p:sp>
       <p:sp>
         <p:nvSpPr>
-          <p:cNvPr id="227" name="Text 9"/>
+          <p:cNvPr id="225" name="Text 9"/>
           <p:cNvSpPr/>
           <p:nvPr/>
         </p:nvSpPr>
@@ -17283,7 +17283,7 @@
       </p:sp>
       <p:sp>
         <p:nvSpPr>
-          <p:cNvPr id="228" name="Text 10"/>
+          <p:cNvPr id="226" name="Text 10"/>
           <p:cNvSpPr/>
           <p:nvPr/>
         </p:nvSpPr>
@@ -17344,7 +17344,7 @@
       </p:sp>
       <p:sp>
         <p:nvSpPr>
-          <p:cNvPr id="229" name="Shape 11"/>
+          <p:cNvPr id="227" name="Shape 11"/>
           <p:cNvSpPr/>
           <p:nvPr/>
         </p:nvSpPr>
@@ -17389,7 +17389,7 @@
       </p:sp>
       <p:sp>
         <p:nvSpPr>
-          <p:cNvPr id="230" name="Text 12"/>
+          <p:cNvPr id="228" name="Text 12"/>
           <p:cNvSpPr/>
           <p:nvPr/>
         </p:nvSpPr>
@@ -17450,7 +17450,7 @@
       </p:sp>
       <p:sp>
         <p:nvSpPr>
-          <p:cNvPr id="231" name="Text 13"/>
+          <p:cNvPr id="229" name="Text 13"/>
           <p:cNvSpPr/>
           <p:nvPr/>
         </p:nvSpPr>
@@ -17511,7 +17511,7 @@
       </p:sp>
       <p:sp>
         <p:nvSpPr>
-          <p:cNvPr id="232" name="Text 14"/>
+          <p:cNvPr id="230" name="Text 14"/>
           <p:cNvSpPr/>
           <p:nvPr/>
         </p:nvSpPr>
@@ -17572,7 +17572,7 @@
       </p:sp>
       <p:sp>
         <p:nvSpPr>
-          <p:cNvPr id="233" name="Text 15"/>
+          <p:cNvPr id="231" name="Text 15"/>
           <p:cNvSpPr/>
           <p:nvPr/>
         </p:nvSpPr>
@@ -17670,7 +17670,7 @@
       </p:grpSpPr>
       <p:sp>
         <p:nvSpPr>
-          <p:cNvPr id="234" name="Text 0"/>
+          <p:cNvPr id="232" name="Text 0"/>
           <p:cNvSpPr/>
           <p:nvPr/>
         </p:nvSpPr>
@@ -17731,7 +17731,7 @@
       </p:sp>
       <p:sp>
         <p:nvSpPr>
-          <p:cNvPr id="235" name="Text 1"/>
+          <p:cNvPr id="233" name="Text 1"/>
           <p:cNvSpPr/>
           <p:nvPr/>
         </p:nvSpPr>
@@ -18096,7 +18096,7 @@
       </p:grpSpPr>
       <p:sp>
         <p:nvSpPr>
-          <p:cNvPr id="236" name="Text 0"/>
+          <p:cNvPr id="234" name="Text 0"/>
           <p:cNvSpPr/>
           <p:nvPr/>
         </p:nvSpPr>
@@ -18157,7 +18157,7 @@
       </p:sp>
       <p:sp>
         <p:nvSpPr>
-          <p:cNvPr id="237" name="Shape 1"/>
+          <p:cNvPr id="235" name="Shape 1"/>
           <p:cNvSpPr/>
           <p:nvPr/>
         </p:nvSpPr>
@@ -18205,7 +18205,7 @@
       </p:sp>
       <p:sp>
         <p:nvSpPr>
-          <p:cNvPr id="238" name="Text 2"/>
+          <p:cNvPr id="236" name="Text 2"/>
           <p:cNvSpPr/>
           <p:nvPr/>
         </p:nvSpPr>
@@ -18422,7 +18422,7 @@
       </p:sp>
       <p:sp>
         <p:nvSpPr>
-          <p:cNvPr id="239" name="Shape 3"/>
+          <p:cNvPr id="237" name="Shape 3"/>
           <p:cNvSpPr/>
           <p:nvPr/>
         </p:nvSpPr>
@@ -18470,7 +18470,7 @@
       </p:sp>
       <p:sp>
         <p:nvSpPr>
-          <p:cNvPr id="240" name="Text 4"/>
+          <p:cNvPr id="238" name="Text 4"/>
           <p:cNvSpPr/>
           <p:nvPr/>
         </p:nvSpPr>
@@ -18531,7 +18531,7 @@
       </p:sp>
       <p:sp>
         <p:nvSpPr>
-          <p:cNvPr id="241" name="Text 5"/>
+          <p:cNvPr id="239" name="Text 5"/>
           <p:cNvSpPr/>
           <p:nvPr/>
         </p:nvSpPr>
@@ -18592,7 +18592,7 @@
       </p:sp>
       <p:sp>
         <p:nvSpPr>
-          <p:cNvPr id="242" name="Text 6"/>
+          <p:cNvPr id="240" name="Text 6"/>
           <p:cNvSpPr/>
           <p:nvPr/>
         </p:nvSpPr>
@@ -18653,7 +18653,7 @@
       </p:sp>
       <p:sp>
         <p:nvSpPr>
-          <p:cNvPr id="243" name="Text 7"/>
+          <p:cNvPr id="241" name="Text 7"/>
           <p:cNvSpPr/>
           <p:nvPr/>
         </p:nvSpPr>
@@ -18714,7 +18714,7 @@
       </p:sp>
       <p:sp>
         <p:nvSpPr>
-          <p:cNvPr id="244" name="Text 8"/>
+          <p:cNvPr id="242" name="Text 8"/>
           <p:cNvSpPr/>
           <p:nvPr/>
         </p:nvSpPr>
@@ -18775,7 +18775,7 @@
       </p:sp>
       <p:sp>
         <p:nvSpPr>
-          <p:cNvPr id="245" name="Text 9"/>
+          <p:cNvPr id="243" name="Text 9"/>
           <p:cNvSpPr/>
           <p:nvPr/>
         </p:nvSpPr>
@@ -18836,7 +18836,7 @@
       </p:sp>
       <p:sp>
         <p:nvSpPr>
-          <p:cNvPr id="246" name="Shape 10"/>
+          <p:cNvPr id="244" name="Shape 10"/>
           <p:cNvSpPr/>
           <p:nvPr/>
         </p:nvSpPr>
@@ -18884,7 +18884,7 @@
       </p:sp>
       <p:sp>
         <p:nvSpPr>
-          <p:cNvPr id="247" name="Text 11"/>
+          <p:cNvPr id="245" name="Text 11"/>
           <p:cNvSpPr/>
           <p:nvPr/>
         </p:nvSpPr>
@@ -18945,7 +18945,7 @@
       </p:sp>
       <p:sp>
         <p:nvSpPr>
-          <p:cNvPr id="248" name="Shape 12"/>
+          <p:cNvPr id="246" name="Shape 12"/>
           <p:cNvSpPr/>
           <p:nvPr/>
         </p:nvSpPr>
@@ -18993,7 +18993,7 @@
       </p:sp>
       <p:sp>
         <p:nvSpPr>
-          <p:cNvPr id="249" name="Text 13"/>
+          <p:cNvPr id="247" name="Text 13"/>
           <p:cNvSpPr/>
           <p:nvPr/>
         </p:nvSpPr>
@@ -19054,7 +19054,7 @@
       </p:sp>
       <p:sp>
         <p:nvSpPr>
-          <p:cNvPr id="250" name="Text 14"/>
+          <p:cNvPr id="248" name="Text 14"/>
           <p:cNvSpPr/>
           <p:nvPr/>
         </p:nvSpPr>
@@ -19115,7 +19115,7 @@
       </p:sp>
       <p:sp>
         <p:nvSpPr>
-          <p:cNvPr id="251" name="Shape 15"/>
+          <p:cNvPr id="249" name="Shape 15"/>
           <p:cNvSpPr/>
           <p:nvPr/>
         </p:nvSpPr>
@@ -19163,7 +19163,7 @@
       </p:sp>
       <p:sp>
         <p:nvSpPr>
-          <p:cNvPr id="252" name="Text 16"/>
+          <p:cNvPr id="250" name="Text 16"/>
           <p:cNvSpPr/>
           <p:nvPr/>
         </p:nvSpPr>
@@ -19224,7 +19224,7 @@
       </p:sp>
       <p:sp>
         <p:nvSpPr>
-          <p:cNvPr id="253" name="Text 17"/>
+          <p:cNvPr id="251" name="Text 17"/>
           <p:cNvSpPr/>
           <p:nvPr/>
         </p:nvSpPr>
@@ -19285,7 +19285,7 @@
       </p:sp>
       <p:sp>
         <p:nvSpPr>
-          <p:cNvPr id="254" name="Shape 18"/>
+          <p:cNvPr id="252" name="Shape 18"/>
           <p:cNvSpPr/>
           <p:nvPr/>
         </p:nvSpPr>
@@ -19333,7 +19333,7 @@
       </p:sp>
       <p:sp>
         <p:nvSpPr>
-          <p:cNvPr id="255" name="Text 19"/>
+          <p:cNvPr id="253" name="Text 19"/>
           <p:cNvSpPr/>
           <p:nvPr/>
         </p:nvSpPr>
@@ -19394,7 +19394,7 @@
       </p:sp>
       <p:sp>
         <p:nvSpPr>
-          <p:cNvPr id="256" name="Text 20"/>
+          <p:cNvPr id="254" name="Text 20"/>
           <p:cNvSpPr/>
           <p:nvPr/>
         </p:nvSpPr>
@@ -19455,7 +19455,7 @@
       </p:sp>
       <p:sp>
         <p:nvSpPr>
-          <p:cNvPr id="257" name="Shape 21"/>
+          <p:cNvPr id="255" name="Shape 21"/>
           <p:cNvSpPr/>
           <p:nvPr/>
         </p:nvSpPr>
@@ -19503,7 +19503,7 @@
       </p:sp>
       <p:sp>
         <p:nvSpPr>
-          <p:cNvPr id="258" name="Text 22"/>
+          <p:cNvPr id="256" name="Text 22"/>
           <p:cNvSpPr/>
           <p:nvPr/>
         </p:nvSpPr>
@@ -19576,7 +19576,7 @@
       </p:sp>
       <p:sp>
         <p:nvSpPr>
-          <p:cNvPr id="259" name="Text 23"/>
+          <p:cNvPr id="257" name="Text 23"/>
           <p:cNvSpPr/>
           <p:nvPr/>
         </p:nvSpPr>
@@ -19637,7 +19637,7 @@
       </p:sp>
       <p:sp>
         <p:nvSpPr>
-          <p:cNvPr id="260" name="Text 24"/>
+          <p:cNvPr id="258" name="Text 24"/>
           <p:cNvSpPr/>
           <p:nvPr/>
         </p:nvSpPr>
@@ -19728,7 +19728,7 @@
       </p:grpSpPr>
       <p:sp>
         <p:nvSpPr>
-          <p:cNvPr id="261" name="Text 0"/>
+          <p:cNvPr id="259" name="Text 0"/>
           <p:cNvSpPr/>
           <p:nvPr/>
         </p:nvSpPr>
@@ -19789,7 +19789,7 @@
       </p:sp>
       <p:graphicFrame>
         <p:nvGraphicFramePr>
-          <p:cNvPr id="262" name="Table 0"/>
+          <p:cNvPr id="260" name="Table 0"/>
           <p:cNvGraphicFramePr/>
           <p:nvPr/>
         </p:nvGraphicFramePr>
@@ -21409,7 +21409,7 @@
       </p:graphicFrame>
       <p:sp>
         <p:nvSpPr>
-          <p:cNvPr id="263" name="Shape 1"/>
+          <p:cNvPr id="261" name="Shape 1"/>
           <p:cNvSpPr/>
           <p:nvPr/>
         </p:nvSpPr>
@@ -21457,7 +21457,7 @@
       </p:sp>
       <p:sp>
         <p:nvSpPr>
-          <p:cNvPr id="264" name="Text 2"/>
+          <p:cNvPr id="262" name="Text 2"/>
           <p:cNvSpPr/>
           <p:nvPr/>
         </p:nvSpPr>
@@ -21530,7 +21530,7 @@
       </p:sp>
       <p:sp>
         <p:nvSpPr>
-          <p:cNvPr id="265" name="Text 3"/>
+          <p:cNvPr id="263" name="Text 3"/>
           <p:cNvSpPr/>
           <p:nvPr/>
         </p:nvSpPr>
@@ -21591,7 +21591,7 @@
       </p:sp>
       <p:sp>
         <p:nvSpPr>
-          <p:cNvPr id="266" name="Text 4"/>
+          <p:cNvPr id="264" name="Text 4"/>
           <p:cNvSpPr/>
           <p:nvPr/>
         </p:nvSpPr>
@@ -21682,7 +21682,7 @@
       </p:grpSpPr>
       <p:sp>
         <p:nvSpPr>
-          <p:cNvPr id="267" name="Text 0"/>
+          <p:cNvPr id="265" name="Text 0"/>
           <p:cNvSpPr/>
           <p:nvPr/>
         </p:nvSpPr>
@@ -21743,7 +21743,7 @@
       </p:sp>
       <p:sp>
         <p:nvSpPr>
-          <p:cNvPr id="268" name="Shape 1"/>
+          <p:cNvPr id="266" name="Shape 1"/>
           <p:cNvSpPr/>
           <p:nvPr/>
         </p:nvSpPr>
@@ -21791,7 +21791,7 @@
       </p:sp>
       <p:sp>
         <p:nvSpPr>
-          <p:cNvPr id="269" name="Text 2"/>
+          <p:cNvPr id="267" name="Text 2"/>
           <p:cNvSpPr/>
           <p:nvPr/>
         </p:nvSpPr>
@@ -21852,7 +21852,7 @@
       </p:sp>
       <p:sp>
         <p:nvSpPr>
-          <p:cNvPr id="270" name="Text 3"/>
+          <p:cNvPr id="268" name="Text 3"/>
           <p:cNvSpPr/>
           <p:nvPr/>
         </p:nvSpPr>
@@ -21913,7 +21913,7 @@
       </p:sp>
       <p:sp>
         <p:nvSpPr>
-          <p:cNvPr id="271" name="Text 4"/>
+          <p:cNvPr id="269" name="Text 4"/>
           <p:cNvSpPr/>
           <p:nvPr/>
         </p:nvSpPr>
@@ -21974,7 +21974,7 @@
       </p:sp>
       <p:sp>
         <p:nvSpPr>
-          <p:cNvPr id="272" name="Text 5"/>
+          <p:cNvPr id="270" name="Text 5"/>
           <p:cNvSpPr/>
           <p:nvPr/>
         </p:nvSpPr>
@@ -22035,7 +22035,7 @@
       </p:sp>
       <p:sp>
         <p:nvSpPr>
-          <p:cNvPr id="273" name="Shape 6"/>
+          <p:cNvPr id="271" name="Shape 6"/>
           <p:cNvSpPr/>
           <p:nvPr/>
         </p:nvSpPr>
@@ -22083,7 +22083,7 @@
       </p:sp>
       <p:sp>
         <p:nvSpPr>
-          <p:cNvPr id="274" name="Text 7"/>
+          <p:cNvPr id="272" name="Text 7"/>
           <p:cNvSpPr/>
           <p:nvPr/>
         </p:nvSpPr>
@@ -22144,7 +22144,7 @@
       </p:sp>
       <p:sp>
         <p:nvSpPr>
-          <p:cNvPr id="275" name="Text 8"/>
+          <p:cNvPr id="273" name="Text 8"/>
           <p:cNvSpPr/>
           <p:nvPr/>
         </p:nvSpPr>
@@ -22205,7 +22205,7 @@
       </p:sp>
       <p:sp>
         <p:nvSpPr>
-          <p:cNvPr id="276" name="Text 9"/>
+          <p:cNvPr id="274" name="Text 9"/>
           <p:cNvSpPr/>
           <p:nvPr/>
         </p:nvSpPr>
@@ -22266,7 +22266,7 @@
       </p:sp>
       <p:sp>
         <p:nvSpPr>
-          <p:cNvPr id="277" name="Text 10"/>
+          <p:cNvPr id="275" name="Text 10"/>
           <p:cNvSpPr/>
           <p:nvPr/>
         </p:nvSpPr>
@@ -22327,7 +22327,7 @@
       </p:sp>
       <p:sp>
         <p:nvSpPr>
-          <p:cNvPr id="278" name="Shape 11"/>
+          <p:cNvPr id="276" name="Shape 11"/>
           <p:cNvSpPr/>
           <p:nvPr/>
         </p:nvSpPr>
@@ -22375,7 +22375,7 @@
       </p:sp>
       <p:sp>
         <p:nvSpPr>
-          <p:cNvPr id="279" name="Text 12"/>
+          <p:cNvPr id="277" name="Text 12"/>
           <p:cNvSpPr/>
           <p:nvPr/>
         </p:nvSpPr>
@@ -22544,7 +22544,7 @@
       </p:sp>
       <p:sp>
         <p:nvSpPr>
-          <p:cNvPr id="280" name="Shape 13"/>
+          <p:cNvPr id="278" name="Shape 13"/>
           <p:cNvSpPr/>
           <p:nvPr/>
         </p:nvSpPr>
@@ -22592,7 +22592,7 @@
       </p:sp>
       <p:sp>
         <p:nvSpPr>
-          <p:cNvPr id="281" name="Text 14"/>
+          <p:cNvPr id="279" name="Text 14"/>
           <p:cNvSpPr/>
           <p:nvPr/>
         </p:nvSpPr>
@@ -22665,7 +22665,7 @@
       </p:sp>
       <p:sp>
         <p:nvSpPr>
-          <p:cNvPr id="282" name="Text 15"/>
+          <p:cNvPr id="280" name="Text 15"/>
           <p:cNvSpPr/>
           <p:nvPr/>
         </p:nvSpPr>
@@ -22726,7 +22726,7 @@
       </p:sp>
       <p:sp>
         <p:nvSpPr>
-          <p:cNvPr id="283" name="Text 16"/>
+          <p:cNvPr id="281" name="Text 16"/>
           <p:cNvSpPr/>
           <p:nvPr/>
         </p:nvSpPr>
@@ -22817,7 +22817,7 @@
       </p:grpSpPr>
       <p:sp>
         <p:nvSpPr>
-          <p:cNvPr id="284" name="Text 0"/>
+          <p:cNvPr id="282" name="Text 0"/>
           <p:cNvSpPr/>
           <p:nvPr/>
         </p:nvSpPr>
@@ -22878,7 +22878,7 @@
       </p:sp>
       <p:sp>
         <p:nvSpPr>
-          <p:cNvPr id="285" name="Text 1"/>
+          <p:cNvPr id="283" name="Text 1"/>
           <p:cNvSpPr/>
           <p:nvPr/>
         </p:nvSpPr>
@@ -22939,7 +22939,7 @@
       </p:sp>
       <p:sp>
         <p:nvSpPr>
-          <p:cNvPr id="286" name="Shape 2"/>
+          <p:cNvPr id="284" name="Shape 2"/>
           <p:cNvSpPr/>
           <p:nvPr/>
         </p:nvSpPr>
@@ -22987,7 +22987,7 @@
       </p:sp>
       <p:sp>
         <p:nvSpPr>
-          <p:cNvPr id="287" name="Text 3"/>
+          <p:cNvPr id="285" name="Text 3"/>
           <p:cNvSpPr/>
           <p:nvPr/>
         </p:nvSpPr>
@@ -23138,7 +23138,7 @@
       </p:sp>
       <p:sp>
         <p:nvSpPr>
-          <p:cNvPr id="288" name="Shape 4"/>
+          <p:cNvPr id="286" name="Shape 4"/>
           <p:cNvSpPr/>
           <p:nvPr/>
         </p:nvSpPr>
@@ -23186,7 +23186,7 @@
       </p:sp>
       <p:sp>
         <p:nvSpPr>
-          <p:cNvPr id="289" name="Text 5"/>
+          <p:cNvPr id="287" name="Text 5"/>
           <p:cNvSpPr/>
           <p:nvPr/>
         </p:nvSpPr>
@@ -23247,7 +23247,7 @@
       </p:sp>
       <p:sp>
         <p:nvSpPr>
-          <p:cNvPr id="290" name="Text 6"/>
+          <p:cNvPr id="288" name="Text 6"/>
           <p:cNvSpPr/>
           <p:nvPr/>
         </p:nvSpPr>
@@ -23308,7 +23308,7 @@
       </p:sp>
       <p:sp>
         <p:nvSpPr>
-          <p:cNvPr id="291" name="Shape 7"/>
+          <p:cNvPr id="289" name="Shape 7"/>
           <p:cNvSpPr/>
           <p:nvPr/>
         </p:nvSpPr>
@@ -23356,7 +23356,7 @@
       </p:sp>
       <p:sp>
         <p:nvSpPr>
-          <p:cNvPr id="292" name="Text 8"/>
+          <p:cNvPr id="290" name="Text 8"/>
           <p:cNvSpPr/>
           <p:nvPr/>
         </p:nvSpPr>
@@ -23417,7 +23417,7 @@
       </p:sp>
       <p:sp>
         <p:nvSpPr>
-          <p:cNvPr id="293" name="Text 9"/>
+          <p:cNvPr id="291" name="Text 9"/>
           <p:cNvSpPr/>
           <p:nvPr/>
         </p:nvSpPr>
@@ -23478,7 +23478,7 @@
       </p:sp>
       <p:sp>
         <p:nvSpPr>
-          <p:cNvPr id="294" name="Shape 10"/>
+          <p:cNvPr id="292" name="Shape 10"/>
           <p:cNvSpPr/>
           <p:nvPr/>
         </p:nvSpPr>
@@ -23526,7 +23526,7 @@
       </p:sp>
       <p:sp>
         <p:nvSpPr>
-          <p:cNvPr id="295" name="Text 11"/>
+          <p:cNvPr id="293" name="Text 11"/>
           <p:cNvSpPr/>
           <p:nvPr/>
         </p:nvSpPr>
@@ -23587,7 +23587,7 @@
       </p:sp>
       <p:sp>
         <p:nvSpPr>
-          <p:cNvPr id="296" name="Text 12"/>
+          <p:cNvPr id="294" name="Text 12"/>
           <p:cNvSpPr/>
           <p:nvPr/>
         </p:nvSpPr>
@@ -23648,7 +23648,7 @@
       </p:sp>
       <p:sp>
         <p:nvSpPr>
-          <p:cNvPr id="297" name="Shape 13"/>
+          <p:cNvPr id="295" name="Shape 13"/>
           <p:cNvSpPr/>
           <p:nvPr/>
         </p:nvSpPr>
@@ -23696,7 +23696,7 @@
       </p:sp>
       <p:sp>
         <p:nvSpPr>
-          <p:cNvPr id="298" name="Text 14"/>
+          <p:cNvPr id="296" name="Text 14"/>
           <p:cNvSpPr/>
           <p:nvPr/>
         </p:nvSpPr>
@@ -23757,7 +23757,7 @@
       </p:sp>
       <p:sp>
         <p:nvSpPr>
-          <p:cNvPr id="299" name="Text 15"/>
+          <p:cNvPr id="297" name="Text 15"/>
           <p:cNvSpPr/>
           <p:nvPr/>
         </p:nvSpPr>
@@ -23818,7 +23818,7 @@
       </p:sp>
       <p:sp>
         <p:nvSpPr>
-          <p:cNvPr id="300" name="Shape 16"/>
+          <p:cNvPr id="298" name="Shape 16"/>
           <p:cNvSpPr/>
           <p:nvPr/>
         </p:nvSpPr>
@@ -23866,7 +23866,7 @@
       </p:sp>
       <p:sp>
         <p:nvSpPr>
-          <p:cNvPr id="301" name="Text 17"/>
+          <p:cNvPr id="299" name="Text 17"/>
           <p:cNvSpPr/>
           <p:nvPr/>
         </p:nvSpPr>
@@ -23927,7 +23927,7 @@
       </p:sp>
       <p:sp>
         <p:nvSpPr>
-          <p:cNvPr id="302" name="Shape 18"/>
+          <p:cNvPr id="300" name="Shape 18"/>
           <p:cNvSpPr/>
           <p:nvPr/>
         </p:nvSpPr>
@@ -23975,7 +23975,7 @@
       </p:sp>
       <p:sp>
         <p:nvSpPr>
-          <p:cNvPr id="303" name="Text 19"/>
+          <p:cNvPr id="301" name="Text 19"/>
           <p:cNvSpPr/>
           <p:nvPr/>
         </p:nvSpPr>
@@ -24048,7 +24048,7 @@
       </p:sp>
       <p:sp>
         <p:nvSpPr>
-          <p:cNvPr id="304" name="Text 20"/>
+          <p:cNvPr id="302" name="Text 20"/>
           <p:cNvSpPr/>
           <p:nvPr/>
         </p:nvSpPr>
@@ -24109,7 +24109,7 @@
       </p:sp>
       <p:sp>
         <p:nvSpPr>
-          <p:cNvPr id="305" name="Text 21"/>
+          <p:cNvPr id="303" name="Text 21"/>
           <p:cNvSpPr/>
           <p:nvPr/>
         </p:nvSpPr>
@@ -24200,7 +24200,7 @@
       </p:grpSpPr>
       <p:sp>
         <p:nvSpPr>
-          <p:cNvPr id="306" name="Text 0"/>
+          <p:cNvPr id="304" name="Text 0"/>
           <p:cNvSpPr/>
           <p:nvPr/>
         </p:nvSpPr>
@@ -24261,7 +24261,7 @@
       </p:sp>
       <p:sp>
         <p:nvSpPr>
-          <p:cNvPr id="307" name="Shape 1"/>
+          <p:cNvPr id="305" name="Shape 1"/>
           <p:cNvSpPr/>
           <p:nvPr/>
         </p:nvSpPr>
@@ -24309,7 +24309,7 @@
       </p:sp>
       <p:sp>
         <p:nvSpPr>
-          <p:cNvPr id="308" name="Text 2"/>
+          <p:cNvPr id="306" name="Text 2"/>
           <p:cNvSpPr/>
           <p:nvPr/>
         </p:nvSpPr>
@@ -24520,7 +24520,7 @@
       </p:sp>
       <p:graphicFrame>
         <p:nvGraphicFramePr>
-          <p:cNvPr id="309" name="Table 0"/>
+          <p:cNvPr id="307" name="Table 0"/>
           <p:cNvGraphicFramePr/>
           <p:nvPr/>
         </p:nvGraphicFramePr>
@@ -25543,7 +25543,7 @@
       </p:graphicFrame>
       <p:sp>
         <p:nvSpPr>
-          <p:cNvPr id="310" name="Shape 3"/>
+          <p:cNvPr id="308" name="Shape 3"/>
           <p:cNvSpPr/>
           <p:nvPr/>
         </p:nvSpPr>
@@ -25591,7 +25591,7 @@
       </p:sp>
       <p:sp>
         <p:nvSpPr>
-          <p:cNvPr id="311" name="Text 4"/>
+          <p:cNvPr id="309" name="Text 4"/>
           <p:cNvSpPr/>
           <p:nvPr/>
         </p:nvSpPr>
@@ -25664,7 +25664,7 @@
       </p:sp>
       <p:sp>
         <p:nvSpPr>
-          <p:cNvPr id="312" name="Text 5"/>
+          <p:cNvPr id="310" name="Text 5"/>
           <p:cNvSpPr/>
           <p:nvPr/>
         </p:nvSpPr>
@@ -25725,7 +25725,7 @@
       </p:sp>
       <p:sp>
         <p:nvSpPr>
-          <p:cNvPr id="313" name="Text 6"/>
+          <p:cNvPr id="311" name="Text 6"/>
           <p:cNvSpPr/>
           <p:nvPr/>
         </p:nvSpPr>
@@ -25816,7 +25816,7 @@
       </p:grpSpPr>
       <p:sp>
         <p:nvSpPr>
-          <p:cNvPr id="314" name="Text 0"/>
+          <p:cNvPr id="312" name="Text 0"/>
           <p:cNvSpPr/>
           <p:nvPr/>
         </p:nvSpPr>
@@ -25877,7 +25877,7 @@
       </p:sp>
       <p:sp>
         <p:nvSpPr>
-          <p:cNvPr id="315" name="Shape 1"/>
+          <p:cNvPr id="313" name="Shape 1"/>
           <p:cNvSpPr/>
           <p:nvPr/>
         </p:nvSpPr>
@@ -25925,7 +25925,7 @@
       </p:sp>
       <p:sp>
         <p:nvSpPr>
-          <p:cNvPr id="316" name="Text 2"/>
+          <p:cNvPr id="314" name="Text 2"/>
           <p:cNvSpPr/>
           <p:nvPr/>
         </p:nvSpPr>
@@ -26214,7 +26214,7 @@
       </p:sp>
       <p:sp>
         <p:nvSpPr>
-          <p:cNvPr id="317" name="Shape 3"/>
+          <p:cNvPr id="315" name="Shape 3"/>
           <p:cNvSpPr/>
           <p:nvPr/>
         </p:nvSpPr>
@@ -26262,7 +26262,7 @@
       </p:sp>
       <p:sp>
         <p:nvSpPr>
-          <p:cNvPr id="318" name="Text 4"/>
+          <p:cNvPr id="316" name="Text 4"/>
           <p:cNvSpPr/>
           <p:nvPr/>
         </p:nvSpPr>
@@ -26473,7 +26473,7 @@
       </p:sp>
       <p:sp>
         <p:nvSpPr>
-          <p:cNvPr id="319" name="Text 5"/>
+          <p:cNvPr id="317" name="Text 5"/>
           <p:cNvSpPr/>
           <p:nvPr/>
         </p:nvSpPr>
@@ -26534,7 +26534,7 @@
       </p:sp>
       <p:sp>
         <p:nvSpPr>
-          <p:cNvPr id="320" name="Shape 6"/>
+          <p:cNvPr id="318" name="Shape 6"/>
           <p:cNvSpPr/>
           <p:nvPr/>
         </p:nvSpPr>
@@ -26582,7 +26582,7 @@
       </p:sp>
       <p:sp>
         <p:nvSpPr>
-          <p:cNvPr id="321" name="Text 7"/>
+          <p:cNvPr id="319" name="Text 7"/>
           <p:cNvSpPr/>
           <p:nvPr/>
         </p:nvSpPr>
@@ -26643,7 +26643,7 @@
       </p:sp>
       <p:sp>
         <p:nvSpPr>
-          <p:cNvPr id="322" name="Shape 8"/>
+          <p:cNvPr id="320" name="Shape 8"/>
           <p:cNvSpPr/>
           <p:nvPr/>
         </p:nvSpPr>
@@ -26691,7 +26691,7 @@
       </p:sp>
       <p:sp>
         <p:nvSpPr>
-          <p:cNvPr id="323" name="Text 9"/>
+          <p:cNvPr id="321" name="Text 9"/>
           <p:cNvSpPr/>
           <p:nvPr/>
         </p:nvSpPr>
@@ -26764,7 +26764,7 @@
       </p:sp>
       <p:sp>
         <p:nvSpPr>
-          <p:cNvPr id="324" name="Text 10"/>
+          <p:cNvPr id="322" name="Text 10"/>
           <p:cNvSpPr/>
           <p:nvPr/>
         </p:nvSpPr>
@@ -26825,7 +26825,7 @@
       </p:sp>
       <p:sp>
         <p:nvSpPr>
-          <p:cNvPr id="325" name="Text 11"/>
+          <p:cNvPr id="323" name="Text 11"/>
           <p:cNvSpPr/>
           <p:nvPr/>
         </p:nvSpPr>
@@ -26886,7 +26886,7 @@
       </p:sp>
       <p:sp>
         <p:nvSpPr>
-          <p:cNvPr id="326" name="Text 12"/>
+          <p:cNvPr id="324" name="Text 12"/>
           <p:cNvSpPr/>
           <p:nvPr/>
         </p:nvSpPr>
@@ -26977,7 +26977,7 @@
       </p:grpSpPr>
       <p:sp>
         <p:nvSpPr>
-          <p:cNvPr id="327" name="Text 0"/>
+          <p:cNvPr id="325" name="Text 0"/>
           <p:cNvSpPr/>
           <p:nvPr/>
         </p:nvSpPr>
@@ -27038,7 +27038,7 @@
       </p:sp>
       <p:graphicFrame>
         <p:nvGraphicFramePr>
-          <p:cNvPr id="328" name="Table 0"/>
+          <p:cNvPr id="326" name="Table 0"/>
           <p:cNvGraphicFramePr/>
           <p:nvPr/>
         </p:nvGraphicFramePr>
@@ -27840,7 +27840,7 @@
       </p:graphicFrame>
       <p:sp>
         <p:nvSpPr>
-          <p:cNvPr id="329" name="Shape 1"/>
+          <p:cNvPr id="327" name="Shape 1"/>
           <p:cNvSpPr/>
           <p:nvPr/>
         </p:nvSpPr>
@@ -27888,7 +27888,7 @@
       </p:sp>
       <p:sp>
         <p:nvSpPr>
-          <p:cNvPr id="330" name="Text 2"/>
+          <p:cNvPr id="328" name="Text 2"/>
           <p:cNvSpPr/>
           <p:nvPr/>
         </p:nvSpPr>
@@ -27961,7 +27961,7 @@
       </p:sp>
       <p:sp>
         <p:nvSpPr>
-          <p:cNvPr id="331" name="Shape 3"/>
+          <p:cNvPr id="329" name="Shape 3"/>
           <p:cNvSpPr/>
           <p:nvPr/>
         </p:nvSpPr>
@@ -28009,7 +28009,7 @@
       </p:sp>
       <p:sp>
         <p:nvSpPr>
-          <p:cNvPr id="332" name="Text 4"/>
+          <p:cNvPr id="330" name="Text 4"/>
           <p:cNvSpPr/>
           <p:nvPr/>
         </p:nvSpPr>
@@ -28100,7 +28100,7 @@
       </p:sp>
       <p:sp>
         <p:nvSpPr>
-          <p:cNvPr id="333" name="Text 5"/>
+          <p:cNvPr id="331" name="Text 5"/>
           <p:cNvSpPr/>
           <p:nvPr/>
         </p:nvSpPr>
@@ -28161,7 +28161,7 @@
       </p:sp>
       <p:sp>
         <p:nvSpPr>
-          <p:cNvPr id="334" name="Text 6"/>
+          <p:cNvPr id="332" name="Text 6"/>
           <p:cNvSpPr/>
           <p:nvPr/>
         </p:nvSpPr>
@@ -28252,7 +28252,7 @@
       </p:grpSpPr>
       <p:sp>
         <p:nvSpPr>
-          <p:cNvPr id="335" name="Text 0"/>
+          <p:cNvPr id="333" name="Text 0"/>
           <p:cNvSpPr/>
           <p:nvPr/>
         </p:nvSpPr>
@@ -28313,7 +28313,7 @@
       </p:sp>
       <p:sp>
         <p:nvSpPr>
-          <p:cNvPr id="336" name="Shape 1"/>
+          <p:cNvPr id="334" name="Shape 1"/>
           <p:cNvSpPr/>
           <p:nvPr/>
         </p:nvSpPr>
@@ -28361,7 +28361,7 @@
       </p:sp>
       <p:sp>
         <p:nvSpPr>
-          <p:cNvPr id="337" name="Text 2"/>
+          <p:cNvPr id="335" name="Text 2"/>
           <p:cNvSpPr/>
           <p:nvPr/>
         </p:nvSpPr>
@@ -28620,7 +28620,7 @@
       </p:sp>
       <p:graphicFrame>
         <p:nvGraphicFramePr>
-          <p:cNvPr id="338" name="Table 0"/>
+          <p:cNvPr id="336" name="Table 0"/>
           <p:cNvGraphicFramePr/>
           <p:nvPr/>
         </p:nvGraphicFramePr>
@@ -29243,7 +29243,7 @@
       </p:graphicFrame>
       <p:sp>
         <p:nvSpPr>
-          <p:cNvPr id="339" name="Shape 3"/>
+          <p:cNvPr id="337" name="Shape 3"/>
           <p:cNvSpPr/>
           <p:nvPr/>
         </p:nvSpPr>
@@ -29291,7 +29291,7 @@
       </p:sp>
       <p:sp>
         <p:nvSpPr>
-          <p:cNvPr id="340" name="Text 4"/>
+          <p:cNvPr id="338" name="Text 4"/>
           <p:cNvSpPr/>
           <p:nvPr/>
         </p:nvSpPr>
@@ -29364,7 +29364,7 @@
       </p:sp>
       <p:sp>
         <p:nvSpPr>
-          <p:cNvPr id="341" name="Text 5"/>
+          <p:cNvPr id="339" name="Text 5"/>
           <p:cNvSpPr/>
           <p:nvPr/>
         </p:nvSpPr>
@@ -29425,7 +29425,7 @@
       </p:sp>
       <p:sp>
         <p:nvSpPr>
-          <p:cNvPr id="342" name="Text 6"/>
+          <p:cNvPr id="340" name="Text 6"/>
           <p:cNvSpPr/>
           <p:nvPr/>
         </p:nvSpPr>
@@ -29486,7 +29486,7 @@
       </p:sp>
       <p:sp>
         <p:nvSpPr>
-          <p:cNvPr id="343" name="Text 7"/>
+          <p:cNvPr id="341" name="Text 7"/>
           <p:cNvSpPr/>
           <p:nvPr/>
         </p:nvSpPr>
@@ -29547,7 +29547,7 @@
       </p:sp>
       <p:sp>
         <p:nvSpPr>
-          <p:cNvPr id="344" name="Text 8"/>
+          <p:cNvPr id="342" name="Text 8"/>
           <p:cNvSpPr/>
           <p:nvPr/>
         </p:nvSpPr>
@@ -29608,7 +29608,7 @@
       </p:sp>
       <p:sp>
         <p:nvSpPr>
-          <p:cNvPr id="345" name="Text 9"/>
+          <p:cNvPr id="343" name="Text 9"/>
           <p:cNvSpPr/>
           <p:nvPr/>
         </p:nvSpPr>
@@ -29669,7 +29669,7 @@
       </p:sp>
       <p:sp>
         <p:nvSpPr>
-          <p:cNvPr id="346" name="Text 10"/>
+          <p:cNvPr id="344" name="Text 10"/>
           <p:cNvSpPr/>
           <p:nvPr/>
         </p:nvSpPr>
@@ -29730,7 +29730,7 @@
       </p:sp>
       <p:sp>
         <p:nvSpPr>
-          <p:cNvPr id="347" name="Text 11"/>
+          <p:cNvPr id="345" name="Text 11"/>
           <p:cNvSpPr/>
           <p:nvPr/>
         </p:nvSpPr>
@@ -29791,7 +29791,7 @@
       </p:sp>
       <p:sp>
         <p:nvSpPr>
-          <p:cNvPr id="348" name="Text 12"/>
+          <p:cNvPr id="346" name="Text 12"/>
           <p:cNvSpPr/>
           <p:nvPr/>
         </p:nvSpPr>
@@ -29882,7 +29882,7 @@
       </p:grpSpPr>
       <p:sp>
         <p:nvSpPr>
-          <p:cNvPr id="349" name="Text 0"/>
+          <p:cNvPr id="347" name="Text 0"/>
           <p:cNvSpPr/>
           <p:nvPr/>
         </p:nvSpPr>
@@ -29943,7 +29943,7 @@
       </p:sp>
       <p:sp>
         <p:nvSpPr>
-          <p:cNvPr id="350" name="Text 1"/>
+          <p:cNvPr id="348" name="Text 1"/>
           <p:cNvSpPr/>
           <p:nvPr/>
         </p:nvSpPr>
@@ -30004,7 +30004,7 @@
       </p:sp>
       <p:sp>
         <p:nvSpPr>
-          <p:cNvPr id="351" name="Text 2"/>
+          <p:cNvPr id="349" name="Text 2"/>
           <p:cNvSpPr/>
           <p:nvPr/>
         </p:nvSpPr>
@@ -30065,7 +30065,7 @@
       </p:sp>
       <p:sp>
         <p:nvSpPr>
-          <p:cNvPr id="352" name="Shape 3"/>
+          <p:cNvPr id="350" name="Shape 3"/>
           <p:cNvSpPr/>
           <p:nvPr/>
         </p:nvSpPr>
@@ -30113,7 +30113,7 @@
       </p:sp>
       <p:sp>
         <p:nvSpPr>
-          <p:cNvPr id="353" name="Text 4"/>
+          <p:cNvPr id="351" name="Text 4"/>
           <p:cNvSpPr/>
           <p:nvPr/>
         </p:nvSpPr>
@@ -30312,7 +30312,7 @@
       </p:sp>
       <p:sp>
         <p:nvSpPr>
-          <p:cNvPr id="354" name="Shape 5"/>
+          <p:cNvPr id="352" name="Shape 5"/>
           <p:cNvSpPr/>
           <p:nvPr/>
         </p:nvSpPr>
@@ -30360,7 +30360,7 @@
       </p:sp>
       <p:sp>
         <p:nvSpPr>
-          <p:cNvPr id="355" name="Text 6"/>
+          <p:cNvPr id="353" name="Text 6"/>
           <p:cNvSpPr/>
           <p:nvPr/>
         </p:nvSpPr>
@@ -30406,7 +30406,7 @@
                 <a:latin typeface="Calibri"/>
                 <a:ea typeface="Calibri"/>
               </a:rPr>
-              <a:t>The endpoint has NO checking code. The dependency ran first — and when it raised, the endpoint never ran. This is how logins work in module 4.</a:t>
+              <a:t>The endpoint has NO checking code. The dependency ran first — and when it raised, the endpoint never ran. This is how logins work in module 3.</a:t>
             </a:r>
             <a:endParaRPr lang="en-IN" sz="1200" b="0" u="none" strike="noStrike">
               <a:solidFill>
@@ -30421,7 +30421,7 @@
       </p:sp>
       <p:sp>
         <p:nvSpPr>
-          <p:cNvPr id="356" name="Text 7"/>
+          <p:cNvPr id="354" name="Text 7"/>
           <p:cNvSpPr/>
           <p:nvPr/>
         </p:nvSpPr>
@@ -30482,7 +30482,7 @@
       </p:sp>
       <p:sp>
         <p:nvSpPr>
-          <p:cNvPr id="357" name="Text 8"/>
+          <p:cNvPr id="355" name="Text 8"/>
           <p:cNvSpPr/>
           <p:nvPr/>
         </p:nvSpPr>
@@ -30543,7 +30543,7 @@
       </p:sp>
       <p:sp>
         <p:nvSpPr>
-          <p:cNvPr id="358" name="Shape 9"/>
+          <p:cNvPr id="356" name="Shape 9"/>
           <p:cNvSpPr/>
           <p:nvPr/>
         </p:nvSpPr>
@@ -30591,7 +30591,7 @@
       </p:sp>
       <p:sp>
         <p:nvSpPr>
-          <p:cNvPr id="359" name="Text 10"/>
+          <p:cNvPr id="357" name="Text 10"/>
           <p:cNvSpPr/>
           <p:nvPr/>
         </p:nvSpPr>
@@ -30742,7 +30742,7 @@
       </p:sp>
       <p:sp>
         <p:nvSpPr>
-          <p:cNvPr id="360" name="Shape 11"/>
+          <p:cNvPr id="358" name="Shape 11"/>
           <p:cNvSpPr/>
           <p:nvPr/>
         </p:nvSpPr>
@@ -30790,7 +30790,7 @@
       </p:sp>
       <p:sp>
         <p:nvSpPr>
-          <p:cNvPr id="361" name="Text 12"/>
+          <p:cNvPr id="359" name="Text 12"/>
           <p:cNvSpPr/>
           <p:nvPr/>
         </p:nvSpPr>
@@ -30851,7 +30851,7 @@
       </p:sp>
       <p:sp>
         <p:nvSpPr>
-          <p:cNvPr id="362" name="Text 13"/>
+          <p:cNvPr id="360" name="Text 13"/>
           <p:cNvSpPr/>
           <p:nvPr/>
         </p:nvSpPr>
@@ -30912,7 +30912,7 @@
       </p:sp>
       <p:sp>
         <p:nvSpPr>
-          <p:cNvPr id="363" name="Text 14"/>
+          <p:cNvPr id="361" name="Text 14"/>
           <p:cNvSpPr/>
           <p:nvPr/>
         </p:nvSpPr>
@@ -30973,7 +30973,7 @@
       </p:sp>
       <p:sp>
         <p:nvSpPr>
-          <p:cNvPr id="364" name="Shape 15"/>
+          <p:cNvPr id="362" name="Shape 15"/>
           <p:cNvSpPr/>
           <p:nvPr/>
         </p:nvSpPr>
@@ -31021,7 +31021,7 @@
       </p:sp>
       <p:sp>
         <p:nvSpPr>
-          <p:cNvPr id="365" name="Text 16"/>
+          <p:cNvPr id="363" name="Text 16"/>
           <p:cNvSpPr/>
           <p:nvPr/>
         </p:nvSpPr>
@@ -31172,7 +31172,7 @@
       </p:sp>
       <p:sp>
         <p:nvSpPr>
-          <p:cNvPr id="366" name="Shape 17"/>
+          <p:cNvPr id="364" name="Shape 17"/>
           <p:cNvSpPr/>
           <p:nvPr/>
         </p:nvSpPr>
@@ -31220,7 +31220,7 @@
       </p:sp>
       <p:sp>
         <p:nvSpPr>
-          <p:cNvPr id="367" name="Text 18"/>
+          <p:cNvPr id="365" name="Text 18"/>
           <p:cNvSpPr/>
           <p:nvPr/>
         </p:nvSpPr>
@@ -31281,7 +31281,7 @@
       </p:sp>
       <p:sp>
         <p:nvSpPr>
-          <p:cNvPr id="368" name="Text 19"/>
+          <p:cNvPr id="366" name="Text 19"/>
           <p:cNvSpPr/>
           <p:nvPr/>
         </p:nvSpPr>
@@ -31342,7 +31342,7 @@
       </p:sp>
       <p:sp>
         <p:nvSpPr>
-          <p:cNvPr id="369" name="Text 20"/>
+          <p:cNvPr id="367" name="Text 20"/>
           <p:cNvSpPr/>
           <p:nvPr/>
         </p:nvSpPr>
@@ -31433,7 +31433,7 @@
       </p:grpSpPr>
       <p:sp>
         <p:nvSpPr>
-          <p:cNvPr id="370" name="Text 0"/>
+          <p:cNvPr id="368" name="Text 0"/>
           <p:cNvSpPr/>
           <p:nvPr/>
         </p:nvSpPr>
@@ -31494,7 +31494,7 @@
       </p:sp>
       <p:sp>
         <p:nvSpPr>
-          <p:cNvPr id="371" name="Text 1"/>
+          <p:cNvPr id="369" name="Text 1"/>
           <p:cNvSpPr/>
           <p:nvPr/>
         </p:nvSpPr>
@@ -31555,7 +31555,7 @@
       </p:sp>
       <p:sp>
         <p:nvSpPr>
-          <p:cNvPr id="372" name="Shape 2"/>
+          <p:cNvPr id="370" name="Shape 2"/>
           <p:cNvSpPr/>
           <p:nvPr/>
         </p:nvSpPr>
@@ -31600,7 +31600,7 @@
       </p:sp>
       <p:sp>
         <p:nvSpPr>
-          <p:cNvPr id="373" name="Text 3"/>
+          <p:cNvPr id="371" name="Text 3"/>
           <p:cNvSpPr/>
           <p:nvPr/>
         </p:nvSpPr>
@@ -31661,7 +31661,7 @@
       </p:sp>
       <p:sp>
         <p:nvSpPr>
-          <p:cNvPr id="374" name="Text 4"/>
+          <p:cNvPr id="372" name="Text 4"/>
           <p:cNvSpPr/>
           <p:nvPr/>
         </p:nvSpPr>
@@ -31722,7 +31722,7 @@
       </p:sp>
       <p:sp>
         <p:nvSpPr>
-          <p:cNvPr id="375" name="Shape 5"/>
+          <p:cNvPr id="373" name="Shape 5"/>
           <p:cNvSpPr/>
           <p:nvPr/>
         </p:nvSpPr>
@@ -31767,7 +31767,7 @@
       </p:sp>
       <p:sp>
         <p:nvSpPr>
-          <p:cNvPr id="376" name="Text 6"/>
+          <p:cNvPr id="374" name="Text 6"/>
           <p:cNvSpPr/>
           <p:nvPr/>
         </p:nvSpPr>
@@ -31828,7 +31828,7 @@
       </p:sp>
       <p:sp>
         <p:nvSpPr>
-          <p:cNvPr id="377" name="Text 7"/>
+          <p:cNvPr id="375" name="Text 7"/>
           <p:cNvSpPr/>
           <p:nvPr/>
         </p:nvSpPr>
@@ -31889,7 +31889,7 @@
       </p:sp>
       <p:sp>
         <p:nvSpPr>
-          <p:cNvPr id="378" name="Shape 8"/>
+          <p:cNvPr id="376" name="Shape 8"/>
           <p:cNvSpPr/>
           <p:nvPr/>
         </p:nvSpPr>
@@ -31934,7 +31934,7 @@
       </p:sp>
       <p:sp>
         <p:nvSpPr>
-          <p:cNvPr id="379" name="Text 9"/>
+          <p:cNvPr id="377" name="Text 9"/>
           <p:cNvSpPr/>
           <p:nvPr/>
         </p:nvSpPr>
@@ -31995,7 +31995,7 @@
       </p:sp>
       <p:sp>
         <p:nvSpPr>
-          <p:cNvPr id="380" name="Text 10"/>
+          <p:cNvPr id="378" name="Text 10"/>
           <p:cNvSpPr/>
           <p:nvPr/>
         </p:nvSpPr>
@@ -32056,7 +32056,7 @@
       </p:sp>
       <p:sp>
         <p:nvSpPr>
-          <p:cNvPr id="381" name="Shape 11"/>
+          <p:cNvPr id="379" name="Shape 11"/>
           <p:cNvSpPr/>
           <p:nvPr/>
         </p:nvSpPr>
@@ -32101,7 +32101,7 @@
       </p:sp>
       <p:sp>
         <p:nvSpPr>
-          <p:cNvPr id="382" name="Text 12"/>
+          <p:cNvPr id="380" name="Text 12"/>
           <p:cNvSpPr/>
           <p:nvPr/>
         </p:nvSpPr>
@@ -32162,7 +32162,7 @@
       </p:sp>
       <p:sp>
         <p:nvSpPr>
-          <p:cNvPr id="383" name="Text 13"/>
+          <p:cNvPr id="381" name="Text 13"/>
           <p:cNvSpPr/>
           <p:nvPr/>
         </p:nvSpPr>
@@ -32223,7 +32223,7 @@
       </p:sp>
       <p:sp>
         <p:nvSpPr>
-          <p:cNvPr id="384" name="Text 14"/>
+          <p:cNvPr id="382" name="Text 14"/>
           <p:cNvSpPr/>
           <p:nvPr/>
         </p:nvSpPr>
@@ -32284,7 +32284,7 @@
       </p:sp>
       <p:sp>
         <p:nvSpPr>
-          <p:cNvPr id="385" name="Text 15"/>
+          <p:cNvPr id="383" name="Text 15"/>
           <p:cNvSpPr/>
           <p:nvPr/>
         </p:nvSpPr>
@@ -32421,7 +32421,7 @@
                 <a:latin typeface="Calibri"/>
                 <a:ea typeface="Calibri"/>
               </a:rPr>
-              <a:t>One app, grown over four sessions</a:t>
+              <a:t>One app, grown over three sessions</a:t>
             </a:r>
             <a:endParaRPr lang="en-IN" sz="3000" b="0" u="none" strike="noStrike">
               <a:solidFill>
@@ -32503,7 +32503,7 @@
         </p:nvSpPr>
         <p:spPr>
           <a:xfrm>
-            <a:off x="548640" y="1828800"/>
+            <a:off x="548640" y="2039040"/>
             <a:ext cx="639720" cy="639720"/>
           </a:xfrm>
           <a:prstGeom prst="roundRect">
@@ -32548,7 +32548,7 @@
         </p:nvSpPr>
         <p:spPr>
           <a:xfrm>
-            <a:off x="548640" y="1828800"/>
+            <a:off x="548640" y="2039040"/>
             <a:ext cx="639720" cy="639720"/>
           </a:xfrm>
           <a:prstGeom prst="rect">
@@ -32610,11 +32610,11 @@
         <p:spPr>
           <a:xfrm>
             <a:off x="1463040" y="1828800"/>
-            <a:ext cx="10176840" cy="639720"/>
+            <a:ext cx="10176840" cy="1051200"/>
           </a:xfrm>
           <a:prstGeom prst="roundRect">
             <a:avLst>
-              <a:gd name="adj" fmla="val 14286"/>
+              <a:gd name="adj" fmla="val 8696"/>
             </a:avLst>
           </a:prstGeom>
           <a:solidFill>
@@ -32658,7 +32658,7 @@
         <p:spPr>
           <a:xfrm>
             <a:off x="1737360" y="1828800"/>
-            <a:ext cx="1371240" cy="639720"/>
+            <a:ext cx="1371240" cy="1051200"/>
           </a:xfrm>
           <a:prstGeom prst="rect">
             <a:avLst/>
@@ -32718,8 +32718,8 @@
         </p:nvSpPr>
         <p:spPr>
           <a:xfrm>
-            <a:off x="3200400" y="1828800"/>
-            <a:ext cx="8320680" cy="639720"/>
+            <a:off x="3200400" y="1956960"/>
+            <a:ext cx="8320680" cy="383760"/>
           </a:xfrm>
           <a:prstGeom prst="rect">
             <a:avLst/>
@@ -32749,7 +32749,7 @@
               </a:tabLst>
             </a:pPr>
             <a:r>
-              <a:rPr lang="en-US" sz="1550" b="0" u="none" strike="noStrike">
+              <a:rPr lang="en-US" sz="1700" b="1" u="none" strike="noStrike">
                 <a:solidFill>
                   <a:srgbClr val="1E293B"/>
                 </a:solidFill>
@@ -32758,38 +32758,34 @@
                 <a:latin typeface="Calibri"/>
                 <a:ea typeface="Calibri"/>
               </a:rPr>
-              <a:t>Objects, an API that answers, data that validates itself</a:t>
-            </a:r>
-            <a:endParaRPr lang="en-IN" sz="1550" b="0" u="none" strike="noStrike">
-              <a:solidFill>
-                <a:srgbClr val="000000"/>
-              </a:solidFill>
-              <a:effectLst/>
-              <a:uFillTx/>
-              <a:latin typeface="Arial"/>
-            </a:endParaRPr>
-          </a:p>
-        </p:txBody>
-      </p:sp>
-      <p:sp>
-        <p:nvSpPr>
-          <p:cNvPr id="25" name="Shape 7"/>
+              <a:t>Backend Foundations</a:t>
+            </a:r>
+            <a:endParaRPr lang="en-IN" sz="1700" b="0" u="none" strike="noStrike">
+              <a:solidFill>
+                <a:srgbClr val="000000"/>
+              </a:solidFill>
+              <a:effectLst/>
+              <a:uFillTx/>
+              <a:latin typeface="Arial"/>
+            </a:endParaRPr>
+          </a:p>
+        </p:txBody>
+      </p:sp>
+      <p:sp>
+        <p:nvSpPr>
+          <p:cNvPr id="25" name="Text 7"/>
           <p:cNvSpPr/>
           <p:nvPr/>
         </p:nvSpPr>
         <p:spPr>
           <a:xfrm>
-            <a:off x="548640" y="2788920"/>
-            <a:ext cx="639720" cy="639720"/>
-          </a:xfrm>
-          <a:prstGeom prst="roundRect">
-            <a:avLst>
-              <a:gd name="adj" fmla="val 50000"/>
-            </a:avLst>
-          </a:prstGeom>
-          <a:solidFill>
-            <a:srgbClr val="CBD5E1"/>
-          </a:solidFill>
+            <a:off x="3200400" y="2359080"/>
+            <a:ext cx="8320680" cy="402120"/>
+          </a:xfrm>
+          <a:prstGeom prst="rect">
+            <a:avLst/>
+          </a:prstGeom>
+          <a:noFill/>
           <a:ln w="0">
             <a:noFill/>
           </a:ln>
@@ -32801,36 +32797,60 @@
           <a:fontRef idx="minor"/>
         </p:style>
         <p:txBody>
-          <a:bodyPr lIns="90000" tIns="45000" rIns="90000" bIns="45000" anchor="t">
-            <a:noAutofit/>
-          </a:bodyPr>
-          <a:p>
-            <a:endParaRPr lang="en-IN" sz="1800" b="0" u="none" strike="noStrike">
-              <a:solidFill>
-                <a:srgbClr val="000000"/>
-              </a:solidFill>
-              <a:effectLst/>
-              <a:uFillTx/>
-              <a:latin typeface="Arial"/>
-            </a:endParaRPr>
-          </a:p>
-        </p:txBody>
-      </p:sp>
-      <p:sp>
-        <p:nvSpPr>
-          <p:cNvPr id="26" name="Text 8"/>
+          <a:bodyPr lIns="0" tIns="0" rIns="0" bIns="0" anchor="ctr">
+            <a:noAutofit/>
+          </a:bodyPr>
+          <a:p>
+            <a:pPr defTabSz="914400">
+              <a:lnSpc>
+                <a:spcPct val="100000"/>
+              </a:lnSpc>
+              <a:tabLst>
+                <a:tab pos="0" algn="l"/>
+              </a:tabLst>
+            </a:pPr>
+            <a:r>
+              <a:rPr lang="en-US" sz="1200" b="0" u="none" strike="noStrike">
+                <a:solidFill>
+                  <a:srgbClr val="64748B"/>
+                </a:solidFill>
+                <a:effectLst/>
+                <a:uFillTx/>
+                <a:latin typeface="Calibri"/>
+                <a:ea typeface="Calibri"/>
+              </a:rPr>
+              <a:t>Python &amp; OOP  ·  FastAPI  ·  Pydantic</a:t>
+            </a:r>
+            <a:endParaRPr lang="en-IN" sz="1200" b="0" u="none" strike="noStrike">
+              <a:solidFill>
+                <a:srgbClr val="000000"/>
+              </a:solidFill>
+              <a:effectLst/>
+              <a:uFillTx/>
+              <a:latin typeface="Arial"/>
+            </a:endParaRPr>
+          </a:p>
+        </p:txBody>
+      </p:sp>
+      <p:sp>
+        <p:nvSpPr>
+          <p:cNvPr id="26" name="Shape 8"/>
           <p:cNvSpPr/>
           <p:nvPr/>
         </p:nvSpPr>
         <p:spPr>
           <a:xfrm>
-            <a:off x="548640" y="2788920"/>
+            <a:off x="548640" y="3273480"/>
             <a:ext cx="639720" cy="639720"/>
           </a:xfrm>
-          <a:prstGeom prst="rect">
-            <a:avLst/>
-          </a:prstGeom>
-          <a:noFill/>
+          <a:prstGeom prst="roundRect">
+            <a:avLst>
+              <a:gd name="adj" fmla="val 50000"/>
+            </a:avLst>
+          </a:prstGeom>
+          <a:solidFill>
+            <a:srgbClr val="CBD5E1"/>
+          </a:solidFill>
           <a:ln w="0">
             <a:noFill/>
           </a:ln>
@@ -32842,6 +32862,47 @@
           <a:fontRef idx="minor"/>
         </p:style>
         <p:txBody>
+          <a:bodyPr lIns="90000" tIns="45000" rIns="90000" bIns="45000" anchor="t">
+            <a:noAutofit/>
+          </a:bodyPr>
+          <a:p>
+            <a:endParaRPr lang="en-IN" sz="1800" b="0" u="none" strike="noStrike">
+              <a:solidFill>
+                <a:srgbClr val="000000"/>
+              </a:solidFill>
+              <a:effectLst/>
+              <a:uFillTx/>
+              <a:latin typeface="Arial"/>
+            </a:endParaRPr>
+          </a:p>
+        </p:txBody>
+      </p:sp>
+      <p:sp>
+        <p:nvSpPr>
+          <p:cNvPr id="27" name="Text 9"/>
+          <p:cNvSpPr/>
+          <p:nvPr/>
+        </p:nvSpPr>
+        <p:spPr>
+          <a:xfrm>
+            <a:off x="548640" y="3273480"/>
+            <a:ext cx="639720" cy="639720"/>
+          </a:xfrm>
+          <a:prstGeom prst="rect">
+            <a:avLst/>
+          </a:prstGeom>
+          <a:noFill/>
+          <a:ln w="0">
+            <a:noFill/>
+          </a:ln>
+        </p:spPr>
+        <p:style>
+          <a:lnRef idx="0"/>
+          <a:fillRef idx="0"/>
+          <a:effectRef idx="0"/>
+          <a:fontRef idx="minor"/>
+        </p:style>
+        <p:txBody>
           <a:bodyPr lIns="0" tIns="0" rIns="0" bIns="0" anchor="ctr">
             <a:noAutofit/>
           </a:bodyPr>
@@ -32879,18 +32940,18 @@
       </p:sp>
       <p:sp>
         <p:nvSpPr>
-          <p:cNvPr id="27" name="Shape 9"/>
+          <p:cNvPr id="28" name="Shape 10"/>
           <p:cNvSpPr/>
           <p:nvPr/>
         </p:nvSpPr>
         <p:spPr>
           <a:xfrm>
-            <a:off x="1463040" y="2788920"/>
-            <a:ext cx="10176840" cy="639720"/>
+            <a:off x="1463040" y="3063240"/>
+            <a:ext cx="10176840" cy="1051200"/>
           </a:xfrm>
           <a:prstGeom prst="roundRect">
             <a:avLst>
-              <a:gd name="adj" fmla="val 14286"/>
+              <a:gd name="adj" fmla="val 8696"/>
             </a:avLst>
           </a:prstGeom>
           <a:solidFill>
@@ -32927,14 +32988,14 @@
       </p:sp>
       <p:sp>
         <p:nvSpPr>
-          <p:cNvPr id="28" name="Text 10"/>
+          <p:cNvPr id="29" name="Text 11"/>
           <p:cNvSpPr/>
           <p:nvPr/>
         </p:nvSpPr>
         <p:spPr>
           <a:xfrm>
-            <a:off x="1737360" y="2788920"/>
-            <a:ext cx="1371240" cy="639720"/>
+            <a:off x="1737360" y="3063240"/>
+            <a:ext cx="1371240" cy="1051200"/>
           </a:xfrm>
           <a:prstGeom prst="rect">
             <a:avLst/>
@@ -32988,14 +33049,14 @@
       </p:sp>
       <p:sp>
         <p:nvSpPr>
-          <p:cNvPr id="29" name="Text 11"/>
+          <p:cNvPr id="30" name="Text 12"/>
           <p:cNvSpPr/>
           <p:nvPr/>
         </p:nvSpPr>
         <p:spPr>
           <a:xfrm>
-            <a:off x="3200400" y="2788920"/>
-            <a:ext cx="8320680" cy="639720"/>
+            <a:off x="3200400" y="3191400"/>
+            <a:ext cx="8320680" cy="383760"/>
           </a:xfrm>
           <a:prstGeom prst="rect">
             <a:avLst/>
@@ -33025,7 +33086,7 @@
               </a:tabLst>
             </a:pPr>
             <a:r>
-              <a:rPr lang="en-US" sz="1550" b="0" u="none" strike="noStrike">
+              <a:rPr lang="en-US" sz="1700" b="1" u="none" strike="noStrike">
                 <a:solidFill>
                   <a:srgbClr val="64748B"/>
                 </a:solidFill>
@@ -33034,38 +33095,34 @@
                 <a:latin typeface="Calibri"/>
                 <a:ea typeface="Calibri"/>
               </a:rPr>
-              <a:t>The same API done properly — full CRUD, real error handling</a:t>
-            </a:r>
-            <a:endParaRPr lang="en-IN" sz="1550" b="0" u="none" strike="noStrike">
-              <a:solidFill>
-                <a:srgbClr val="000000"/>
-              </a:solidFill>
-              <a:effectLst/>
-              <a:uFillTx/>
-              <a:latin typeface="Arial"/>
-            </a:endParaRPr>
-          </a:p>
-        </p:txBody>
-      </p:sp>
-      <p:sp>
-        <p:nvSpPr>
-          <p:cNvPr id="30" name="Shape 12"/>
+              <a:t>APIs &amp; Databases</a:t>
+            </a:r>
+            <a:endParaRPr lang="en-IN" sz="1700" b="0" u="none" strike="noStrike">
+              <a:solidFill>
+                <a:srgbClr val="000000"/>
+              </a:solidFill>
+              <a:effectLst/>
+              <a:uFillTx/>
+              <a:latin typeface="Arial"/>
+            </a:endParaRPr>
+          </a:p>
+        </p:txBody>
+      </p:sp>
+      <p:sp>
+        <p:nvSpPr>
+          <p:cNvPr id="31" name="Text 13"/>
           <p:cNvSpPr/>
           <p:nvPr/>
         </p:nvSpPr>
         <p:spPr>
           <a:xfrm>
-            <a:off x="548640" y="3749040"/>
-            <a:ext cx="639720" cy="639720"/>
-          </a:xfrm>
-          <a:prstGeom prst="roundRect">
-            <a:avLst>
-              <a:gd name="adj" fmla="val 50000"/>
-            </a:avLst>
-          </a:prstGeom>
-          <a:solidFill>
-            <a:srgbClr val="CBD5E1"/>
-          </a:solidFill>
+            <a:off x="3200400" y="3593520"/>
+            <a:ext cx="8320680" cy="402120"/>
+          </a:xfrm>
+          <a:prstGeom prst="rect">
+            <a:avLst/>
+          </a:prstGeom>
+          <a:noFill/>
           <a:ln w="0">
             <a:noFill/>
           </a:ln>
@@ -33077,36 +33134,60 @@
           <a:fontRef idx="minor"/>
         </p:style>
         <p:txBody>
-          <a:bodyPr lIns="90000" tIns="45000" rIns="90000" bIns="45000" anchor="t">
-            <a:noAutofit/>
-          </a:bodyPr>
-          <a:p>
-            <a:endParaRPr lang="en-IN" sz="1800" b="0" u="none" strike="noStrike">
-              <a:solidFill>
-                <a:srgbClr val="000000"/>
-              </a:solidFill>
-              <a:effectLst/>
-              <a:uFillTx/>
-              <a:latin typeface="Arial"/>
-            </a:endParaRPr>
-          </a:p>
-        </p:txBody>
-      </p:sp>
-      <p:sp>
-        <p:nvSpPr>
-          <p:cNvPr id="31" name="Text 13"/>
+          <a:bodyPr lIns="0" tIns="0" rIns="0" bIns="0" anchor="ctr">
+            <a:noAutofit/>
+          </a:bodyPr>
+          <a:p>
+            <a:pPr defTabSz="914400">
+              <a:lnSpc>
+                <a:spcPct val="100000"/>
+              </a:lnSpc>
+              <a:tabLst>
+                <a:tab pos="0" algn="l"/>
+              </a:tabLst>
+            </a:pPr>
+            <a:r>
+              <a:rPr lang="en-US" sz="1200" b="0" u="none" strike="noStrike">
+                <a:solidFill>
+                  <a:srgbClr val="64748B"/>
+                </a:solidFill>
+                <a:effectLst/>
+                <a:uFillTx/>
+                <a:latin typeface="Calibri"/>
+                <a:ea typeface="Calibri"/>
+              </a:rPr>
+              <a:t>REST design  ·  full CRUD  ·  error handling  ·  Depends &amp; APIRouter  ·  SQL  ·  PostgreSQL  ·  SQLAlchemy  ·  relationships</a:t>
+            </a:r>
+            <a:endParaRPr lang="en-IN" sz="1200" b="0" u="none" strike="noStrike">
+              <a:solidFill>
+                <a:srgbClr val="000000"/>
+              </a:solidFill>
+              <a:effectLst/>
+              <a:uFillTx/>
+              <a:latin typeface="Arial"/>
+            </a:endParaRPr>
+          </a:p>
+        </p:txBody>
+      </p:sp>
+      <p:sp>
+        <p:nvSpPr>
+          <p:cNvPr id="32" name="Shape 14"/>
           <p:cNvSpPr/>
           <p:nvPr/>
         </p:nvSpPr>
         <p:spPr>
           <a:xfrm>
-            <a:off x="548640" y="3749040"/>
+            <a:off x="548640" y="4507920"/>
             <a:ext cx="639720" cy="639720"/>
           </a:xfrm>
-          <a:prstGeom prst="rect">
-            <a:avLst/>
-          </a:prstGeom>
-          <a:noFill/>
+          <a:prstGeom prst="roundRect">
+            <a:avLst>
+              <a:gd name="adj" fmla="val 50000"/>
+            </a:avLst>
+          </a:prstGeom>
+          <a:solidFill>
+            <a:srgbClr val="CBD5E1"/>
+          </a:solidFill>
           <a:ln w="0">
             <a:noFill/>
           </a:ln>
@@ -33118,6 +33199,47 @@
           <a:fontRef idx="minor"/>
         </p:style>
         <p:txBody>
+          <a:bodyPr lIns="90000" tIns="45000" rIns="90000" bIns="45000" anchor="t">
+            <a:noAutofit/>
+          </a:bodyPr>
+          <a:p>
+            <a:endParaRPr lang="en-IN" sz="1800" b="0" u="none" strike="noStrike">
+              <a:solidFill>
+                <a:srgbClr val="000000"/>
+              </a:solidFill>
+              <a:effectLst/>
+              <a:uFillTx/>
+              <a:latin typeface="Arial"/>
+            </a:endParaRPr>
+          </a:p>
+        </p:txBody>
+      </p:sp>
+      <p:sp>
+        <p:nvSpPr>
+          <p:cNvPr id="33" name="Text 15"/>
+          <p:cNvSpPr/>
+          <p:nvPr/>
+        </p:nvSpPr>
+        <p:spPr>
+          <a:xfrm>
+            <a:off x="548640" y="4507920"/>
+            <a:ext cx="639720" cy="639720"/>
+          </a:xfrm>
+          <a:prstGeom prst="rect">
+            <a:avLst/>
+          </a:prstGeom>
+          <a:noFill/>
+          <a:ln w="0">
+            <a:noFill/>
+          </a:ln>
+        </p:spPr>
+        <p:style>
+          <a:lnRef idx="0"/>
+          <a:fillRef idx="0"/>
+          <a:effectRef idx="0"/>
+          <a:fontRef idx="minor"/>
+        </p:style>
+        <p:txBody>
           <a:bodyPr lIns="0" tIns="0" rIns="0" bIns="0" anchor="ctr">
             <a:noAutofit/>
           </a:bodyPr>
@@ -33155,18 +33277,18 @@
       </p:sp>
       <p:sp>
         <p:nvSpPr>
-          <p:cNvPr id="32" name="Shape 14"/>
+          <p:cNvPr id="34" name="Shape 16"/>
           <p:cNvSpPr/>
           <p:nvPr/>
         </p:nvSpPr>
         <p:spPr>
           <a:xfrm>
-            <a:off x="1463040" y="3749040"/>
-            <a:ext cx="10176840" cy="639720"/>
+            <a:off x="1463040" y="4297680"/>
+            <a:ext cx="10176840" cy="1051200"/>
           </a:xfrm>
           <a:prstGeom prst="roundRect">
             <a:avLst>
-              <a:gd name="adj" fmla="val 14286"/>
+              <a:gd name="adj" fmla="val 8696"/>
             </a:avLst>
           </a:prstGeom>
           <a:solidFill>
@@ -33203,14 +33325,14 @@
       </p:sp>
       <p:sp>
         <p:nvSpPr>
-          <p:cNvPr id="33" name="Text 15"/>
+          <p:cNvPr id="35" name="Text 17"/>
           <p:cNvSpPr/>
           <p:nvPr/>
         </p:nvSpPr>
         <p:spPr>
           <a:xfrm>
-            <a:off x="1737360" y="3749040"/>
-            <a:ext cx="1371240" cy="639720"/>
+            <a:off x="1737360" y="4297680"/>
+            <a:ext cx="1371240" cy="1051200"/>
           </a:xfrm>
           <a:prstGeom prst="rect">
             <a:avLst/>
@@ -33249,7 +33371,7 @@
                 <a:latin typeface="Calibri"/>
                 <a:ea typeface="Calibri"/>
               </a:rPr>
-              <a:t>THEN</a:t>
+              <a:t>FINALLY</a:t>
             </a:r>
             <a:endParaRPr lang="en-IN" sz="1300" b="0" u="none" strike="noStrike">
               <a:solidFill>
@@ -33264,14 +33386,14 @@
       </p:sp>
       <p:sp>
         <p:nvSpPr>
-          <p:cNvPr id="34" name="Text 16"/>
+          <p:cNvPr id="36" name="Text 18"/>
           <p:cNvSpPr/>
           <p:nvPr/>
         </p:nvSpPr>
         <p:spPr>
           <a:xfrm>
-            <a:off x="3200400" y="3749040"/>
-            <a:ext cx="8320680" cy="639720"/>
+            <a:off x="3200400" y="4425840"/>
+            <a:ext cx="8320680" cy="383760"/>
           </a:xfrm>
           <a:prstGeom prst="rect">
             <a:avLst/>
@@ -33301,7 +33423,7 @@
               </a:tabLst>
             </a:pPr>
             <a:r>
-              <a:rPr lang="en-US" sz="1550" b="0" u="none" strike="noStrike">
+              <a:rPr lang="en-US" sz="1700" b="1" u="none" strike="noStrike">
                 <a:solidFill>
                   <a:srgbClr val="64748B"/>
                 </a:solidFill>
@@ -33310,38 +33432,34 @@
                 <a:latin typeface="Calibri"/>
                 <a:ea typeface="Calibri"/>
               </a:rPr>
-              <a:t>A real database, so the data survives a restart</a:t>
-            </a:r>
-            <a:endParaRPr lang="en-IN" sz="1550" b="0" u="none" strike="noStrike">
-              <a:solidFill>
-                <a:srgbClr val="000000"/>
-              </a:solidFill>
-              <a:effectLst/>
-              <a:uFillTx/>
-              <a:latin typeface="Arial"/>
-            </a:endParaRPr>
-          </a:p>
-        </p:txBody>
-      </p:sp>
-      <p:sp>
-        <p:nvSpPr>
-          <p:cNvPr id="35" name="Shape 17"/>
+              <a:t>Auth, Docker &amp; Deploy</a:t>
+            </a:r>
+            <a:endParaRPr lang="en-IN" sz="1700" b="0" u="none" strike="noStrike">
+              <a:solidFill>
+                <a:srgbClr val="000000"/>
+              </a:solidFill>
+              <a:effectLst/>
+              <a:uFillTx/>
+              <a:latin typeface="Arial"/>
+            </a:endParaRPr>
+          </a:p>
+        </p:txBody>
+      </p:sp>
+      <p:sp>
+        <p:nvSpPr>
+          <p:cNvPr id="37" name="Text 19"/>
           <p:cNvSpPr/>
           <p:nvPr/>
         </p:nvSpPr>
         <p:spPr>
           <a:xfrm>
-            <a:off x="548640" y="4709160"/>
-            <a:ext cx="639720" cy="639720"/>
-          </a:xfrm>
-          <a:prstGeom prst="roundRect">
-            <a:avLst>
-              <a:gd name="adj" fmla="val 50000"/>
-            </a:avLst>
-          </a:prstGeom>
-          <a:solidFill>
-            <a:srgbClr val="CBD5E1"/>
-          </a:solidFill>
+            <a:off x="3200400" y="4827960"/>
+            <a:ext cx="8320680" cy="402120"/>
+          </a:xfrm>
+          <a:prstGeom prst="rect">
+            <a:avLst/>
+          </a:prstGeom>
+          <a:noFill/>
           <a:ln w="0">
             <a:noFill/>
           </a:ln>
@@ -33353,52 +33471,11 @@
           <a:fontRef idx="minor"/>
         </p:style>
         <p:txBody>
-          <a:bodyPr lIns="90000" tIns="45000" rIns="90000" bIns="45000" anchor="t">
-            <a:noAutofit/>
-          </a:bodyPr>
-          <a:p>
-            <a:endParaRPr lang="en-IN" sz="1800" b="0" u="none" strike="noStrike">
-              <a:solidFill>
-                <a:srgbClr val="000000"/>
-              </a:solidFill>
-              <a:effectLst/>
-              <a:uFillTx/>
-              <a:latin typeface="Arial"/>
-            </a:endParaRPr>
-          </a:p>
-        </p:txBody>
-      </p:sp>
-      <p:sp>
-        <p:nvSpPr>
-          <p:cNvPr id="36" name="Text 18"/>
-          <p:cNvSpPr/>
-          <p:nvPr/>
-        </p:nvSpPr>
-        <p:spPr>
-          <a:xfrm>
-            <a:off x="548640" y="4709160"/>
-            <a:ext cx="639720" cy="639720"/>
-          </a:xfrm>
-          <a:prstGeom prst="rect">
-            <a:avLst/>
-          </a:prstGeom>
-          <a:noFill/>
-          <a:ln w="0">
-            <a:noFill/>
-          </a:ln>
-        </p:spPr>
-        <p:style>
-          <a:lnRef idx="0"/>
-          <a:fillRef idx="0"/>
-          <a:effectRef idx="0"/>
-          <a:fontRef idx="minor"/>
-        </p:style>
-        <p:txBody>
           <a:bodyPr lIns="0" tIns="0" rIns="0" bIns="0" anchor="ctr">
             <a:noAutofit/>
           </a:bodyPr>
           <a:p>
-            <a:pPr algn="ctr" defTabSz="914400">
+            <a:pPr defTabSz="914400">
               <a:lnSpc>
                 <a:spcPct val="100000"/>
               </a:lnSpc>
@@ -33407,201 +33484,31 @@
               </a:tabLst>
             </a:pPr>
             <a:r>
-              <a:rPr lang="en-US" sz="1500" b="1" u="none" strike="noStrike">
-                <a:solidFill>
-                  <a:srgbClr val="FFFFFF"/>
+              <a:rPr lang="en-US" sz="1200" b="0" u="none" strike="noStrike">
+                <a:solidFill>
+                  <a:srgbClr val="64748B"/>
                 </a:solidFill>
                 <a:effectLst/>
                 <a:uFillTx/>
                 <a:latin typeface="Calibri"/>
                 <a:ea typeface="Calibri"/>
               </a:rPr>
-              <a:t>4</a:t>
-            </a:r>
-            <a:endParaRPr lang="en-IN" sz="1500" b="0" u="none" strike="noStrike">
-              <a:solidFill>
-                <a:srgbClr val="000000"/>
-              </a:solidFill>
-              <a:effectLst/>
-              <a:uFillTx/>
-              <a:latin typeface="Arial"/>
-            </a:endParaRPr>
-          </a:p>
-        </p:txBody>
-      </p:sp>
-      <p:sp>
-        <p:nvSpPr>
-          <p:cNvPr id="37" name="Shape 19"/>
-          <p:cNvSpPr/>
-          <p:nvPr/>
-        </p:nvSpPr>
-        <p:spPr>
-          <a:xfrm>
-            <a:off x="1463040" y="4709160"/>
-            <a:ext cx="10176840" cy="639720"/>
-          </a:xfrm>
-          <a:prstGeom prst="roundRect">
-            <a:avLst>
-              <a:gd name="adj" fmla="val 14286"/>
-            </a:avLst>
-          </a:prstGeom>
-          <a:solidFill>
-            <a:srgbClr val="F8FAFC"/>
-          </a:solidFill>
-          <a:ln w="12700">
-            <a:solidFill>
-              <a:srgbClr val="E2E8F0"/>
-            </a:solidFill>
-            <a:round/>
-          </a:ln>
-        </p:spPr>
-        <p:style>
-          <a:lnRef idx="0"/>
-          <a:fillRef idx="0"/>
-          <a:effectRef idx="0"/>
-          <a:fontRef idx="minor"/>
-        </p:style>
-        <p:txBody>
-          <a:bodyPr lIns="90000" tIns="45000" rIns="90000" bIns="45000" anchor="t">
-            <a:noAutofit/>
-          </a:bodyPr>
-          <a:p>
-            <a:endParaRPr lang="en-IN" sz="1800" b="0" u="none" strike="noStrike">
-              <a:solidFill>
-                <a:srgbClr val="000000"/>
-              </a:solidFill>
-              <a:effectLst/>
-              <a:uFillTx/>
-              <a:latin typeface="Arial"/>
-            </a:endParaRPr>
-          </a:p>
-        </p:txBody>
-      </p:sp>
-      <p:sp>
-        <p:nvSpPr>
-          <p:cNvPr id="38" name="Text 20"/>
-          <p:cNvSpPr/>
-          <p:nvPr/>
-        </p:nvSpPr>
-        <p:spPr>
-          <a:xfrm>
-            <a:off x="1737360" y="4709160"/>
-            <a:ext cx="1371240" cy="639720"/>
-          </a:xfrm>
-          <a:prstGeom prst="rect">
-            <a:avLst/>
-          </a:prstGeom>
-          <a:noFill/>
-          <a:ln w="0">
-            <a:noFill/>
-          </a:ln>
-        </p:spPr>
-        <p:style>
-          <a:lnRef idx="0"/>
-          <a:fillRef idx="0"/>
-          <a:effectRef idx="0"/>
-          <a:fontRef idx="minor"/>
-        </p:style>
-        <p:txBody>
-          <a:bodyPr lIns="0" tIns="0" rIns="0" bIns="0" anchor="ctr">
-            <a:noAutofit/>
-          </a:bodyPr>
-          <a:p>
-            <a:pPr defTabSz="914400">
-              <a:lnSpc>
-                <a:spcPct val="100000"/>
-              </a:lnSpc>
-              <a:tabLst>
-                <a:tab pos="0" algn="l"/>
-              </a:tabLst>
-            </a:pPr>
-            <a:r>
-              <a:rPr lang="en-US" sz="1300" b="1" u="none" strike="noStrike">
-                <a:solidFill>
-                  <a:srgbClr val="64748B"/>
-                </a:solidFill>
-                <a:effectLst/>
-                <a:uFillTx/>
-                <a:latin typeface="Calibri"/>
-                <a:ea typeface="Calibri"/>
-              </a:rPr>
-              <a:t>FINALLY</a:t>
-            </a:r>
-            <a:endParaRPr lang="en-IN" sz="1300" b="0" u="none" strike="noStrike">
-              <a:solidFill>
-                <a:srgbClr val="000000"/>
-              </a:solidFill>
-              <a:effectLst/>
-              <a:uFillTx/>
-              <a:latin typeface="Arial"/>
-            </a:endParaRPr>
-          </a:p>
-        </p:txBody>
-      </p:sp>
-      <p:sp>
-        <p:nvSpPr>
-          <p:cNvPr id="39" name="Text 21"/>
-          <p:cNvSpPr/>
-          <p:nvPr/>
-        </p:nvSpPr>
-        <p:spPr>
-          <a:xfrm>
-            <a:off x="3200400" y="4709160"/>
-            <a:ext cx="8320680" cy="639720"/>
-          </a:xfrm>
-          <a:prstGeom prst="rect">
-            <a:avLst/>
-          </a:prstGeom>
-          <a:noFill/>
-          <a:ln w="0">
-            <a:noFill/>
-          </a:ln>
-        </p:spPr>
-        <p:style>
-          <a:lnRef idx="0"/>
-          <a:fillRef idx="0"/>
-          <a:effectRef idx="0"/>
-          <a:fontRef idx="minor"/>
-        </p:style>
-        <p:txBody>
-          <a:bodyPr lIns="0" tIns="0" rIns="0" bIns="0" anchor="ctr">
-            <a:noAutofit/>
-          </a:bodyPr>
-          <a:p>
-            <a:pPr defTabSz="914400">
-              <a:lnSpc>
-                <a:spcPct val="100000"/>
-              </a:lnSpc>
-              <a:tabLst>
-                <a:tab pos="0" algn="l"/>
-              </a:tabLst>
-            </a:pPr>
-            <a:r>
-              <a:rPr lang="en-US" sz="1550" b="0" u="none" strike="noStrike">
-                <a:solidFill>
-                  <a:srgbClr val="64748B"/>
-                </a:solidFill>
-                <a:effectLst/>
-                <a:uFillTx/>
-                <a:latin typeface="Calibri"/>
-                <a:ea typeface="Calibri"/>
-              </a:rPr>
-              <a:t>Logins and roles, Docker, and shipping it</a:t>
-            </a:r>
-            <a:endParaRPr lang="en-IN" sz="1550" b="0" u="none" strike="noStrike">
-              <a:solidFill>
-                <a:srgbClr val="000000"/>
-              </a:solidFill>
-              <a:effectLst/>
-              <a:uFillTx/>
-              <a:latin typeface="Arial"/>
-            </a:endParaRPr>
-          </a:p>
-        </p:txBody>
-      </p:sp>
-      <p:sp>
-        <p:nvSpPr>
-          <p:cNvPr id="40" name="Shape 22"/>
+              <a:t>hashing &amp; JWT  ·  RBAC  ·  security  ·  Redis caching  ·  Docker  ·  live deployment  ·  an AI endpoint</a:t>
+            </a:r>
+            <a:endParaRPr lang="en-IN" sz="1200" b="0" u="none" strike="noStrike">
+              <a:solidFill>
+                <a:srgbClr val="000000"/>
+              </a:solidFill>
+              <a:effectLst/>
+              <a:uFillTx/>
+              <a:latin typeface="Arial"/>
+            </a:endParaRPr>
+          </a:p>
+        </p:txBody>
+      </p:sp>
+      <p:sp>
+        <p:nvSpPr>
+          <p:cNvPr id="38" name="Shape 20"/>
           <p:cNvSpPr/>
           <p:nvPr/>
         </p:nvSpPr>
@@ -33649,7 +33556,7 @@
       </p:sp>
       <p:sp>
         <p:nvSpPr>
-          <p:cNvPr id="41" name="Text 23"/>
+          <p:cNvPr id="39" name="Text 21"/>
           <p:cNvSpPr/>
           <p:nvPr/>
         </p:nvSpPr>
@@ -33722,7 +33629,7 @@
       </p:sp>
       <p:sp>
         <p:nvSpPr>
-          <p:cNvPr id="42" name="Text 24"/>
+          <p:cNvPr id="40" name="Text 22"/>
           <p:cNvSpPr/>
           <p:nvPr/>
         </p:nvSpPr>
@@ -33783,7 +33690,7 @@
       </p:sp>
       <p:sp>
         <p:nvSpPr>
-          <p:cNvPr id="43" name="Text 25"/>
+          <p:cNvPr id="41" name="Text 23"/>
           <p:cNvSpPr/>
           <p:nvPr/>
         </p:nvSpPr>
@@ -33881,7 +33788,7 @@
       </p:grpSpPr>
       <p:sp>
         <p:nvSpPr>
-          <p:cNvPr id="386" name="Text 0"/>
+          <p:cNvPr id="384" name="Text 0"/>
           <p:cNvSpPr/>
           <p:nvPr/>
         </p:nvSpPr>
@@ -33942,7 +33849,7 @@
       </p:sp>
       <p:sp>
         <p:nvSpPr>
-          <p:cNvPr id="387" name="Text 1"/>
+          <p:cNvPr id="385" name="Text 1"/>
           <p:cNvSpPr/>
           <p:nvPr/>
         </p:nvSpPr>
@@ -34033,7 +33940,7 @@
       </p:grpSpPr>
       <p:sp>
         <p:nvSpPr>
-          <p:cNvPr id="388" name="Text 0"/>
+          <p:cNvPr id="386" name="Text 0"/>
           <p:cNvSpPr/>
           <p:nvPr/>
         </p:nvSpPr>
@@ -34094,7 +34001,7 @@
       </p:sp>
       <p:sp>
         <p:nvSpPr>
-          <p:cNvPr id="389" name="Shape 1"/>
+          <p:cNvPr id="387" name="Shape 1"/>
           <p:cNvSpPr/>
           <p:nvPr/>
         </p:nvSpPr>
@@ -34142,7 +34049,7 @@
       </p:sp>
       <p:sp>
         <p:nvSpPr>
-          <p:cNvPr id="390" name="Text 2"/>
+          <p:cNvPr id="388" name="Text 2"/>
           <p:cNvSpPr/>
           <p:nvPr/>
         </p:nvSpPr>
@@ -34323,7 +34230,7 @@
       </p:sp>
       <p:sp>
         <p:nvSpPr>
-          <p:cNvPr id="391" name="Shape 3"/>
+          <p:cNvPr id="389" name="Shape 3"/>
           <p:cNvSpPr/>
           <p:nvPr/>
         </p:nvSpPr>
@@ -34371,7 +34278,7 @@
       </p:sp>
       <p:sp>
         <p:nvSpPr>
-          <p:cNvPr id="392" name="Text 4"/>
+          <p:cNvPr id="390" name="Text 4"/>
           <p:cNvSpPr/>
           <p:nvPr/>
         </p:nvSpPr>
@@ -34432,7 +34339,7 @@
       </p:sp>
       <p:sp>
         <p:nvSpPr>
-          <p:cNvPr id="393" name="Text 5"/>
+          <p:cNvPr id="391" name="Text 5"/>
           <p:cNvSpPr/>
           <p:nvPr/>
         </p:nvSpPr>
@@ -34505,7 +34412,7 @@
       </p:sp>
       <p:sp>
         <p:nvSpPr>
-          <p:cNvPr id="394" name="Shape 6"/>
+          <p:cNvPr id="392" name="Shape 6"/>
           <p:cNvSpPr/>
           <p:nvPr/>
         </p:nvSpPr>
@@ -34553,7 +34460,7 @@
       </p:sp>
       <p:sp>
         <p:nvSpPr>
-          <p:cNvPr id="395" name="Text 7"/>
+          <p:cNvPr id="393" name="Text 7"/>
           <p:cNvSpPr/>
           <p:nvPr/>
         </p:nvSpPr>
@@ -34614,7 +34521,7 @@
       </p:sp>
       <p:sp>
         <p:nvSpPr>
-          <p:cNvPr id="396" name="Text 8"/>
+          <p:cNvPr id="394" name="Text 8"/>
           <p:cNvSpPr/>
           <p:nvPr/>
         </p:nvSpPr>
@@ -34687,7 +34594,7 @@
       </p:sp>
       <p:sp>
         <p:nvSpPr>
-          <p:cNvPr id="397" name="Text 9"/>
+          <p:cNvPr id="395" name="Text 9"/>
           <p:cNvSpPr/>
           <p:nvPr/>
         </p:nvSpPr>
@@ -34748,7 +34655,7 @@
       </p:sp>
       <p:sp>
         <p:nvSpPr>
-          <p:cNvPr id="398" name="Shape 10"/>
+          <p:cNvPr id="396" name="Shape 10"/>
           <p:cNvSpPr/>
           <p:nvPr/>
         </p:nvSpPr>
@@ -34796,7 +34703,7 @@
       </p:sp>
       <p:sp>
         <p:nvSpPr>
-          <p:cNvPr id="399" name="Text 11"/>
+          <p:cNvPr id="397" name="Text 11"/>
           <p:cNvSpPr/>
           <p:nvPr/>
         </p:nvSpPr>
@@ -34965,7 +34872,7 @@
       </p:sp>
       <p:sp>
         <p:nvSpPr>
-          <p:cNvPr id="400" name="Shape 12"/>
+          <p:cNvPr id="398" name="Shape 12"/>
           <p:cNvSpPr/>
           <p:nvPr/>
         </p:nvSpPr>
@@ -35013,7 +34920,7 @@
       </p:sp>
       <p:sp>
         <p:nvSpPr>
-          <p:cNvPr id="401" name="Text 13"/>
+          <p:cNvPr id="399" name="Text 13"/>
           <p:cNvSpPr/>
           <p:nvPr/>
         </p:nvSpPr>
@@ -35086,7 +34993,7 @@
       </p:sp>
       <p:sp>
         <p:nvSpPr>
-          <p:cNvPr id="402" name="Text 14"/>
+          <p:cNvPr id="400" name="Text 14"/>
           <p:cNvSpPr/>
           <p:nvPr/>
         </p:nvSpPr>
@@ -35147,7 +35054,7 @@
       </p:sp>
       <p:sp>
         <p:nvSpPr>
-          <p:cNvPr id="403" name="Text 15"/>
+          <p:cNvPr id="401" name="Text 15"/>
           <p:cNvSpPr/>
           <p:nvPr/>
         </p:nvSpPr>
@@ -35238,7 +35145,7 @@
       </p:grpSpPr>
       <p:sp>
         <p:nvSpPr>
-          <p:cNvPr id="404" name="Text 0"/>
+          <p:cNvPr id="402" name="Text 0"/>
           <p:cNvSpPr/>
           <p:nvPr/>
         </p:nvSpPr>
@@ -35299,7 +35206,7 @@
       </p:sp>
       <p:sp>
         <p:nvSpPr>
-          <p:cNvPr id="405" name="Shape 1"/>
+          <p:cNvPr id="403" name="Shape 1"/>
           <p:cNvSpPr/>
           <p:nvPr/>
         </p:nvSpPr>
@@ -35347,7 +35254,7 @@
       </p:sp>
       <p:sp>
         <p:nvSpPr>
-          <p:cNvPr id="406" name="Text 2"/>
+          <p:cNvPr id="404" name="Text 2"/>
           <p:cNvSpPr/>
           <p:nvPr/>
         </p:nvSpPr>
@@ -35528,7 +35435,7 @@
       </p:sp>
       <p:graphicFrame>
         <p:nvGraphicFramePr>
-          <p:cNvPr id="407" name="Table 0"/>
+          <p:cNvPr id="405" name="Table 0"/>
           <p:cNvGraphicFramePr/>
           <p:nvPr/>
         </p:nvGraphicFramePr>
@@ -36200,7 +36107,7 @@
       </p:graphicFrame>
       <p:sp>
         <p:nvSpPr>
-          <p:cNvPr id="408" name="Shape 3"/>
+          <p:cNvPr id="406" name="Shape 3"/>
           <p:cNvSpPr/>
           <p:nvPr/>
         </p:nvSpPr>
@@ -36248,7 +36155,7 @@
       </p:sp>
       <p:sp>
         <p:nvSpPr>
-          <p:cNvPr id="409" name="Text 4"/>
+          <p:cNvPr id="407" name="Text 4"/>
           <p:cNvSpPr/>
           <p:nvPr/>
         </p:nvSpPr>
@@ -36399,7 +36306,7 @@
       </p:sp>
       <p:sp>
         <p:nvSpPr>
-          <p:cNvPr id="410" name="Shape 5"/>
+          <p:cNvPr id="408" name="Shape 5"/>
           <p:cNvSpPr/>
           <p:nvPr/>
         </p:nvSpPr>
@@ -36447,7 +36354,7 @@
       </p:sp>
       <p:sp>
         <p:nvSpPr>
-          <p:cNvPr id="411" name="Text 6"/>
+          <p:cNvPr id="409" name="Text 6"/>
           <p:cNvSpPr/>
           <p:nvPr/>
         </p:nvSpPr>
@@ -36520,7 +36427,7 @@
       </p:sp>
       <p:sp>
         <p:nvSpPr>
-          <p:cNvPr id="412" name="Text 7"/>
+          <p:cNvPr id="410" name="Text 7"/>
           <p:cNvSpPr/>
           <p:nvPr/>
         </p:nvSpPr>
@@ -36581,7 +36488,7 @@
       </p:sp>
       <p:sp>
         <p:nvSpPr>
-          <p:cNvPr id="413" name="Text 8"/>
+          <p:cNvPr id="411" name="Text 8"/>
           <p:cNvSpPr/>
           <p:nvPr/>
         </p:nvSpPr>
@@ -36642,7 +36549,7 @@
       </p:sp>
       <p:sp>
         <p:nvSpPr>
-          <p:cNvPr id="414" name="Text 9"/>
+          <p:cNvPr id="412" name="Text 9"/>
           <p:cNvSpPr/>
           <p:nvPr/>
         </p:nvSpPr>
@@ -36733,7 +36640,7 @@
       </p:grpSpPr>
       <p:sp>
         <p:nvSpPr>
-          <p:cNvPr id="415" name="Text 0"/>
+          <p:cNvPr id="413" name="Text 0"/>
           <p:cNvSpPr/>
           <p:nvPr/>
         </p:nvSpPr>
@@ -36794,7 +36701,7 @@
       </p:sp>
       <p:sp>
         <p:nvSpPr>
-          <p:cNvPr id="416" name="Shape 1"/>
+          <p:cNvPr id="414" name="Shape 1"/>
           <p:cNvSpPr/>
           <p:nvPr/>
         </p:nvSpPr>
@@ -36842,7 +36749,7 @@
       </p:sp>
       <p:sp>
         <p:nvSpPr>
-          <p:cNvPr id="417" name="Text 2"/>
+          <p:cNvPr id="415" name="Text 2"/>
           <p:cNvSpPr/>
           <p:nvPr/>
         </p:nvSpPr>
@@ -36903,7 +36810,7 @@
       </p:sp>
       <p:sp>
         <p:nvSpPr>
-          <p:cNvPr id="418" name="Text 3"/>
+          <p:cNvPr id="416" name="Text 3"/>
           <p:cNvSpPr/>
           <p:nvPr/>
         </p:nvSpPr>
@@ -36964,7 +36871,7 @@
       </p:sp>
       <p:sp>
         <p:nvSpPr>
-          <p:cNvPr id="419" name="Shape 4"/>
+          <p:cNvPr id="417" name="Shape 4"/>
           <p:cNvSpPr/>
           <p:nvPr/>
         </p:nvSpPr>
@@ -37012,7 +36919,7 @@
       </p:sp>
       <p:sp>
         <p:nvSpPr>
-          <p:cNvPr id="420" name="Text 5"/>
+          <p:cNvPr id="418" name="Text 5"/>
           <p:cNvSpPr/>
           <p:nvPr/>
         </p:nvSpPr>
@@ -37223,7 +37130,7 @@
       </p:sp>
       <p:sp>
         <p:nvSpPr>
-          <p:cNvPr id="421" name="Shape 6"/>
+          <p:cNvPr id="419" name="Shape 6"/>
           <p:cNvSpPr/>
           <p:nvPr/>
         </p:nvSpPr>
@@ -37271,7 +37178,7 @@
       </p:sp>
       <p:sp>
         <p:nvSpPr>
-          <p:cNvPr id="422" name="Text 7"/>
+          <p:cNvPr id="420" name="Text 7"/>
           <p:cNvSpPr/>
           <p:nvPr/>
         </p:nvSpPr>
@@ -37332,7 +37239,7 @@
       </p:sp>
       <p:sp>
         <p:nvSpPr>
-          <p:cNvPr id="423" name="Text 8"/>
+          <p:cNvPr id="421" name="Text 8"/>
           <p:cNvSpPr/>
           <p:nvPr/>
         </p:nvSpPr>
@@ -37393,7 +37300,7 @@
       </p:sp>
       <p:sp>
         <p:nvSpPr>
-          <p:cNvPr id="424" name="Shape 9"/>
+          <p:cNvPr id="422" name="Shape 9"/>
           <p:cNvSpPr/>
           <p:nvPr/>
         </p:nvSpPr>
@@ -37441,7 +37348,7 @@
       </p:sp>
       <p:sp>
         <p:nvSpPr>
-          <p:cNvPr id="425" name="Text 10"/>
+          <p:cNvPr id="423" name="Text 10"/>
           <p:cNvSpPr/>
           <p:nvPr/>
         </p:nvSpPr>
@@ -37622,7 +37529,7 @@
       </p:sp>
       <p:sp>
         <p:nvSpPr>
-          <p:cNvPr id="426" name="Shape 11"/>
+          <p:cNvPr id="424" name="Shape 11"/>
           <p:cNvSpPr/>
           <p:nvPr/>
         </p:nvSpPr>
@@ -37670,7 +37577,7 @@
       </p:sp>
       <p:sp>
         <p:nvSpPr>
-          <p:cNvPr id="427" name="Text 12"/>
+          <p:cNvPr id="425" name="Text 12"/>
           <p:cNvSpPr/>
           <p:nvPr/>
         </p:nvSpPr>
@@ -37743,7 +37650,7 @@
       </p:sp>
       <p:sp>
         <p:nvSpPr>
-          <p:cNvPr id="428" name="Shape 13"/>
+          <p:cNvPr id="426" name="Shape 13"/>
           <p:cNvSpPr/>
           <p:nvPr/>
         </p:nvSpPr>
@@ -37791,7 +37698,7 @@
       </p:sp>
       <p:sp>
         <p:nvSpPr>
-          <p:cNvPr id="429" name="Text 14"/>
+          <p:cNvPr id="427" name="Text 14"/>
           <p:cNvSpPr/>
           <p:nvPr/>
         </p:nvSpPr>
@@ -37882,7 +37789,7 @@
       </p:sp>
       <p:sp>
         <p:nvSpPr>
-          <p:cNvPr id="430" name="Text 15"/>
+          <p:cNvPr id="428" name="Text 15"/>
           <p:cNvSpPr/>
           <p:nvPr/>
         </p:nvSpPr>
@@ -37943,7 +37850,7 @@
       </p:sp>
       <p:sp>
         <p:nvSpPr>
-          <p:cNvPr id="431" name="Text 16"/>
+          <p:cNvPr id="429" name="Text 16"/>
           <p:cNvSpPr/>
           <p:nvPr/>
         </p:nvSpPr>
@@ -38034,7 +37941,7 @@
       </p:grpSpPr>
       <p:sp>
         <p:nvSpPr>
-          <p:cNvPr id="432" name="Text 0"/>
+          <p:cNvPr id="430" name="Text 0"/>
           <p:cNvSpPr/>
           <p:nvPr/>
         </p:nvSpPr>
@@ -38095,7 +38002,7 @@
       </p:sp>
       <p:sp>
         <p:nvSpPr>
-          <p:cNvPr id="433" name="Text 1"/>
+          <p:cNvPr id="431" name="Text 1"/>
           <p:cNvSpPr/>
           <p:nvPr/>
         </p:nvSpPr>
@@ -38156,7 +38063,7 @@
       </p:sp>
       <p:sp>
         <p:nvSpPr>
-          <p:cNvPr id="434" name="Shape 2"/>
+          <p:cNvPr id="432" name="Shape 2"/>
           <p:cNvSpPr/>
           <p:nvPr/>
         </p:nvSpPr>
@@ -38201,7 +38108,7 @@
       </p:sp>
       <p:sp>
         <p:nvSpPr>
-          <p:cNvPr id="435" name="Text 3"/>
+          <p:cNvPr id="433" name="Text 3"/>
           <p:cNvSpPr/>
           <p:nvPr/>
         </p:nvSpPr>
@@ -38262,7 +38169,7 @@
       </p:sp>
       <p:sp>
         <p:nvSpPr>
-          <p:cNvPr id="436" name="Text 4"/>
+          <p:cNvPr id="434" name="Text 4"/>
           <p:cNvSpPr/>
           <p:nvPr/>
         </p:nvSpPr>
@@ -38323,7 +38230,7 @@
       </p:sp>
       <p:sp>
         <p:nvSpPr>
-          <p:cNvPr id="437" name="Shape 5"/>
+          <p:cNvPr id="435" name="Shape 5"/>
           <p:cNvSpPr/>
           <p:nvPr/>
         </p:nvSpPr>
@@ -38368,7 +38275,7 @@
       </p:sp>
       <p:sp>
         <p:nvSpPr>
-          <p:cNvPr id="438" name="Text 6"/>
+          <p:cNvPr id="436" name="Text 6"/>
           <p:cNvSpPr/>
           <p:nvPr/>
         </p:nvSpPr>
@@ -38429,7 +38336,7 @@
       </p:sp>
       <p:sp>
         <p:nvSpPr>
-          <p:cNvPr id="439" name="Text 7"/>
+          <p:cNvPr id="437" name="Text 7"/>
           <p:cNvSpPr/>
           <p:nvPr/>
         </p:nvSpPr>
@@ -38490,7 +38397,7 @@
       </p:sp>
       <p:sp>
         <p:nvSpPr>
-          <p:cNvPr id="440" name="Shape 8"/>
+          <p:cNvPr id="438" name="Shape 8"/>
           <p:cNvSpPr/>
           <p:nvPr/>
         </p:nvSpPr>
@@ -38535,7 +38442,7 @@
       </p:sp>
       <p:sp>
         <p:nvSpPr>
-          <p:cNvPr id="441" name="Text 9"/>
+          <p:cNvPr id="439" name="Text 9"/>
           <p:cNvSpPr/>
           <p:nvPr/>
         </p:nvSpPr>
@@ -38596,7 +38503,7 @@
       </p:sp>
       <p:sp>
         <p:nvSpPr>
-          <p:cNvPr id="442" name="Text 10"/>
+          <p:cNvPr id="440" name="Text 10"/>
           <p:cNvSpPr/>
           <p:nvPr/>
         </p:nvSpPr>
@@ -38657,7 +38564,7 @@
       </p:sp>
       <p:sp>
         <p:nvSpPr>
-          <p:cNvPr id="443" name="Shape 11"/>
+          <p:cNvPr id="441" name="Shape 11"/>
           <p:cNvSpPr/>
           <p:nvPr/>
         </p:nvSpPr>
@@ -38702,7 +38609,7 @@
       </p:sp>
       <p:sp>
         <p:nvSpPr>
-          <p:cNvPr id="444" name="Text 12"/>
+          <p:cNvPr id="442" name="Text 12"/>
           <p:cNvSpPr/>
           <p:nvPr/>
         </p:nvSpPr>
@@ -38763,7 +38670,7 @@
       </p:sp>
       <p:sp>
         <p:nvSpPr>
-          <p:cNvPr id="445" name="Text 13"/>
+          <p:cNvPr id="443" name="Text 13"/>
           <p:cNvSpPr/>
           <p:nvPr/>
         </p:nvSpPr>
@@ -38824,7 +38731,7 @@
       </p:sp>
       <p:sp>
         <p:nvSpPr>
-          <p:cNvPr id="446" name="Text 14"/>
+          <p:cNvPr id="444" name="Text 14"/>
           <p:cNvSpPr/>
           <p:nvPr/>
         </p:nvSpPr>
@@ -38885,7 +38792,7 @@
       </p:sp>
       <p:sp>
         <p:nvSpPr>
-          <p:cNvPr id="447" name="Text 15"/>
+          <p:cNvPr id="445" name="Text 15"/>
           <p:cNvSpPr/>
           <p:nvPr/>
         </p:nvSpPr>
@@ -38976,7 +38883,7 @@
       </p:grpSpPr>
       <p:sp>
         <p:nvSpPr>
-          <p:cNvPr id="448" name="Text 0"/>
+          <p:cNvPr id="446" name="Text 0"/>
           <p:cNvSpPr/>
           <p:nvPr/>
         </p:nvSpPr>
@@ -39037,7 +38944,7 @@
       </p:sp>
       <p:sp>
         <p:nvSpPr>
-          <p:cNvPr id="449" name="Shape 1"/>
+          <p:cNvPr id="447" name="Shape 1"/>
           <p:cNvSpPr/>
           <p:nvPr/>
         </p:nvSpPr>
@@ -39082,7 +38989,7 @@
       </p:sp>
       <p:sp>
         <p:nvSpPr>
-          <p:cNvPr id="450" name="Text 2"/>
+          <p:cNvPr id="448" name="Text 2"/>
           <p:cNvSpPr/>
           <p:nvPr/>
         </p:nvSpPr>
@@ -39143,7 +39050,7 @@
       </p:sp>
       <p:sp>
         <p:nvSpPr>
-          <p:cNvPr id="451" name="Text 3"/>
+          <p:cNvPr id="449" name="Text 3"/>
           <p:cNvSpPr/>
           <p:nvPr/>
         </p:nvSpPr>
@@ -39204,7 +39111,7 @@
       </p:sp>
       <p:sp>
         <p:nvSpPr>
-          <p:cNvPr id="452" name="Text 4"/>
+          <p:cNvPr id="450" name="Text 4"/>
           <p:cNvSpPr/>
           <p:nvPr/>
         </p:nvSpPr>
@@ -39265,7 +39172,7 @@
       </p:sp>
       <p:sp>
         <p:nvSpPr>
-          <p:cNvPr id="453" name="Shape 5"/>
+          <p:cNvPr id="451" name="Shape 5"/>
           <p:cNvSpPr/>
           <p:nvPr/>
         </p:nvSpPr>
@@ -39310,7 +39217,7 @@
       </p:sp>
       <p:sp>
         <p:nvSpPr>
-          <p:cNvPr id="454" name="Text 6"/>
+          <p:cNvPr id="452" name="Text 6"/>
           <p:cNvSpPr/>
           <p:nvPr/>
         </p:nvSpPr>
@@ -39371,7 +39278,7 @@
       </p:sp>
       <p:sp>
         <p:nvSpPr>
-          <p:cNvPr id="455" name="Text 7"/>
+          <p:cNvPr id="453" name="Text 7"/>
           <p:cNvSpPr/>
           <p:nvPr/>
         </p:nvSpPr>
@@ -39432,7 +39339,7 @@
       </p:sp>
       <p:sp>
         <p:nvSpPr>
-          <p:cNvPr id="456" name="Text 8"/>
+          <p:cNvPr id="454" name="Text 8"/>
           <p:cNvSpPr/>
           <p:nvPr/>
         </p:nvSpPr>
@@ -39493,7 +39400,7 @@
       </p:sp>
       <p:sp>
         <p:nvSpPr>
-          <p:cNvPr id="457" name="Shape 9"/>
+          <p:cNvPr id="455" name="Shape 9"/>
           <p:cNvSpPr/>
           <p:nvPr/>
         </p:nvSpPr>
@@ -39538,7 +39445,7 @@
       </p:sp>
       <p:sp>
         <p:nvSpPr>
-          <p:cNvPr id="458" name="Text 10"/>
+          <p:cNvPr id="456" name="Text 10"/>
           <p:cNvSpPr/>
           <p:nvPr/>
         </p:nvSpPr>
@@ -39599,7 +39506,7 @@
       </p:sp>
       <p:sp>
         <p:nvSpPr>
-          <p:cNvPr id="459" name="Text 11"/>
+          <p:cNvPr id="457" name="Text 11"/>
           <p:cNvSpPr/>
           <p:nvPr/>
         </p:nvSpPr>
@@ -39660,7 +39567,7 @@
       </p:sp>
       <p:sp>
         <p:nvSpPr>
-          <p:cNvPr id="460" name="Text 12"/>
+          <p:cNvPr id="458" name="Text 12"/>
           <p:cNvSpPr/>
           <p:nvPr/>
         </p:nvSpPr>
@@ -39721,7 +39628,7 @@
       </p:sp>
       <p:sp>
         <p:nvSpPr>
-          <p:cNvPr id="461" name="Shape 13"/>
+          <p:cNvPr id="459" name="Shape 13"/>
           <p:cNvSpPr/>
           <p:nvPr/>
         </p:nvSpPr>
@@ -39766,7 +39673,7 @@
       </p:sp>
       <p:sp>
         <p:nvSpPr>
-          <p:cNvPr id="462" name="Text 14"/>
+          <p:cNvPr id="460" name="Text 14"/>
           <p:cNvSpPr/>
           <p:nvPr/>
         </p:nvSpPr>
@@ -39827,7 +39734,7 @@
       </p:sp>
       <p:sp>
         <p:nvSpPr>
-          <p:cNvPr id="463" name="Text 15"/>
+          <p:cNvPr id="461" name="Text 15"/>
           <p:cNvSpPr/>
           <p:nvPr/>
         </p:nvSpPr>
@@ -39888,7 +39795,7 @@
       </p:sp>
       <p:sp>
         <p:nvSpPr>
-          <p:cNvPr id="464" name="Text 16"/>
+          <p:cNvPr id="462" name="Text 16"/>
           <p:cNvSpPr/>
           <p:nvPr/>
         </p:nvSpPr>
@@ -39949,7 +39856,7 @@
       </p:sp>
       <p:sp>
         <p:nvSpPr>
-          <p:cNvPr id="465" name="Shape 17"/>
+          <p:cNvPr id="463" name="Shape 17"/>
           <p:cNvSpPr/>
           <p:nvPr/>
         </p:nvSpPr>
@@ -39997,7 +39904,7 @@
       </p:sp>
       <p:sp>
         <p:nvSpPr>
-          <p:cNvPr id="466" name="Text 18"/>
+          <p:cNvPr id="464" name="Text 18"/>
           <p:cNvSpPr/>
           <p:nvPr/>
         </p:nvSpPr>
@@ -40070,7 +39977,7 @@
       </p:sp>
       <p:sp>
         <p:nvSpPr>
-          <p:cNvPr id="467" name="Text 19"/>
+          <p:cNvPr id="465" name="Text 19"/>
           <p:cNvSpPr/>
           <p:nvPr/>
         </p:nvSpPr>
@@ -40131,7 +40038,7 @@
       </p:sp>
       <p:sp>
         <p:nvSpPr>
-          <p:cNvPr id="468" name="Text 20"/>
+          <p:cNvPr id="466" name="Text 20"/>
           <p:cNvSpPr/>
           <p:nvPr/>
         </p:nvSpPr>
@@ -40192,7 +40099,7 @@
       </p:sp>
       <p:sp>
         <p:nvSpPr>
-          <p:cNvPr id="469" name="Text 21"/>
+          <p:cNvPr id="467" name="Text 21"/>
           <p:cNvSpPr/>
           <p:nvPr/>
         </p:nvSpPr>
@@ -40283,7 +40190,7 @@
       </p:grpSpPr>
       <p:sp>
         <p:nvSpPr>
-          <p:cNvPr id="44" name="Text 0"/>
+          <p:cNvPr id="42" name="Text 0"/>
           <p:cNvSpPr/>
           <p:nvPr/>
         </p:nvSpPr>
@@ -40344,7 +40251,7 @@
       </p:sp>
       <p:sp>
         <p:nvSpPr>
-          <p:cNvPr id="45" name="Text 1"/>
+          <p:cNvPr id="43" name="Text 1"/>
           <p:cNvSpPr/>
           <p:nvPr/>
         </p:nvSpPr>
@@ -40405,7 +40312,7 @@
       </p:sp>
       <p:sp>
         <p:nvSpPr>
-          <p:cNvPr id="46" name="Shape 2"/>
+          <p:cNvPr id="44" name="Shape 2"/>
           <p:cNvSpPr/>
           <p:nvPr/>
         </p:nvSpPr>
@@ -40453,7 +40360,7 @@
       </p:sp>
       <p:sp>
         <p:nvSpPr>
-          <p:cNvPr id="47" name="Text 3"/>
+          <p:cNvPr id="45" name="Text 3"/>
           <p:cNvSpPr/>
           <p:nvPr/>
         </p:nvSpPr>
@@ -40514,7 +40421,7 @@
       </p:sp>
       <p:sp>
         <p:nvSpPr>
-          <p:cNvPr id="48" name="Text 4"/>
+          <p:cNvPr id="46" name="Text 4"/>
           <p:cNvSpPr/>
           <p:nvPr/>
         </p:nvSpPr>
@@ -40605,7 +40512,7 @@
       </p:sp>
       <p:sp>
         <p:nvSpPr>
-          <p:cNvPr id="49" name="Shape 5"/>
+          <p:cNvPr id="47" name="Shape 5"/>
           <p:cNvSpPr/>
           <p:nvPr/>
         </p:nvSpPr>
@@ -40653,7 +40560,7 @@
       </p:sp>
       <p:sp>
         <p:nvSpPr>
-          <p:cNvPr id="50" name="Text 6"/>
+          <p:cNvPr id="48" name="Text 6"/>
           <p:cNvSpPr/>
           <p:nvPr/>
         </p:nvSpPr>
@@ -40714,7 +40621,7 @@
       </p:sp>
       <p:sp>
         <p:nvSpPr>
-          <p:cNvPr id="51" name="Text 7"/>
+          <p:cNvPr id="49" name="Text 7"/>
           <p:cNvSpPr/>
           <p:nvPr/>
         </p:nvSpPr>
@@ -40805,7 +40712,7 @@
       </p:sp>
       <p:sp>
         <p:nvSpPr>
-          <p:cNvPr id="52" name="Text 8"/>
+          <p:cNvPr id="50" name="Text 8"/>
           <p:cNvSpPr/>
           <p:nvPr/>
         </p:nvSpPr>
@@ -40866,7 +40773,7 @@
       </p:sp>
       <p:sp>
         <p:nvSpPr>
-          <p:cNvPr id="53" name="Shape 9"/>
+          <p:cNvPr id="51" name="Shape 9"/>
           <p:cNvSpPr/>
           <p:nvPr/>
         </p:nvSpPr>
@@ -40914,7 +40821,7 @@
       </p:sp>
       <p:sp>
         <p:nvSpPr>
-          <p:cNvPr id="54" name="Text 10"/>
+          <p:cNvPr id="52" name="Text 10"/>
           <p:cNvSpPr/>
           <p:nvPr/>
         </p:nvSpPr>
@@ -40975,7 +40882,7 @@
       </p:sp>
       <p:sp>
         <p:nvSpPr>
-          <p:cNvPr id="55" name="Text 11"/>
+          <p:cNvPr id="53" name="Text 11"/>
           <p:cNvSpPr/>
           <p:nvPr/>
         </p:nvSpPr>
@@ -41036,7 +40943,7 @@
       </p:sp>
       <p:sp>
         <p:nvSpPr>
-          <p:cNvPr id="56" name="Shape 12"/>
+          <p:cNvPr id="54" name="Shape 12"/>
           <p:cNvSpPr/>
           <p:nvPr/>
         </p:nvSpPr>
@@ -41084,7 +40991,7 @@
       </p:sp>
       <p:sp>
         <p:nvSpPr>
-          <p:cNvPr id="57" name="Text 13"/>
+          <p:cNvPr id="55" name="Text 13"/>
           <p:cNvSpPr/>
           <p:nvPr/>
         </p:nvSpPr>
@@ -41145,7 +41052,7 @@
       </p:sp>
       <p:sp>
         <p:nvSpPr>
-          <p:cNvPr id="58" name="Text 14"/>
+          <p:cNvPr id="56" name="Text 14"/>
           <p:cNvSpPr/>
           <p:nvPr/>
         </p:nvSpPr>
@@ -41206,7 +41113,7 @@
       </p:sp>
       <p:sp>
         <p:nvSpPr>
-          <p:cNvPr id="59" name="Text 15"/>
+          <p:cNvPr id="57" name="Text 15"/>
           <p:cNvSpPr/>
           <p:nvPr/>
         </p:nvSpPr>
@@ -41267,7 +41174,7 @@
       </p:sp>
       <p:sp>
         <p:nvSpPr>
-          <p:cNvPr id="60" name="Text 16"/>
+          <p:cNvPr id="58" name="Text 16"/>
           <p:cNvSpPr/>
           <p:nvPr/>
         </p:nvSpPr>
@@ -41328,7 +41235,7 @@
       </p:sp>
       <p:sp>
         <p:nvSpPr>
-          <p:cNvPr id="61" name="Text 17"/>
+          <p:cNvPr id="59" name="Text 17"/>
           <p:cNvSpPr/>
           <p:nvPr/>
         </p:nvSpPr>
@@ -41389,7 +41296,7 @@
       </p:sp>
       <p:sp>
         <p:nvSpPr>
-          <p:cNvPr id="62" name="Text 18"/>
+          <p:cNvPr id="60" name="Text 18"/>
           <p:cNvSpPr/>
           <p:nvPr/>
         </p:nvSpPr>
@@ -41450,7 +41357,7 @@
       </p:sp>
       <p:sp>
         <p:nvSpPr>
-          <p:cNvPr id="63" name="Text 19"/>
+          <p:cNvPr id="61" name="Text 19"/>
           <p:cNvSpPr/>
           <p:nvPr/>
         </p:nvSpPr>
@@ -41511,7 +41418,7 @@
       </p:sp>
       <p:sp>
         <p:nvSpPr>
-          <p:cNvPr id="64" name="Text 20"/>
+          <p:cNvPr id="62" name="Text 20"/>
           <p:cNvSpPr/>
           <p:nvPr/>
         </p:nvSpPr>
@@ -41572,7 +41479,7 @@
       </p:sp>
       <p:sp>
         <p:nvSpPr>
-          <p:cNvPr id="65" name="Text 21"/>
+          <p:cNvPr id="63" name="Text 21"/>
           <p:cNvSpPr/>
           <p:nvPr/>
         </p:nvSpPr>
@@ -41633,7 +41540,7 @@
       </p:sp>
       <p:sp>
         <p:nvSpPr>
-          <p:cNvPr id="66" name="Text 22"/>
+          <p:cNvPr id="64" name="Text 22"/>
           <p:cNvSpPr/>
           <p:nvPr/>
         </p:nvSpPr>
@@ -41694,7 +41601,7 @@
       </p:sp>
       <p:sp>
         <p:nvSpPr>
-          <p:cNvPr id="67" name="Text 23"/>
+          <p:cNvPr id="65" name="Text 23"/>
           <p:cNvSpPr/>
           <p:nvPr/>
         </p:nvSpPr>
@@ -41792,7 +41699,7 @@
       </p:grpSpPr>
       <p:sp>
         <p:nvSpPr>
-          <p:cNvPr id="68" name="Text 0"/>
+          <p:cNvPr id="66" name="Text 0"/>
           <p:cNvSpPr/>
           <p:nvPr/>
         </p:nvSpPr>
@@ -41853,7 +41760,7 @@
       </p:sp>
       <p:sp>
         <p:nvSpPr>
-          <p:cNvPr id="69" name="Text 1"/>
+          <p:cNvPr id="67" name="Text 1"/>
           <p:cNvSpPr/>
           <p:nvPr/>
         </p:nvSpPr>
@@ -41944,7 +41851,7 @@
       </p:grpSpPr>
       <p:sp>
         <p:nvSpPr>
-          <p:cNvPr id="70" name="Text 0"/>
+          <p:cNvPr id="68" name="Text 0"/>
           <p:cNvSpPr/>
           <p:nvPr/>
         </p:nvSpPr>
@@ -42005,7 +41912,7 @@
       </p:sp>
       <p:sp>
         <p:nvSpPr>
-          <p:cNvPr id="71" name="Text 1"/>
+          <p:cNvPr id="69" name="Text 1"/>
           <p:cNvSpPr/>
           <p:nvPr/>
         </p:nvSpPr>
@@ -42066,7 +41973,7 @@
       </p:sp>
       <p:sp>
         <p:nvSpPr>
-          <p:cNvPr id="72" name="Shape 2"/>
+          <p:cNvPr id="70" name="Shape 2"/>
           <p:cNvSpPr/>
           <p:nvPr/>
         </p:nvSpPr>
@@ -42114,7 +42021,7 @@
       </p:sp>
       <p:sp>
         <p:nvSpPr>
-          <p:cNvPr id="73" name="Text 3"/>
+          <p:cNvPr id="71" name="Text 3"/>
           <p:cNvSpPr/>
           <p:nvPr/>
         </p:nvSpPr>
@@ -42235,7 +42142,7 @@
       </p:sp>
       <p:sp>
         <p:nvSpPr>
-          <p:cNvPr id="74" name="Shape 4"/>
+          <p:cNvPr id="72" name="Shape 4"/>
           <p:cNvSpPr/>
           <p:nvPr/>
         </p:nvSpPr>
@@ -42283,7 +42190,7 @@
       </p:sp>
       <p:sp>
         <p:nvSpPr>
-          <p:cNvPr id="75" name="Text 5"/>
+          <p:cNvPr id="73" name="Text 5"/>
           <p:cNvSpPr/>
           <p:nvPr/>
         </p:nvSpPr>
@@ -42344,7 +42251,7 @@
       </p:sp>
       <p:sp>
         <p:nvSpPr>
-          <p:cNvPr id="76" name="Text 6"/>
+          <p:cNvPr id="74" name="Text 6"/>
           <p:cNvSpPr/>
           <p:nvPr/>
         </p:nvSpPr>
@@ -42405,7 +42312,7 @@
       </p:sp>
       <p:sp>
         <p:nvSpPr>
-          <p:cNvPr id="77" name="Shape 7"/>
+          <p:cNvPr id="75" name="Shape 7"/>
           <p:cNvSpPr/>
           <p:nvPr/>
         </p:nvSpPr>
@@ -42453,7 +42360,7 @@
       </p:sp>
       <p:sp>
         <p:nvSpPr>
-          <p:cNvPr id="78" name="Text 8"/>
+          <p:cNvPr id="76" name="Text 8"/>
           <p:cNvSpPr/>
           <p:nvPr/>
         </p:nvSpPr>
@@ -42514,7 +42421,7 @@
       </p:sp>
       <p:sp>
         <p:nvSpPr>
-          <p:cNvPr id="79" name="Text 9"/>
+          <p:cNvPr id="77" name="Text 9"/>
           <p:cNvSpPr/>
           <p:nvPr/>
         </p:nvSpPr>
@@ -42575,7 +42482,7 @@
       </p:sp>
       <p:sp>
         <p:nvSpPr>
-          <p:cNvPr id="80" name="Shape 10"/>
+          <p:cNvPr id="78" name="Shape 10"/>
           <p:cNvSpPr/>
           <p:nvPr/>
         </p:nvSpPr>
@@ -42623,7 +42530,7 @@
       </p:sp>
       <p:sp>
         <p:nvSpPr>
-          <p:cNvPr id="81" name="Text 11"/>
+          <p:cNvPr id="79" name="Text 11"/>
           <p:cNvSpPr/>
           <p:nvPr/>
         </p:nvSpPr>
@@ -42684,7 +42591,7 @@
       </p:sp>
       <p:sp>
         <p:nvSpPr>
-          <p:cNvPr id="82" name="Text 12"/>
+          <p:cNvPr id="80" name="Text 12"/>
           <p:cNvSpPr/>
           <p:nvPr/>
         </p:nvSpPr>
@@ -42745,7 +42652,7 @@
       </p:sp>
       <p:sp>
         <p:nvSpPr>
-          <p:cNvPr id="83" name="Shape 13"/>
+          <p:cNvPr id="81" name="Shape 13"/>
           <p:cNvSpPr/>
           <p:nvPr/>
         </p:nvSpPr>
@@ -42793,7 +42700,7 @@
       </p:sp>
       <p:sp>
         <p:nvSpPr>
-          <p:cNvPr id="84" name="Text 14"/>
+          <p:cNvPr id="82" name="Text 14"/>
           <p:cNvSpPr/>
           <p:nvPr/>
         </p:nvSpPr>
@@ -42866,7 +42773,7 @@
       </p:sp>
       <p:sp>
         <p:nvSpPr>
-          <p:cNvPr id="85" name="Text 15"/>
+          <p:cNvPr id="83" name="Text 15"/>
           <p:cNvSpPr/>
           <p:nvPr/>
         </p:nvSpPr>
@@ -42927,7 +42834,7 @@
       </p:sp>
       <p:sp>
         <p:nvSpPr>
-          <p:cNvPr id="86" name="Text 16"/>
+          <p:cNvPr id="84" name="Text 16"/>
           <p:cNvSpPr/>
           <p:nvPr/>
         </p:nvSpPr>
@@ -43018,7 +42925,7 @@
       </p:grpSpPr>
       <p:sp>
         <p:nvSpPr>
-          <p:cNvPr id="87" name="Text 0"/>
+          <p:cNvPr id="85" name="Text 0"/>
           <p:cNvSpPr/>
           <p:nvPr/>
         </p:nvSpPr>
@@ -43079,7 +42986,7 @@
       </p:sp>
       <p:sp>
         <p:nvSpPr>
-          <p:cNvPr id="88" name="Shape 1"/>
+          <p:cNvPr id="86" name="Shape 1"/>
           <p:cNvSpPr/>
           <p:nvPr/>
         </p:nvSpPr>
@@ -43127,7 +43034,7 @@
       </p:sp>
       <p:sp>
         <p:nvSpPr>
-          <p:cNvPr id="89" name="Text 2"/>
+          <p:cNvPr id="87" name="Text 2"/>
           <p:cNvSpPr/>
           <p:nvPr/>
         </p:nvSpPr>
@@ -43386,7 +43293,7 @@
       </p:sp>
       <p:sp>
         <p:nvSpPr>
-          <p:cNvPr id="90" name="Shape 3"/>
+          <p:cNvPr id="88" name="Shape 3"/>
           <p:cNvSpPr/>
           <p:nvPr/>
         </p:nvSpPr>
@@ -43434,7 +43341,7 @@
       </p:sp>
       <p:sp>
         <p:nvSpPr>
-          <p:cNvPr id="91" name="Text 4"/>
+          <p:cNvPr id="89" name="Text 4"/>
           <p:cNvSpPr/>
           <p:nvPr/>
         </p:nvSpPr>
@@ -43681,7 +43588,7 @@
       </p:sp>
       <p:sp>
         <p:nvSpPr>
-          <p:cNvPr id="92" name="Shape 5"/>
+          <p:cNvPr id="90" name="Shape 5"/>
           <p:cNvSpPr/>
           <p:nvPr/>
         </p:nvSpPr>
@@ -43729,7 +43636,7 @@
       </p:sp>
       <p:sp>
         <p:nvSpPr>
-          <p:cNvPr id="93" name="Text 6"/>
+          <p:cNvPr id="91" name="Text 6"/>
           <p:cNvSpPr/>
           <p:nvPr/>
         </p:nvSpPr>
@@ -43802,7 +43709,7 @@
       </p:sp>
       <p:sp>
         <p:nvSpPr>
-          <p:cNvPr id="94" name="Text 7"/>
+          <p:cNvPr id="92" name="Text 7"/>
           <p:cNvSpPr/>
           <p:nvPr/>
         </p:nvSpPr>
@@ -43863,7 +43770,7 @@
       </p:sp>
       <p:sp>
         <p:nvSpPr>
-          <p:cNvPr id="95" name="Shape 8"/>
+          <p:cNvPr id="93" name="Shape 8"/>
           <p:cNvSpPr/>
           <p:nvPr/>
         </p:nvSpPr>
@@ -43911,7 +43818,7 @@
       </p:sp>
       <p:sp>
         <p:nvSpPr>
-          <p:cNvPr id="96" name="Text 9"/>
+          <p:cNvPr id="94" name="Text 9"/>
           <p:cNvSpPr/>
           <p:nvPr/>
         </p:nvSpPr>
@@ -44002,7 +43909,7 @@
       </p:sp>
       <p:sp>
         <p:nvSpPr>
-          <p:cNvPr id="97" name="Text 10"/>
+          <p:cNvPr id="95" name="Text 10"/>
           <p:cNvSpPr/>
           <p:nvPr/>
         </p:nvSpPr>
@@ -44063,7 +43970,7 @@
       </p:sp>
       <p:sp>
         <p:nvSpPr>
-          <p:cNvPr id="98" name="Text 11"/>
+          <p:cNvPr id="96" name="Text 11"/>
           <p:cNvSpPr/>
           <p:nvPr/>
         </p:nvSpPr>
@@ -44154,7 +44061,7 @@
       </p:grpSpPr>
       <p:sp>
         <p:nvSpPr>
-          <p:cNvPr id="99" name="Text 0"/>
+          <p:cNvPr id="97" name="Text 0"/>
           <p:cNvSpPr/>
           <p:nvPr/>
         </p:nvSpPr>
@@ -44215,7 +44122,7 @@
       </p:sp>
       <p:graphicFrame>
         <p:nvGraphicFramePr>
-          <p:cNvPr id="100" name="Table 0"/>
+          <p:cNvPr id="98" name="Table 0"/>
           <p:cNvGraphicFramePr/>
           <p:nvPr/>
         </p:nvGraphicFramePr>
@@ -45238,7 +45145,7 @@
       </p:graphicFrame>
       <p:sp>
         <p:nvSpPr>
-          <p:cNvPr id="101" name="Shape 1"/>
+          <p:cNvPr id="99" name="Shape 1"/>
           <p:cNvSpPr/>
           <p:nvPr/>
         </p:nvSpPr>
@@ -45286,7 +45193,7 @@
       </p:sp>
       <p:sp>
         <p:nvSpPr>
-          <p:cNvPr id="102" name="Text 2"/>
+          <p:cNvPr id="100" name="Text 2"/>
           <p:cNvSpPr/>
           <p:nvPr/>
         </p:nvSpPr>
@@ -45359,7 +45266,7 @@
       </p:sp>
       <p:sp>
         <p:nvSpPr>
-          <p:cNvPr id="103" name="Text 3"/>
+          <p:cNvPr id="101" name="Text 3"/>
           <p:cNvSpPr/>
           <p:nvPr/>
         </p:nvSpPr>
@@ -45420,7 +45327,7 @@
       </p:sp>
       <p:sp>
         <p:nvSpPr>
-          <p:cNvPr id="104" name="Text 4"/>
+          <p:cNvPr id="102" name="Text 4"/>
           <p:cNvSpPr/>
           <p:nvPr/>
         </p:nvSpPr>
@@ -45511,7 +45418,7 @@
       </p:grpSpPr>
       <p:sp>
         <p:nvSpPr>
-          <p:cNvPr id="105" name="Text 0"/>
+          <p:cNvPr id="103" name="Text 0"/>
           <p:cNvSpPr/>
           <p:nvPr/>
         </p:nvSpPr>
@@ -45572,7 +45479,7 @@
       </p:sp>
       <p:sp>
         <p:nvSpPr>
-          <p:cNvPr id="106" name="Shape 1"/>
+          <p:cNvPr id="104" name="Shape 1"/>
           <p:cNvSpPr/>
           <p:nvPr/>
         </p:nvSpPr>
@@ -45620,7 +45527,7 @@
       </p:sp>
       <p:sp>
         <p:nvSpPr>
-          <p:cNvPr id="107" name="Text 2"/>
+          <p:cNvPr id="105" name="Text 2"/>
           <p:cNvSpPr/>
           <p:nvPr/>
         </p:nvSpPr>
@@ -45879,7 +45786,7 @@
       </p:sp>
       <p:sp>
         <p:nvSpPr>
-          <p:cNvPr id="108" name="Shape 3"/>
+          <p:cNvPr id="106" name="Shape 3"/>
           <p:cNvSpPr/>
           <p:nvPr/>
         </p:nvSpPr>
@@ -45927,7 +45834,7 @@
       </p:sp>
       <p:sp>
         <p:nvSpPr>
-          <p:cNvPr id="109" name="Text 4"/>
+          <p:cNvPr id="107" name="Text 4"/>
           <p:cNvSpPr/>
           <p:nvPr/>
         </p:nvSpPr>
@@ -45988,7 +45895,7 @@
       </p:sp>
       <p:sp>
         <p:nvSpPr>
-          <p:cNvPr id="110" name="Text 5"/>
+          <p:cNvPr id="108" name="Text 5"/>
           <p:cNvSpPr/>
           <p:nvPr/>
         </p:nvSpPr>
@@ -46049,7 +45956,7 @@
       </p:sp>
       <p:sp>
         <p:nvSpPr>
-          <p:cNvPr id="111" name="Text 6"/>
+          <p:cNvPr id="109" name="Text 6"/>
           <p:cNvSpPr/>
           <p:nvPr/>
         </p:nvSpPr>
@@ -46110,7 +46017,7 @@
       </p:sp>
       <p:sp>
         <p:nvSpPr>
-          <p:cNvPr id="112" name="Shape 7"/>
+          <p:cNvPr id="110" name="Shape 7"/>
           <p:cNvSpPr/>
           <p:nvPr/>
         </p:nvSpPr>
@@ -46158,7 +46065,7 @@
       </p:sp>
       <p:sp>
         <p:nvSpPr>
-          <p:cNvPr id="113" name="Text 8"/>
+          <p:cNvPr id="111" name="Text 8"/>
           <p:cNvSpPr/>
           <p:nvPr/>
         </p:nvSpPr>
@@ -46231,7 +46138,7 @@
       </p:sp>
       <p:sp>
         <p:nvSpPr>
-          <p:cNvPr id="114" name="Text 9"/>
+          <p:cNvPr id="112" name="Text 9"/>
           <p:cNvSpPr/>
           <p:nvPr/>
         </p:nvSpPr>
@@ -46292,7 +46199,7 @@
       </p:sp>
       <p:sp>
         <p:nvSpPr>
-          <p:cNvPr id="115" name="Text 10"/>
+          <p:cNvPr id="113" name="Text 10"/>
           <p:cNvSpPr/>
           <p:nvPr/>
         </p:nvSpPr>
@@ -46353,7 +46260,7 @@
       </p:sp>
       <p:sp>
         <p:nvSpPr>
-          <p:cNvPr id="116" name="Text 11"/>
+          <p:cNvPr id="114" name="Text 11"/>
           <p:cNvSpPr/>
           <p:nvPr/>
         </p:nvSpPr>
